--- a/Documentation/User Manual Source/material User Manual.pptx
+++ b/Documentation/User Manual Source/material User Manual.pptx
@@ -23,11 +23,13 @@
     <p:sldId id="303" r:id="rId17"/>
     <p:sldId id="299" r:id="rId18"/>
     <p:sldId id="300" r:id="rId19"/>
-    <p:sldId id="309" r:id="rId20"/>
-    <p:sldId id="310" r:id="rId21"/>
-    <p:sldId id="311" r:id="rId22"/>
-    <p:sldId id="312" r:id="rId23"/>
-    <p:sldId id="313" r:id="rId24"/>
+    <p:sldId id="314" r:id="rId20"/>
+    <p:sldId id="315" r:id="rId21"/>
+    <p:sldId id="309" r:id="rId22"/>
+    <p:sldId id="310" r:id="rId23"/>
+    <p:sldId id="311" r:id="rId24"/>
+    <p:sldId id="312" r:id="rId25"/>
+    <p:sldId id="313" r:id="rId26"/>
   </p:sldIdLst>
   <p:sldSz cx="13355638" cy="6858000"/>
   <p:notesSz cx="7099300" cy="10234613"/>
@@ -1738,35 +1740,14 @@
           <a:avLst/>
         </a:prstGeom>
       </dgm:spPr>
-      <dgm:t>
-        <a:bodyPr/>
-        <a:lstStyle/>
-        <a:p>
-          <a:endParaRPr lang="de-DE"/>
-        </a:p>
-      </dgm:t>
     </dgm:pt>
     <dgm:pt modelId="{0892BC10-3644-4823-B89D-11F0C2A0F771}" type="pres">
       <dgm:prSet presAssocID="{43142F34-5FE6-4716-93C9-0F17EBFD5491}" presName="sibTrans" presStyleLbl="sibTrans2D1" presStyleIdx="0" presStyleCnt="12"/>
       <dgm:spPr/>
-      <dgm:t>
-        <a:bodyPr/>
-        <a:lstStyle/>
-        <a:p>
-          <a:endParaRPr lang="de-DE"/>
-        </a:p>
-      </dgm:t>
     </dgm:pt>
     <dgm:pt modelId="{DB4DA60E-000A-4337-852D-96EF7C39D962}" type="pres">
       <dgm:prSet presAssocID="{43142F34-5FE6-4716-93C9-0F17EBFD5491}" presName="connectorText" presStyleLbl="sibTrans2D1" presStyleIdx="0" presStyleCnt="12"/>
       <dgm:spPr/>
-      <dgm:t>
-        <a:bodyPr/>
-        <a:lstStyle/>
-        <a:p>
-          <a:endParaRPr lang="de-DE"/>
-        </a:p>
-      </dgm:t>
     </dgm:pt>
     <dgm:pt modelId="{06FA8772-39BB-4950-8AB7-DA8476193E4E}" type="pres">
       <dgm:prSet presAssocID="{574FCBEA-A47E-43A7-8317-33628CAA341B}" presName="node" presStyleLbl="node1" presStyleIdx="1" presStyleCnt="13">
@@ -1779,35 +1760,14 @@
           <a:avLst/>
         </a:prstGeom>
       </dgm:spPr>
-      <dgm:t>
-        <a:bodyPr/>
-        <a:lstStyle/>
-        <a:p>
-          <a:endParaRPr lang="de-DE"/>
-        </a:p>
-      </dgm:t>
     </dgm:pt>
     <dgm:pt modelId="{06CF654D-9472-4507-AC3F-439B723ED8AB}" type="pres">
       <dgm:prSet presAssocID="{7B68D348-6953-4C6A-8FC9-E212A8FABF61}" presName="sibTrans" presStyleLbl="sibTrans2D1" presStyleIdx="1" presStyleCnt="12"/>
       <dgm:spPr/>
-      <dgm:t>
-        <a:bodyPr/>
-        <a:lstStyle/>
-        <a:p>
-          <a:endParaRPr lang="de-DE"/>
-        </a:p>
-      </dgm:t>
     </dgm:pt>
     <dgm:pt modelId="{C637126D-415B-4E38-9E03-4FE65C68EC16}" type="pres">
       <dgm:prSet presAssocID="{7B68D348-6953-4C6A-8FC9-E212A8FABF61}" presName="connectorText" presStyleLbl="sibTrans2D1" presStyleIdx="1" presStyleCnt="12"/>
       <dgm:spPr/>
-      <dgm:t>
-        <a:bodyPr/>
-        <a:lstStyle/>
-        <a:p>
-          <a:endParaRPr lang="de-DE"/>
-        </a:p>
-      </dgm:t>
     </dgm:pt>
     <dgm:pt modelId="{A6063A21-8E14-40B2-B138-4B1A1BB1B1D8}" type="pres">
       <dgm:prSet presAssocID="{25BCFF31-D71F-4E48-A295-220D604F05EF}" presName="node" presStyleLbl="node1" presStyleIdx="2" presStyleCnt="13">
@@ -1820,35 +1780,14 @@
           <a:avLst/>
         </a:prstGeom>
       </dgm:spPr>
-      <dgm:t>
-        <a:bodyPr/>
-        <a:lstStyle/>
-        <a:p>
-          <a:endParaRPr lang="de-DE"/>
-        </a:p>
-      </dgm:t>
     </dgm:pt>
     <dgm:pt modelId="{635A1D8A-46DC-4AD3-9E91-95D195A7DE99}" type="pres">
       <dgm:prSet presAssocID="{149CC7A5-C1BF-42C4-A549-FA60D3292079}" presName="sibTrans" presStyleLbl="sibTrans2D1" presStyleIdx="2" presStyleCnt="12"/>
       <dgm:spPr/>
-      <dgm:t>
-        <a:bodyPr/>
-        <a:lstStyle/>
-        <a:p>
-          <a:endParaRPr lang="de-DE"/>
-        </a:p>
-      </dgm:t>
     </dgm:pt>
     <dgm:pt modelId="{9FD4F6CD-E583-4ABF-9845-219C3385CFBD}" type="pres">
       <dgm:prSet presAssocID="{149CC7A5-C1BF-42C4-A549-FA60D3292079}" presName="connectorText" presStyleLbl="sibTrans2D1" presStyleIdx="2" presStyleCnt="12"/>
       <dgm:spPr/>
-      <dgm:t>
-        <a:bodyPr/>
-        <a:lstStyle/>
-        <a:p>
-          <a:endParaRPr lang="de-DE"/>
-        </a:p>
-      </dgm:t>
     </dgm:pt>
     <dgm:pt modelId="{A68D0C7D-8FEC-42F0-A2DC-4509402569C2}" type="pres">
       <dgm:prSet presAssocID="{A5F9FCDE-9D6D-4822-8F01-34F8C2E9105D}" presName="node" presStyleLbl="node1" presStyleIdx="3" presStyleCnt="13">
@@ -1861,35 +1800,14 @@
           <a:avLst/>
         </a:prstGeom>
       </dgm:spPr>
-      <dgm:t>
-        <a:bodyPr/>
-        <a:lstStyle/>
-        <a:p>
-          <a:endParaRPr lang="de-DE"/>
-        </a:p>
-      </dgm:t>
     </dgm:pt>
     <dgm:pt modelId="{873C4CD3-24EF-4751-9ADD-4F53A6B7C77E}" type="pres">
       <dgm:prSet presAssocID="{CAEA8F5A-582F-4EF1-B76E-168EB4871699}" presName="sibTrans" presStyleLbl="sibTrans2D1" presStyleIdx="3" presStyleCnt="12"/>
       <dgm:spPr/>
-      <dgm:t>
-        <a:bodyPr/>
-        <a:lstStyle/>
-        <a:p>
-          <a:endParaRPr lang="de-DE"/>
-        </a:p>
-      </dgm:t>
     </dgm:pt>
     <dgm:pt modelId="{326A3C73-3762-4018-877B-B17EF4FBFF75}" type="pres">
       <dgm:prSet presAssocID="{CAEA8F5A-582F-4EF1-B76E-168EB4871699}" presName="connectorText" presStyleLbl="sibTrans2D1" presStyleIdx="3" presStyleCnt="12"/>
       <dgm:spPr/>
-      <dgm:t>
-        <a:bodyPr/>
-        <a:lstStyle/>
-        <a:p>
-          <a:endParaRPr lang="de-DE"/>
-        </a:p>
-      </dgm:t>
     </dgm:pt>
     <dgm:pt modelId="{06170233-3D6C-4E69-9046-59D53A3CADC0}" type="pres">
       <dgm:prSet presAssocID="{24CF9193-95F9-41B6-8D41-2F7ABCCB5D8C}" presName="node" presStyleLbl="node1" presStyleIdx="4" presStyleCnt="13">
@@ -1902,35 +1820,14 @@
           <a:avLst/>
         </a:prstGeom>
       </dgm:spPr>
-      <dgm:t>
-        <a:bodyPr/>
-        <a:lstStyle/>
-        <a:p>
-          <a:endParaRPr lang="de-DE"/>
-        </a:p>
-      </dgm:t>
     </dgm:pt>
     <dgm:pt modelId="{A334B57C-0E7C-467A-8A30-C48853BAC23D}" type="pres">
       <dgm:prSet presAssocID="{B23DABA0-AE96-4548-9519-AB119A87BFAC}" presName="sibTrans" presStyleLbl="sibTrans2D1" presStyleIdx="4" presStyleCnt="12"/>
       <dgm:spPr/>
-      <dgm:t>
-        <a:bodyPr/>
-        <a:lstStyle/>
-        <a:p>
-          <a:endParaRPr lang="de-DE"/>
-        </a:p>
-      </dgm:t>
     </dgm:pt>
     <dgm:pt modelId="{D7DBB1A4-600A-479E-A9AA-C2A98E17F164}" type="pres">
       <dgm:prSet presAssocID="{B23DABA0-AE96-4548-9519-AB119A87BFAC}" presName="connectorText" presStyleLbl="sibTrans2D1" presStyleIdx="4" presStyleCnt="12"/>
       <dgm:spPr/>
-      <dgm:t>
-        <a:bodyPr/>
-        <a:lstStyle/>
-        <a:p>
-          <a:endParaRPr lang="de-DE"/>
-        </a:p>
-      </dgm:t>
     </dgm:pt>
     <dgm:pt modelId="{75DCE0CE-C2B1-42AB-B381-E5DD711D1703}" type="pres">
       <dgm:prSet presAssocID="{8ADF894A-2067-4B82-87B1-8BC1DD1BA969}" presName="node" presStyleLbl="node1" presStyleIdx="5" presStyleCnt="13">
@@ -1943,35 +1840,14 @@
           <a:avLst/>
         </a:prstGeom>
       </dgm:spPr>
-      <dgm:t>
-        <a:bodyPr/>
-        <a:lstStyle/>
-        <a:p>
-          <a:endParaRPr lang="de-DE"/>
-        </a:p>
-      </dgm:t>
     </dgm:pt>
     <dgm:pt modelId="{2A6DD4BB-70B2-4F4C-BFCC-E3233D174642}" type="pres">
       <dgm:prSet presAssocID="{2593BF8B-5734-403B-9C07-4F5BA1DCCEF7}" presName="sibTrans" presStyleLbl="sibTrans2D1" presStyleIdx="5" presStyleCnt="12"/>
       <dgm:spPr/>
-      <dgm:t>
-        <a:bodyPr/>
-        <a:lstStyle/>
-        <a:p>
-          <a:endParaRPr lang="de-DE"/>
-        </a:p>
-      </dgm:t>
     </dgm:pt>
     <dgm:pt modelId="{2D6F8BA0-E44C-470C-8F1B-C94AD35EEC9E}" type="pres">
       <dgm:prSet presAssocID="{2593BF8B-5734-403B-9C07-4F5BA1DCCEF7}" presName="connectorText" presStyleLbl="sibTrans2D1" presStyleIdx="5" presStyleCnt="12"/>
       <dgm:spPr/>
-      <dgm:t>
-        <a:bodyPr/>
-        <a:lstStyle/>
-        <a:p>
-          <a:endParaRPr lang="de-DE"/>
-        </a:p>
-      </dgm:t>
     </dgm:pt>
     <dgm:pt modelId="{8C157F1D-A6F8-46A2-AEAD-56ABE0FEE6A6}" type="pres">
       <dgm:prSet presAssocID="{C71B5027-FF4E-4D83-B3CA-E710B98F159D}" presName="node" presStyleLbl="node1" presStyleIdx="6" presStyleCnt="13">
@@ -1984,35 +1860,14 @@
           <a:avLst/>
         </a:prstGeom>
       </dgm:spPr>
-      <dgm:t>
-        <a:bodyPr/>
-        <a:lstStyle/>
-        <a:p>
-          <a:endParaRPr lang="de-DE"/>
-        </a:p>
-      </dgm:t>
     </dgm:pt>
     <dgm:pt modelId="{91093355-EC6F-46FF-8CEC-A8C627874621}" type="pres">
       <dgm:prSet presAssocID="{A40D38F0-6F59-467E-B929-A27AF0EE629C}" presName="sibTrans" presStyleLbl="sibTrans2D1" presStyleIdx="6" presStyleCnt="12"/>
       <dgm:spPr/>
-      <dgm:t>
-        <a:bodyPr/>
-        <a:lstStyle/>
-        <a:p>
-          <a:endParaRPr lang="de-DE"/>
-        </a:p>
-      </dgm:t>
     </dgm:pt>
     <dgm:pt modelId="{C5FED364-5C09-4AD2-8FB5-201536BBD221}" type="pres">
       <dgm:prSet presAssocID="{A40D38F0-6F59-467E-B929-A27AF0EE629C}" presName="connectorText" presStyleLbl="sibTrans2D1" presStyleIdx="6" presStyleCnt="12"/>
       <dgm:spPr/>
-      <dgm:t>
-        <a:bodyPr/>
-        <a:lstStyle/>
-        <a:p>
-          <a:endParaRPr lang="de-DE"/>
-        </a:p>
-      </dgm:t>
     </dgm:pt>
     <dgm:pt modelId="{4EE45600-06B9-4BB4-8889-9530778E6CDB}" type="pres">
       <dgm:prSet presAssocID="{9AE07C70-5D79-444E-BBF3-31AEA74DCD3A}" presName="node" presStyleLbl="node1" presStyleIdx="7" presStyleCnt="13">
@@ -2025,35 +1880,14 @@
           <a:avLst/>
         </a:prstGeom>
       </dgm:spPr>
-      <dgm:t>
-        <a:bodyPr/>
-        <a:lstStyle/>
-        <a:p>
-          <a:endParaRPr lang="de-DE"/>
-        </a:p>
-      </dgm:t>
     </dgm:pt>
     <dgm:pt modelId="{A30F4025-B688-4D10-B020-CD25EB39E6F6}" type="pres">
       <dgm:prSet presAssocID="{BB892D82-B0D7-49D5-BBBA-084ABAB4F315}" presName="sibTrans" presStyleLbl="sibTrans2D1" presStyleIdx="7" presStyleCnt="12"/>
       <dgm:spPr/>
-      <dgm:t>
-        <a:bodyPr/>
-        <a:lstStyle/>
-        <a:p>
-          <a:endParaRPr lang="de-DE"/>
-        </a:p>
-      </dgm:t>
     </dgm:pt>
     <dgm:pt modelId="{29DD366A-BA02-40BE-BDA0-DFE06AAAD243}" type="pres">
       <dgm:prSet presAssocID="{BB892D82-B0D7-49D5-BBBA-084ABAB4F315}" presName="connectorText" presStyleLbl="sibTrans2D1" presStyleIdx="7" presStyleCnt="12"/>
       <dgm:spPr/>
-      <dgm:t>
-        <a:bodyPr/>
-        <a:lstStyle/>
-        <a:p>
-          <a:endParaRPr lang="de-DE"/>
-        </a:p>
-      </dgm:t>
     </dgm:pt>
     <dgm:pt modelId="{838CB19D-5E3F-49C9-956B-8AB95C278E9F}" type="pres">
       <dgm:prSet presAssocID="{9417F1E3-ECF8-47E5-9CC1-9EAFAD82A24F}" presName="node" presStyleLbl="node1" presStyleIdx="8" presStyleCnt="13">
@@ -2066,35 +1900,14 @@
           <a:avLst/>
         </a:prstGeom>
       </dgm:spPr>
-      <dgm:t>
-        <a:bodyPr/>
-        <a:lstStyle/>
-        <a:p>
-          <a:endParaRPr lang="de-DE"/>
-        </a:p>
-      </dgm:t>
     </dgm:pt>
     <dgm:pt modelId="{BAC245F5-CE43-4EA9-B488-3491FCA0A9B0}" type="pres">
       <dgm:prSet presAssocID="{119FAE41-C245-457C-A891-4182C4C5EF5A}" presName="sibTrans" presStyleLbl="sibTrans2D1" presStyleIdx="8" presStyleCnt="12"/>
       <dgm:spPr/>
-      <dgm:t>
-        <a:bodyPr/>
-        <a:lstStyle/>
-        <a:p>
-          <a:endParaRPr lang="de-DE"/>
-        </a:p>
-      </dgm:t>
     </dgm:pt>
     <dgm:pt modelId="{DA471338-5A72-4942-A2EF-855C3D09485D}" type="pres">
       <dgm:prSet presAssocID="{119FAE41-C245-457C-A891-4182C4C5EF5A}" presName="connectorText" presStyleLbl="sibTrans2D1" presStyleIdx="8" presStyleCnt="12"/>
       <dgm:spPr/>
-      <dgm:t>
-        <a:bodyPr/>
-        <a:lstStyle/>
-        <a:p>
-          <a:endParaRPr lang="de-DE"/>
-        </a:p>
-      </dgm:t>
     </dgm:pt>
     <dgm:pt modelId="{7B645699-3C4D-4AD0-918E-42FFF1B441B3}" type="pres">
       <dgm:prSet presAssocID="{14483E50-8305-4B57-963A-DBA0F22F8091}" presName="node" presStyleLbl="node1" presStyleIdx="9" presStyleCnt="13">
@@ -2107,35 +1920,14 @@
           <a:avLst/>
         </a:prstGeom>
       </dgm:spPr>
-      <dgm:t>
-        <a:bodyPr/>
-        <a:lstStyle/>
-        <a:p>
-          <a:endParaRPr lang="de-DE"/>
-        </a:p>
-      </dgm:t>
     </dgm:pt>
     <dgm:pt modelId="{F894151C-AC9B-46BF-80C0-9E9FB8DAD41C}" type="pres">
       <dgm:prSet presAssocID="{2F7CB78D-D6FB-4A19-9320-0347FAFDE6D9}" presName="sibTrans" presStyleLbl="sibTrans2D1" presStyleIdx="9" presStyleCnt="12"/>
       <dgm:spPr/>
-      <dgm:t>
-        <a:bodyPr/>
-        <a:lstStyle/>
-        <a:p>
-          <a:endParaRPr lang="de-DE"/>
-        </a:p>
-      </dgm:t>
     </dgm:pt>
     <dgm:pt modelId="{2AA9586E-C219-4E6E-868D-84BB47CC2C57}" type="pres">
       <dgm:prSet presAssocID="{2F7CB78D-D6FB-4A19-9320-0347FAFDE6D9}" presName="connectorText" presStyleLbl="sibTrans2D1" presStyleIdx="9" presStyleCnt="12"/>
       <dgm:spPr/>
-      <dgm:t>
-        <a:bodyPr/>
-        <a:lstStyle/>
-        <a:p>
-          <a:endParaRPr lang="de-DE"/>
-        </a:p>
-      </dgm:t>
     </dgm:pt>
     <dgm:pt modelId="{C87C9376-9B91-4483-A836-89258EE6FA85}" type="pres">
       <dgm:prSet presAssocID="{6EE17974-6FEB-4F0F-BAC1-E8DFD9FD4CB4}" presName="node" presStyleLbl="node1" presStyleIdx="10" presStyleCnt="13">
@@ -2148,35 +1940,14 @@
           <a:avLst/>
         </a:prstGeom>
       </dgm:spPr>
-      <dgm:t>
-        <a:bodyPr/>
-        <a:lstStyle/>
-        <a:p>
-          <a:endParaRPr lang="de-DE"/>
-        </a:p>
-      </dgm:t>
     </dgm:pt>
     <dgm:pt modelId="{31DD45E7-30F4-43DF-A8B6-02CBB15B1530}" type="pres">
       <dgm:prSet presAssocID="{D7D5304E-78C1-46BD-908B-CC87C0340BC0}" presName="sibTrans" presStyleLbl="sibTrans2D1" presStyleIdx="10" presStyleCnt="12"/>
       <dgm:spPr/>
-      <dgm:t>
-        <a:bodyPr/>
-        <a:lstStyle/>
-        <a:p>
-          <a:endParaRPr lang="de-DE"/>
-        </a:p>
-      </dgm:t>
     </dgm:pt>
     <dgm:pt modelId="{BA696420-6002-4AAE-B7CD-86E54E02AEAB}" type="pres">
       <dgm:prSet presAssocID="{D7D5304E-78C1-46BD-908B-CC87C0340BC0}" presName="connectorText" presStyleLbl="sibTrans2D1" presStyleIdx="10" presStyleCnt="12"/>
       <dgm:spPr/>
-      <dgm:t>
-        <a:bodyPr/>
-        <a:lstStyle/>
-        <a:p>
-          <a:endParaRPr lang="de-DE"/>
-        </a:p>
-      </dgm:t>
     </dgm:pt>
     <dgm:pt modelId="{31465DD7-736A-4E29-B912-3CE88671965A}" type="pres">
       <dgm:prSet presAssocID="{2A940DCD-4386-4DBD-920B-6DEB030B5F2B}" presName="node" presStyleLbl="node1" presStyleIdx="11" presStyleCnt="13">
@@ -2189,35 +1960,14 @@
           <a:avLst/>
         </a:prstGeom>
       </dgm:spPr>
-      <dgm:t>
-        <a:bodyPr/>
-        <a:lstStyle/>
-        <a:p>
-          <a:endParaRPr lang="de-DE"/>
-        </a:p>
-      </dgm:t>
     </dgm:pt>
     <dgm:pt modelId="{640D8095-876B-4AEB-AA71-C9DFEE353379}" type="pres">
       <dgm:prSet presAssocID="{83392529-47BB-47F8-864A-7CA98AB94047}" presName="sibTrans" presStyleLbl="sibTrans2D1" presStyleIdx="11" presStyleCnt="12" custFlipHor="1"/>
       <dgm:spPr/>
-      <dgm:t>
-        <a:bodyPr/>
-        <a:lstStyle/>
-        <a:p>
-          <a:endParaRPr lang="de-DE"/>
-        </a:p>
-      </dgm:t>
     </dgm:pt>
     <dgm:pt modelId="{B6C7042F-351E-41BC-950F-C06CDBAB89B7}" type="pres">
       <dgm:prSet presAssocID="{83392529-47BB-47F8-864A-7CA98AB94047}" presName="connectorText" presStyleLbl="sibTrans2D1" presStyleIdx="11" presStyleCnt="12"/>
       <dgm:spPr/>
-      <dgm:t>
-        <a:bodyPr/>
-        <a:lstStyle/>
-        <a:p>
-          <a:endParaRPr lang="de-DE"/>
-        </a:p>
-      </dgm:t>
     </dgm:pt>
     <dgm:pt modelId="{51CAFB81-78F9-4119-9D66-FCF9B2E69E25}" type="pres">
       <dgm:prSet presAssocID="{4959A748-F343-4A48-A303-D7BDD3AED09F}" presName="node" presStyleLbl="node1" presStyleIdx="12" presStyleCnt="13">
@@ -2230,67 +1980,60 @@
           <a:avLst/>
         </a:prstGeom>
       </dgm:spPr>
-      <dgm:t>
-        <a:bodyPr/>
-        <a:lstStyle/>
-        <a:p>
-          <a:endParaRPr lang="de-DE"/>
-        </a:p>
-      </dgm:t>
     </dgm:pt>
   </dgm:ptLst>
   <dgm:cxnLst>
-    <dgm:cxn modelId="{FE00158C-87FA-4B67-B87F-7E9B4EDFD99B}" type="presOf" srcId="{CAEA8F5A-582F-4EF1-B76E-168EB4871699}" destId="{873C4CD3-24EF-4751-9ADD-4F53A6B7C77E}" srcOrd="0" destOrd="0" presId="urn:microsoft.com/office/officeart/2005/8/layout/process1"/>
-    <dgm:cxn modelId="{16020283-6D58-44E8-B474-AF25D8C169B3}" srcId="{090F1C53-FB97-44F7-80D8-69C70CFC6913}" destId="{9417F1E3-ECF8-47E5-9CC1-9EAFAD82A24F}" srcOrd="8" destOrd="0" parTransId="{B5FF5A02-4BA7-4BC6-B7B6-37B2F747C956}" sibTransId="{119FAE41-C245-457C-A891-4182C4C5EF5A}"/>
     <dgm:cxn modelId="{91D4A400-3DE2-4901-A3B0-D4E756A6BC8B}" type="presOf" srcId="{D7D5304E-78C1-46BD-908B-CC87C0340BC0}" destId="{BA696420-6002-4AAE-B7CD-86E54E02AEAB}" srcOrd="1" destOrd="0" presId="urn:microsoft.com/office/officeart/2005/8/layout/process1"/>
+    <dgm:cxn modelId="{DAD52405-8C43-4022-8D6E-832E49FD710B}" type="presOf" srcId="{090F1C53-FB97-44F7-80D8-69C70CFC6913}" destId="{2DCE2E91-E807-446A-BEBE-7C84CDD96D2E}" srcOrd="0" destOrd="0" presId="urn:microsoft.com/office/officeart/2005/8/layout/process1"/>
+    <dgm:cxn modelId="{20A16205-D8FA-475D-9615-4E3163A97AB6}" srcId="{090F1C53-FB97-44F7-80D8-69C70CFC6913}" destId="{9AE07C70-5D79-444E-BBF3-31AEA74DCD3A}" srcOrd="7" destOrd="0" parTransId="{082DBA40-436D-4680-B883-2ABA8D754FEB}" sibTransId="{BB892D82-B0D7-49D5-BBBA-084ABAB4F315}"/>
+    <dgm:cxn modelId="{389D8308-0035-4C62-BAA6-1AD0E5BEFDD4}" srcId="{090F1C53-FB97-44F7-80D8-69C70CFC6913}" destId="{2A940DCD-4386-4DBD-920B-6DEB030B5F2B}" srcOrd="11" destOrd="0" parTransId="{9803EF31-F9E6-45C2-A1C1-FAE1D4A5E7A6}" sibTransId="{83392529-47BB-47F8-864A-7CA98AB94047}"/>
     <dgm:cxn modelId="{76BD7E19-DA74-44DD-9E30-C7AAC4D6C6F8}" type="presOf" srcId="{B4A9E68B-508B-4467-B311-84CC66AB3341}" destId="{758BEEF4-456E-4209-AFE9-6B258763788B}" srcOrd="0" destOrd="0" presId="urn:microsoft.com/office/officeart/2005/8/layout/process1"/>
-    <dgm:cxn modelId="{A1ACA88F-8E89-4D9A-8DD0-C05F816CB1CD}" type="presOf" srcId="{7B68D348-6953-4C6A-8FC9-E212A8FABF61}" destId="{06CF654D-9472-4507-AC3F-439B723ED8AB}" srcOrd="0" destOrd="0" presId="urn:microsoft.com/office/officeart/2005/8/layout/process1"/>
-    <dgm:cxn modelId="{6289E6CE-6D36-4AD0-BDA9-534E4FE0DF5E}" type="presOf" srcId="{BB892D82-B0D7-49D5-BBBA-084ABAB4F315}" destId="{A30F4025-B688-4D10-B020-CD25EB39E6F6}" srcOrd="0" destOrd="0" presId="urn:microsoft.com/office/officeart/2005/8/layout/process1"/>
-    <dgm:cxn modelId="{CA214E94-6676-45E2-94D4-BF00C41183D0}" type="presOf" srcId="{B23DABA0-AE96-4548-9519-AB119A87BFAC}" destId="{D7DBB1A4-600A-479E-A9AA-C2A98E17F164}" srcOrd="1" destOrd="0" presId="urn:microsoft.com/office/officeart/2005/8/layout/process1"/>
-    <dgm:cxn modelId="{69330B5A-68FF-4E90-9E58-4306D1B73EC4}" type="presOf" srcId="{6EE17974-6FEB-4F0F-BAC1-E8DFD9FD4CB4}" destId="{C87C9376-9B91-4483-A836-89258EE6FA85}" srcOrd="0" destOrd="0" presId="urn:microsoft.com/office/officeart/2005/8/layout/process1"/>
-    <dgm:cxn modelId="{ED3461FB-3971-4249-B6DA-3D932A754B5E}" srcId="{090F1C53-FB97-44F7-80D8-69C70CFC6913}" destId="{4959A748-F343-4A48-A303-D7BDD3AED09F}" srcOrd="12" destOrd="0" parTransId="{EF548640-AFAE-43CD-910F-78A554061828}" sibTransId="{6A3CAC16-F178-4B25-A5DC-E2D6A2ED54B4}"/>
-    <dgm:cxn modelId="{F66F2FAB-3D83-4208-8A95-8F123F0B34A3}" type="presOf" srcId="{2593BF8B-5734-403B-9C07-4F5BA1DCCEF7}" destId="{2D6F8BA0-E44C-470C-8F1B-C94AD35EEC9E}" srcOrd="1" destOrd="0" presId="urn:microsoft.com/office/officeart/2005/8/layout/process1"/>
-    <dgm:cxn modelId="{EBAB08F9-015D-44AF-AD76-CA8EB6D3614B}" srcId="{090F1C53-FB97-44F7-80D8-69C70CFC6913}" destId="{25BCFF31-D71F-4E48-A295-220D604F05EF}" srcOrd="2" destOrd="0" parTransId="{78C55186-1491-4081-9852-B0A770443022}" sibTransId="{149CC7A5-C1BF-42C4-A549-FA60D3292079}"/>
-    <dgm:cxn modelId="{D3C74EE4-A8C2-4DED-8996-E5DF635B7ADD}" type="presOf" srcId="{D7D5304E-78C1-46BD-908B-CC87C0340BC0}" destId="{31DD45E7-30F4-43DF-A8B6-02CBB15B1530}" srcOrd="0" destOrd="0" presId="urn:microsoft.com/office/officeart/2005/8/layout/process1"/>
+    <dgm:cxn modelId="{BC38D41A-CAA2-4F05-9377-500154EBD6D3}" type="presOf" srcId="{43142F34-5FE6-4716-93C9-0F17EBFD5491}" destId="{DB4DA60E-000A-4337-852D-96EF7C39D962}" srcOrd="1" destOrd="0" presId="urn:microsoft.com/office/officeart/2005/8/layout/process1"/>
+    <dgm:cxn modelId="{D387C61E-BFBD-4BFE-8501-DEEBEB707635}" type="presOf" srcId="{7B68D348-6953-4C6A-8FC9-E212A8FABF61}" destId="{C637126D-415B-4E38-9E03-4FE65C68EC16}" srcOrd="1" destOrd="0" presId="urn:microsoft.com/office/officeart/2005/8/layout/process1"/>
+    <dgm:cxn modelId="{94B00927-9F26-44E8-82BF-4BC3BE9349DA}" type="presOf" srcId="{2593BF8B-5734-403B-9C07-4F5BA1DCCEF7}" destId="{2A6DD4BB-70B2-4F4C-BFCC-E3233D174642}" srcOrd="0" destOrd="0" presId="urn:microsoft.com/office/officeart/2005/8/layout/process1"/>
+    <dgm:cxn modelId="{BDF81C27-F77F-4CE2-83B0-CD7767C9F4C0}" type="presOf" srcId="{43142F34-5FE6-4716-93C9-0F17EBFD5491}" destId="{0892BC10-3644-4823-B89D-11F0C2A0F771}" srcOrd="0" destOrd="0" presId="urn:microsoft.com/office/officeart/2005/8/layout/process1"/>
+    <dgm:cxn modelId="{3463C428-42F9-4D73-AD69-A925E8E636BA}" srcId="{090F1C53-FB97-44F7-80D8-69C70CFC6913}" destId="{6EE17974-6FEB-4F0F-BAC1-E8DFD9FD4CB4}" srcOrd="10" destOrd="0" parTransId="{51201113-5FA7-48E0-84F1-567F7D590AE9}" sibTransId="{D7D5304E-78C1-46BD-908B-CC87C0340BC0}"/>
+    <dgm:cxn modelId="{2650FF28-774D-4F10-977A-22D5BB2A35C7}" type="presOf" srcId="{CAEA8F5A-582F-4EF1-B76E-168EB4871699}" destId="{326A3C73-3762-4018-877B-B17EF4FBFF75}" srcOrd="1" destOrd="0" presId="urn:microsoft.com/office/officeart/2005/8/layout/process1"/>
     <dgm:cxn modelId="{BE0AF434-7324-44C7-9FFC-4FB3CACDB3A9}" type="presOf" srcId="{83392529-47BB-47F8-864A-7CA98AB94047}" destId="{640D8095-876B-4AEB-AA71-C9DFEE353379}" srcOrd="0" destOrd="0" presId="urn:microsoft.com/office/officeart/2005/8/layout/process1"/>
-    <dgm:cxn modelId="{831896C6-EFF3-4B04-9E04-C12116C4B797}" type="presOf" srcId="{8ADF894A-2067-4B82-87B1-8BC1DD1BA969}" destId="{75DCE0CE-C2B1-42AB-B381-E5DD711D1703}" srcOrd="0" destOrd="0" presId="urn:microsoft.com/office/officeart/2005/8/layout/process1"/>
-    <dgm:cxn modelId="{94B00927-9F26-44E8-82BF-4BC3BE9349DA}" type="presOf" srcId="{2593BF8B-5734-403B-9C07-4F5BA1DCCEF7}" destId="{2A6DD4BB-70B2-4F4C-BFCC-E3233D174642}" srcOrd="0" destOrd="0" presId="urn:microsoft.com/office/officeart/2005/8/layout/process1"/>
-    <dgm:cxn modelId="{DAD52405-8C43-4022-8D6E-832E49FD710B}" type="presOf" srcId="{090F1C53-FB97-44F7-80D8-69C70CFC6913}" destId="{2DCE2E91-E807-446A-BEBE-7C84CDD96D2E}" srcOrd="0" destOrd="0" presId="urn:microsoft.com/office/officeart/2005/8/layout/process1"/>
-    <dgm:cxn modelId="{D387C61E-BFBD-4BFE-8501-DEEBEB707635}" type="presOf" srcId="{7B68D348-6953-4C6A-8FC9-E212A8FABF61}" destId="{C637126D-415B-4E38-9E03-4FE65C68EC16}" srcOrd="1" destOrd="0" presId="urn:microsoft.com/office/officeart/2005/8/layout/process1"/>
+    <dgm:cxn modelId="{2A12083A-42AB-4867-9DD8-DA6F93CE2AC3}" srcId="{090F1C53-FB97-44F7-80D8-69C70CFC6913}" destId="{14483E50-8305-4B57-963A-DBA0F22F8091}" srcOrd="9" destOrd="0" parTransId="{0E9FD012-BB4D-40F7-87B1-A6ACAC8DF2FC}" sibTransId="{2F7CB78D-D6FB-4A19-9320-0347FAFDE6D9}"/>
+    <dgm:cxn modelId="{14F2F540-2D5C-462D-AEC4-BCE609935148}" type="presOf" srcId="{2F7CB78D-D6FB-4A19-9320-0347FAFDE6D9}" destId="{2AA9586E-C219-4E6E-868D-84BB47CC2C57}" srcOrd="1" destOrd="0" presId="urn:microsoft.com/office/officeart/2005/8/layout/process1"/>
+    <dgm:cxn modelId="{92DE9B5B-2607-42F8-B18B-61E2845D992C}" type="presOf" srcId="{2F7CB78D-D6FB-4A19-9320-0347FAFDE6D9}" destId="{F894151C-AC9B-46BF-80C0-9E9FB8DAD41C}" srcOrd="0" destOrd="0" presId="urn:microsoft.com/office/officeart/2005/8/layout/process1"/>
+    <dgm:cxn modelId="{376B675D-91AC-4FBE-9DA4-069C65F2196C}" type="presOf" srcId="{149CC7A5-C1BF-42C4-A549-FA60D3292079}" destId="{635A1D8A-46DC-4AD3-9E91-95D195A7DE99}" srcOrd="0" destOrd="0" presId="urn:microsoft.com/office/officeart/2005/8/layout/process1"/>
+    <dgm:cxn modelId="{C1C7255F-D8B6-4BEF-860D-66FE7FD4EFA8}" type="presOf" srcId="{149CC7A5-C1BF-42C4-A549-FA60D3292079}" destId="{9FD4F6CD-E583-4ABF-9845-219C3385CFBD}" srcOrd="1" destOrd="0" presId="urn:microsoft.com/office/officeart/2005/8/layout/process1"/>
     <dgm:cxn modelId="{B60AE341-81FF-4072-8886-E5BC066CB06D}" srcId="{090F1C53-FB97-44F7-80D8-69C70CFC6913}" destId="{574FCBEA-A47E-43A7-8317-33628CAA341B}" srcOrd="1" destOrd="0" parTransId="{556FE425-20F3-429C-96DA-C9297CB15B23}" sibTransId="{7B68D348-6953-4C6A-8FC9-E212A8FABF61}"/>
     <dgm:cxn modelId="{449AD142-D8A9-4A9B-9D75-6F6D093E3631}" type="presOf" srcId="{119FAE41-C245-457C-A891-4182C4C5EF5A}" destId="{BAC245F5-CE43-4EA9-B488-3491FCA0A9B0}" srcOrd="0" destOrd="0" presId="urn:microsoft.com/office/officeart/2005/8/layout/process1"/>
+    <dgm:cxn modelId="{DA245E44-94FE-4DF5-8132-58AC9CE63567}" type="presOf" srcId="{83392529-47BB-47F8-864A-7CA98AB94047}" destId="{B6C7042F-351E-41BC-950F-C06CDBAB89B7}" srcOrd="1" destOrd="0" presId="urn:microsoft.com/office/officeart/2005/8/layout/process1"/>
     <dgm:cxn modelId="{5748ED48-7462-4538-B8E5-BEF14DA0A8A1}" srcId="{090F1C53-FB97-44F7-80D8-69C70CFC6913}" destId="{A5F9FCDE-9D6D-4822-8F01-34F8C2E9105D}" srcOrd="3" destOrd="0" parTransId="{DEF268AC-D709-40F8-BFD7-5A4EA3A97B73}" sibTransId="{CAEA8F5A-582F-4EF1-B76E-168EB4871699}"/>
-    <dgm:cxn modelId="{C1C7255F-D8B6-4BEF-860D-66FE7FD4EFA8}" type="presOf" srcId="{149CC7A5-C1BF-42C4-A549-FA60D3292079}" destId="{9FD4F6CD-E583-4ABF-9845-219C3385CFBD}" srcOrd="1" destOrd="0" presId="urn:microsoft.com/office/officeart/2005/8/layout/process1"/>
+    <dgm:cxn modelId="{ECE0274E-1BEE-42B7-BA23-5F1F650C3F10}" srcId="{090F1C53-FB97-44F7-80D8-69C70CFC6913}" destId="{8ADF894A-2067-4B82-87B1-8BC1DD1BA969}" srcOrd="5" destOrd="0" parTransId="{C0F828AF-6031-450A-B45C-F2CD87724A5B}" sibTransId="{2593BF8B-5734-403B-9C07-4F5BA1DCCEF7}"/>
+    <dgm:cxn modelId="{5D90F655-7C70-413E-9618-14FA6583C862}" type="presOf" srcId="{14483E50-8305-4B57-963A-DBA0F22F8091}" destId="{7B645699-3C4D-4AD0-918E-42FFF1B441B3}" srcOrd="0" destOrd="0" presId="urn:microsoft.com/office/officeart/2005/8/layout/process1"/>
+    <dgm:cxn modelId="{86188C76-31A2-4441-BBA7-0F0E5F6A98FD}" type="presOf" srcId="{BB892D82-B0D7-49D5-BBBA-084ABAB4F315}" destId="{29DD366A-BA02-40BE-BDA0-DFE06AAAD243}" srcOrd="1" destOrd="0" presId="urn:microsoft.com/office/officeart/2005/8/layout/process1"/>
+    <dgm:cxn modelId="{6619F176-70E6-4414-8607-0F925BA6986B}" type="presOf" srcId="{A40D38F0-6F59-467E-B929-A27AF0EE629C}" destId="{91093355-EC6F-46FF-8CEC-A8C627874621}" srcOrd="0" destOrd="0" presId="urn:microsoft.com/office/officeart/2005/8/layout/process1"/>
+    <dgm:cxn modelId="{69330B5A-68FF-4E90-9E58-4306D1B73EC4}" type="presOf" srcId="{6EE17974-6FEB-4F0F-BAC1-E8DFD9FD4CB4}" destId="{C87C9376-9B91-4483-A836-89258EE6FA85}" srcOrd="0" destOrd="0" presId="urn:microsoft.com/office/officeart/2005/8/layout/process1"/>
+    <dgm:cxn modelId="{D0C9CA7C-570C-4710-B91C-4C6E5ABEF360}" type="presOf" srcId="{24CF9193-95F9-41B6-8D41-2F7ABCCB5D8C}" destId="{06170233-3D6C-4E69-9046-59D53A3CADC0}" srcOrd="0" destOrd="0" presId="urn:microsoft.com/office/officeart/2005/8/layout/process1"/>
+    <dgm:cxn modelId="{16020283-6D58-44E8-B474-AF25D8C169B3}" srcId="{090F1C53-FB97-44F7-80D8-69C70CFC6913}" destId="{9417F1E3-ECF8-47E5-9CC1-9EAFAD82A24F}" srcOrd="8" destOrd="0" parTransId="{B5FF5A02-4BA7-4BC6-B7B6-37B2F747C956}" sibTransId="{119FAE41-C245-457C-A891-4182C4C5EF5A}"/>
+    <dgm:cxn modelId="{FE00158C-87FA-4B67-B87F-7E9B4EDFD99B}" type="presOf" srcId="{CAEA8F5A-582F-4EF1-B76E-168EB4871699}" destId="{873C4CD3-24EF-4751-9ADD-4F53A6B7C77E}" srcOrd="0" destOrd="0" presId="urn:microsoft.com/office/officeart/2005/8/layout/process1"/>
+    <dgm:cxn modelId="{A1ACA88F-8E89-4D9A-8DD0-C05F816CB1CD}" type="presOf" srcId="{7B68D348-6953-4C6A-8FC9-E212A8FABF61}" destId="{06CF654D-9472-4507-AC3F-439B723ED8AB}" srcOrd="0" destOrd="0" presId="urn:microsoft.com/office/officeart/2005/8/layout/process1"/>
+    <dgm:cxn modelId="{CA214E94-6676-45E2-94D4-BF00C41183D0}" type="presOf" srcId="{B23DABA0-AE96-4548-9519-AB119A87BFAC}" destId="{D7DBB1A4-600A-479E-A9AA-C2A98E17F164}" srcOrd="1" destOrd="0" presId="urn:microsoft.com/office/officeart/2005/8/layout/process1"/>
+    <dgm:cxn modelId="{0A95D097-226D-4390-9B86-BADFEB99ADC2}" srcId="{090F1C53-FB97-44F7-80D8-69C70CFC6913}" destId="{C71B5027-FF4E-4D83-B3CA-E710B98F159D}" srcOrd="6" destOrd="0" parTransId="{15C7339A-FC9A-4D15-B42F-1F0700580C2A}" sibTransId="{A40D38F0-6F59-467E-B929-A27AF0EE629C}"/>
+    <dgm:cxn modelId="{16CA439D-4AC4-49EE-A109-280E73B0C880}" type="presOf" srcId="{2A940DCD-4386-4DBD-920B-6DEB030B5F2B}" destId="{31465DD7-736A-4E29-B912-3CE88671965A}" srcOrd="0" destOrd="0" presId="urn:microsoft.com/office/officeart/2005/8/layout/process1"/>
+    <dgm:cxn modelId="{979005A2-04CA-4BEF-8450-9E8EC02EB772}" type="presOf" srcId="{9417F1E3-ECF8-47E5-9CC1-9EAFAD82A24F}" destId="{838CB19D-5E3F-49C9-956B-8AB95C278E9F}" srcOrd="0" destOrd="0" presId="urn:microsoft.com/office/officeart/2005/8/layout/process1"/>
+    <dgm:cxn modelId="{A8F1FCAA-E576-4F3F-A436-465F5BC1EA00}" type="presOf" srcId="{574FCBEA-A47E-43A7-8317-33628CAA341B}" destId="{06FA8772-39BB-4950-8AB7-DA8476193E4E}" srcOrd="0" destOrd="0" presId="urn:microsoft.com/office/officeart/2005/8/layout/process1"/>
+    <dgm:cxn modelId="{F66F2FAB-3D83-4208-8A95-8F123F0B34A3}" type="presOf" srcId="{2593BF8B-5734-403B-9C07-4F5BA1DCCEF7}" destId="{2D6F8BA0-E44C-470C-8F1B-C94AD35EEC9E}" srcOrd="1" destOrd="0" presId="urn:microsoft.com/office/officeart/2005/8/layout/process1"/>
+    <dgm:cxn modelId="{629D60B4-89B1-4ED8-989E-FCE9D554EC45}" type="presOf" srcId="{9AE07C70-5D79-444E-BBF3-31AEA74DCD3A}" destId="{4EE45600-06B9-4BB4-8889-9530778E6CDB}" srcOrd="0" destOrd="0" presId="urn:microsoft.com/office/officeart/2005/8/layout/process1"/>
+    <dgm:cxn modelId="{A66827BD-A6BE-4945-95ED-108BAA677DC2}" type="presOf" srcId="{A5F9FCDE-9D6D-4822-8F01-34F8C2E9105D}" destId="{A68D0C7D-8FEC-42F0-A2DC-4509402569C2}" srcOrd="0" destOrd="0" presId="urn:microsoft.com/office/officeart/2005/8/layout/process1"/>
+    <dgm:cxn modelId="{831896C6-EFF3-4B04-9E04-C12116C4B797}" type="presOf" srcId="{8ADF894A-2067-4B82-87B1-8BC1DD1BA969}" destId="{75DCE0CE-C2B1-42AB-B381-E5DD711D1703}" srcOrd="0" destOrd="0" presId="urn:microsoft.com/office/officeart/2005/8/layout/process1"/>
+    <dgm:cxn modelId="{6289E6CE-6D36-4AD0-BDA9-534E4FE0DF5E}" type="presOf" srcId="{BB892D82-B0D7-49D5-BBBA-084ABAB4F315}" destId="{A30F4025-B688-4D10-B020-CD25EB39E6F6}" srcOrd="0" destOrd="0" presId="urn:microsoft.com/office/officeart/2005/8/layout/process1"/>
+    <dgm:cxn modelId="{AFA9C3DF-5300-40EE-AD24-17E97F9BBAE7}" type="presOf" srcId="{B23DABA0-AE96-4548-9519-AB119A87BFAC}" destId="{A334B57C-0E7C-467A-8A30-C48853BAC23D}" srcOrd="0" destOrd="0" presId="urn:microsoft.com/office/officeart/2005/8/layout/process1"/>
+    <dgm:cxn modelId="{83FCFAE2-2B73-4826-81AB-324C7B8F3811}" srcId="{090F1C53-FB97-44F7-80D8-69C70CFC6913}" destId="{24CF9193-95F9-41B6-8D41-2F7ABCCB5D8C}" srcOrd="4" destOrd="0" parTransId="{95BB585B-318A-4CA6-A507-0AFB502221BF}" sibTransId="{B23DABA0-AE96-4548-9519-AB119A87BFAC}"/>
+    <dgm:cxn modelId="{D3C74EE4-A8C2-4DED-8996-E5DF635B7ADD}" type="presOf" srcId="{D7D5304E-78C1-46BD-908B-CC87C0340BC0}" destId="{31DD45E7-30F4-43DF-A8B6-02CBB15B1530}" srcOrd="0" destOrd="0" presId="urn:microsoft.com/office/officeart/2005/8/layout/process1"/>
+    <dgm:cxn modelId="{D401B5E5-0DB2-4A1A-926C-EDB4008A4DA8}" type="presOf" srcId="{25BCFF31-D71F-4E48-A295-220D604F05EF}" destId="{A6063A21-8E14-40B2-B138-4B1A1BB1B1D8}" srcOrd="0" destOrd="0" presId="urn:microsoft.com/office/officeart/2005/8/layout/process1"/>
+    <dgm:cxn modelId="{2FEFCCE5-C4BA-4664-8651-898FA38D43DC}" type="presOf" srcId="{4959A748-F343-4A48-A303-D7BDD3AED09F}" destId="{51CAFB81-78F9-4119-9D66-FCF9B2E69E25}" srcOrd="0" destOrd="0" presId="urn:microsoft.com/office/officeart/2005/8/layout/process1"/>
+    <dgm:cxn modelId="{25EFEBEB-0568-4893-986B-47B24B6E8C65}" type="presOf" srcId="{A40D38F0-6F59-467E-B929-A27AF0EE629C}" destId="{C5FED364-5C09-4AD2-8FB5-201536BBD221}" srcOrd="1" destOrd="0" presId="urn:microsoft.com/office/officeart/2005/8/layout/process1"/>
+    <dgm:cxn modelId="{C15A08F6-BEC4-468D-B7D3-E4A21A1845E7}" srcId="{090F1C53-FB97-44F7-80D8-69C70CFC6913}" destId="{B4A9E68B-508B-4467-B311-84CC66AB3341}" srcOrd="0" destOrd="0" parTransId="{6B847130-E25F-4506-87B6-739A71093985}" sibTransId="{43142F34-5FE6-4716-93C9-0F17EBFD5491}"/>
+    <dgm:cxn modelId="{7376AFF7-7F85-4FC3-A0C6-BDEB30A286E1}" type="presOf" srcId="{C71B5027-FF4E-4D83-B3CA-E710B98F159D}" destId="{8C157F1D-A6F8-46A2-AEAD-56ABE0FEE6A6}" srcOrd="0" destOrd="0" presId="urn:microsoft.com/office/officeart/2005/8/layout/process1"/>
+    <dgm:cxn modelId="{EBAB08F9-015D-44AF-AD76-CA8EB6D3614B}" srcId="{090F1C53-FB97-44F7-80D8-69C70CFC6913}" destId="{25BCFF31-D71F-4E48-A295-220D604F05EF}" srcOrd="2" destOrd="0" parTransId="{78C55186-1491-4081-9852-B0A770443022}" sibTransId="{149CC7A5-C1BF-42C4-A549-FA60D3292079}"/>
     <dgm:cxn modelId="{C7EC49F9-988F-47DE-A391-2245E98302C0}" type="presOf" srcId="{119FAE41-C245-457C-A891-4182C4C5EF5A}" destId="{DA471338-5A72-4942-A2EF-855C3D09485D}" srcOrd="1" destOrd="0" presId="urn:microsoft.com/office/officeart/2005/8/layout/process1"/>
-    <dgm:cxn modelId="{C15A08F6-BEC4-468D-B7D3-E4A21A1845E7}" srcId="{090F1C53-FB97-44F7-80D8-69C70CFC6913}" destId="{B4A9E68B-508B-4467-B311-84CC66AB3341}" srcOrd="0" destOrd="0" parTransId="{6B847130-E25F-4506-87B6-739A71093985}" sibTransId="{43142F34-5FE6-4716-93C9-0F17EBFD5491}"/>
-    <dgm:cxn modelId="{979005A2-04CA-4BEF-8450-9E8EC02EB772}" type="presOf" srcId="{9417F1E3-ECF8-47E5-9CC1-9EAFAD82A24F}" destId="{838CB19D-5E3F-49C9-956B-8AB95C278E9F}" srcOrd="0" destOrd="0" presId="urn:microsoft.com/office/officeart/2005/8/layout/process1"/>
-    <dgm:cxn modelId="{5D90F655-7C70-413E-9618-14FA6583C862}" type="presOf" srcId="{14483E50-8305-4B57-963A-DBA0F22F8091}" destId="{7B645699-3C4D-4AD0-918E-42FFF1B441B3}" srcOrd="0" destOrd="0" presId="urn:microsoft.com/office/officeart/2005/8/layout/process1"/>
-    <dgm:cxn modelId="{0A95D097-226D-4390-9B86-BADFEB99ADC2}" srcId="{090F1C53-FB97-44F7-80D8-69C70CFC6913}" destId="{C71B5027-FF4E-4D83-B3CA-E710B98F159D}" srcOrd="6" destOrd="0" parTransId="{15C7339A-FC9A-4D15-B42F-1F0700580C2A}" sibTransId="{A40D38F0-6F59-467E-B929-A27AF0EE629C}"/>
-    <dgm:cxn modelId="{83FCFAE2-2B73-4826-81AB-324C7B8F3811}" srcId="{090F1C53-FB97-44F7-80D8-69C70CFC6913}" destId="{24CF9193-95F9-41B6-8D41-2F7ABCCB5D8C}" srcOrd="4" destOrd="0" parTransId="{95BB585B-318A-4CA6-A507-0AFB502221BF}" sibTransId="{B23DABA0-AE96-4548-9519-AB119A87BFAC}"/>
-    <dgm:cxn modelId="{BDF81C27-F77F-4CE2-83B0-CD7767C9F4C0}" type="presOf" srcId="{43142F34-5FE6-4716-93C9-0F17EBFD5491}" destId="{0892BC10-3644-4823-B89D-11F0C2A0F771}" srcOrd="0" destOrd="0" presId="urn:microsoft.com/office/officeart/2005/8/layout/process1"/>
-    <dgm:cxn modelId="{14F2F540-2D5C-462D-AEC4-BCE609935148}" type="presOf" srcId="{2F7CB78D-D6FB-4A19-9320-0347FAFDE6D9}" destId="{2AA9586E-C219-4E6E-868D-84BB47CC2C57}" srcOrd="1" destOrd="0" presId="urn:microsoft.com/office/officeart/2005/8/layout/process1"/>
-    <dgm:cxn modelId="{92DE9B5B-2607-42F8-B18B-61E2845D992C}" type="presOf" srcId="{2F7CB78D-D6FB-4A19-9320-0347FAFDE6D9}" destId="{F894151C-AC9B-46BF-80C0-9E9FB8DAD41C}" srcOrd="0" destOrd="0" presId="urn:microsoft.com/office/officeart/2005/8/layout/process1"/>
-    <dgm:cxn modelId="{7376AFF7-7F85-4FC3-A0C6-BDEB30A286E1}" type="presOf" srcId="{C71B5027-FF4E-4D83-B3CA-E710B98F159D}" destId="{8C157F1D-A6F8-46A2-AEAD-56ABE0FEE6A6}" srcOrd="0" destOrd="0" presId="urn:microsoft.com/office/officeart/2005/8/layout/process1"/>
-    <dgm:cxn modelId="{D0C9CA7C-570C-4710-B91C-4C6E5ABEF360}" type="presOf" srcId="{24CF9193-95F9-41B6-8D41-2F7ABCCB5D8C}" destId="{06170233-3D6C-4E69-9046-59D53A3CADC0}" srcOrd="0" destOrd="0" presId="urn:microsoft.com/office/officeart/2005/8/layout/process1"/>
-    <dgm:cxn modelId="{DA245E44-94FE-4DF5-8132-58AC9CE63567}" type="presOf" srcId="{83392529-47BB-47F8-864A-7CA98AB94047}" destId="{B6C7042F-351E-41BC-950F-C06CDBAB89B7}" srcOrd="1" destOrd="0" presId="urn:microsoft.com/office/officeart/2005/8/layout/process1"/>
-    <dgm:cxn modelId="{2FEFCCE5-C4BA-4664-8651-898FA38D43DC}" type="presOf" srcId="{4959A748-F343-4A48-A303-D7BDD3AED09F}" destId="{51CAFB81-78F9-4119-9D66-FCF9B2E69E25}" srcOrd="0" destOrd="0" presId="urn:microsoft.com/office/officeart/2005/8/layout/process1"/>
-    <dgm:cxn modelId="{2A12083A-42AB-4867-9DD8-DA6F93CE2AC3}" srcId="{090F1C53-FB97-44F7-80D8-69C70CFC6913}" destId="{14483E50-8305-4B57-963A-DBA0F22F8091}" srcOrd="9" destOrd="0" parTransId="{0E9FD012-BB4D-40F7-87B1-A6ACAC8DF2FC}" sibTransId="{2F7CB78D-D6FB-4A19-9320-0347FAFDE6D9}"/>
-    <dgm:cxn modelId="{A8F1FCAA-E576-4F3F-A436-465F5BC1EA00}" type="presOf" srcId="{574FCBEA-A47E-43A7-8317-33628CAA341B}" destId="{06FA8772-39BB-4950-8AB7-DA8476193E4E}" srcOrd="0" destOrd="0" presId="urn:microsoft.com/office/officeart/2005/8/layout/process1"/>
-    <dgm:cxn modelId="{AFA9C3DF-5300-40EE-AD24-17E97F9BBAE7}" type="presOf" srcId="{B23DABA0-AE96-4548-9519-AB119A87BFAC}" destId="{A334B57C-0E7C-467A-8A30-C48853BAC23D}" srcOrd="0" destOrd="0" presId="urn:microsoft.com/office/officeart/2005/8/layout/process1"/>
-    <dgm:cxn modelId="{6619F176-70E6-4414-8607-0F925BA6986B}" type="presOf" srcId="{A40D38F0-6F59-467E-B929-A27AF0EE629C}" destId="{91093355-EC6F-46FF-8CEC-A8C627874621}" srcOrd="0" destOrd="0" presId="urn:microsoft.com/office/officeart/2005/8/layout/process1"/>
-    <dgm:cxn modelId="{25EFEBEB-0568-4893-986B-47B24B6E8C65}" type="presOf" srcId="{A40D38F0-6F59-467E-B929-A27AF0EE629C}" destId="{C5FED364-5C09-4AD2-8FB5-201536BBD221}" srcOrd="1" destOrd="0" presId="urn:microsoft.com/office/officeart/2005/8/layout/process1"/>
-    <dgm:cxn modelId="{3463C428-42F9-4D73-AD69-A925E8E636BA}" srcId="{090F1C53-FB97-44F7-80D8-69C70CFC6913}" destId="{6EE17974-6FEB-4F0F-BAC1-E8DFD9FD4CB4}" srcOrd="10" destOrd="0" parTransId="{51201113-5FA7-48E0-84F1-567F7D590AE9}" sibTransId="{D7D5304E-78C1-46BD-908B-CC87C0340BC0}"/>
-    <dgm:cxn modelId="{389D8308-0035-4C62-BAA6-1AD0E5BEFDD4}" srcId="{090F1C53-FB97-44F7-80D8-69C70CFC6913}" destId="{2A940DCD-4386-4DBD-920B-6DEB030B5F2B}" srcOrd="11" destOrd="0" parTransId="{9803EF31-F9E6-45C2-A1C1-FAE1D4A5E7A6}" sibTransId="{83392529-47BB-47F8-864A-7CA98AB94047}"/>
-    <dgm:cxn modelId="{86188C76-31A2-4441-BBA7-0F0E5F6A98FD}" type="presOf" srcId="{BB892D82-B0D7-49D5-BBBA-084ABAB4F315}" destId="{29DD366A-BA02-40BE-BDA0-DFE06AAAD243}" srcOrd="1" destOrd="0" presId="urn:microsoft.com/office/officeart/2005/8/layout/process1"/>
-    <dgm:cxn modelId="{D401B5E5-0DB2-4A1A-926C-EDB4008A4DA8}" type="presOf" srcId="{25BCFF31-D71F-4E48-A295-220D604F05EF}" destId="{A6063A21-8E14-40B2-B138-4B1A1BB1B1D8}" srcOrd="0" destOrd="0" presId="urn:microsoft.com/office/officeart/2005/8/layout/process1"/>
-    <dgm:cxn modelId="{A66827BD-A6BE-4945-95ED-108BAA677DC2}" type="presOf" srcId="{A5F9FCDE-9D6D-4822-8F01-34F8C2E9105D}" destId="{A68D0C7D-8FEC-42F0-A2DC-4509402569C2}" srcOrd="0" destOrd="0" presId="urn:microsoft.com/office/officeart/2005/8/layout/process1"/>
-    <dgm:cxn modelId="{376B675D-91AC-4FBE-9DA4-069C65F2196C}" type="presOf" srcId="{149CC7A5-C1BF-42C4-A549-FA60D3292079}" destId="{635A1D8A-46DC-4AD3-9E91-95D195A7DE99}" srcOrd="0" destOrd="0" presId="urn:microsoft.com/office/officeart/2005/8/layout/process1"/>
-    <dgm:cxn modelId="{20A16205-D8FA-475D-9615-4E3163A97AB6}" srcId="{090F1C53-FB97-44F7-80D8-69C70CFC6913}" destId="{9AE07C70-5D79-444E-BBF3-31AEA74DCD3A}" srcOrd="7" destOrd="0" parTransId="{082DBA40-436D-4680-B883-2ABA8D754FEB}" sibTransId="{BB892D82-B0D7-49D5-BBBA-084ABAB4F315}"/>
-    <dgm:cxn modelId="{ECE0274E-1BEE-42B7-BA23-5F1F650C3F10}" srcId="{090F1C53-FB97-44F7-80D8-69C70CFC6913}" destId="{8ADF894A-2067-4B82-87B1-8BC1DD1BA969}" srcOrd="5" destOrd="0" parTransId="{C0F828AF-6031-450A-B45C-F2CD87724A5B}" sibTransId="{2593BF8B-5734-403B-9C07-4F5BA1DCCEF7}"/>
-    <dgm:cxn modelId="{629D60B4-89B1-4ED8-989E-FCE9D554EC45}" type="presOf" srcId="{9AE07C70-5D79-444E-BBF3-31AEA74DCD3A}" destId="{4EE45600-06B9-4BB4-8889-9530778E6CDB}" srcOrd="0" destOrd="0" presId="urn:microsoft.com/office/officeart/2005/8/layout/process1"/>
-    <dgm:cxn modelId="{2650FF28-774D-4F10-977A-22D5BB2A35C7}" type="presOf" srcId="{CAEA8F5A-582F-4EF1-B76E-168EB4871699}" destId="{326A3C73-3762-4018-877B-B17EF4FBFF75}" srcOrd="1" destOrd="0" presId="urn:microsoft.com/office/officeart/2005/8/layout/process1"/>
-    <dgm:cxn modelId="{BC38D41A-CAA2-4F05-9377-500154EBD6D3}" type="presOf" srcId="{43142F34-5FE6-4716-93C9-0F17EBFD5491}" destId="{DB4DA60E-000A-4337-852D-96EF7C39D962}" srcOrd="1" destOrd="0" presId="urn:microsoft.com/office/officeart/2005/8/layout/process1"/>
-    <dgm:cxn modelId="{16CA439D-4AC4-49EE-A109-280E73B0C880}" type="presOf" srcId="{2A940DCD-4386-4DBD-920B-6DEB030B5F2B}" destId="{31465DD7-736A-4E29-B912-3CE88671965A}" srcOrd="0" destOrd="0" presId="urn:microsoft.com/office/officeart/2005/8/layout/process1"/>
+    <dgm:cxn modelId="{ED3461FB-3971-4249-B6DA-3D932A754B5E}" srcId="{090F1C53-FB97-44F7-80D8-69C70CFC6913}" destId="{4959A748-F343-4A48-A303-D7BDD3AED09F}" srcOrd="12" destOrd="0" parTransId="{EF548640-AFAE-43CD-910F-78A554061828}" sibTransId="{6A3CAC16-F178-4B25-A5DC-E2D6A2ED54B4}"/>
     <dgm:cxn modelId="{D342CBE3-489D-40D5-8813-F2D960FD8727}" type="presParOf" srcId="{2DCE2E91-E807-446A-BEBE-7C84CDD96D2E}" destId="{758BEEF4-456E-4209-AFE9-6B258763788B}" srcOrd="0" destOrd="0" presId="urn:microsoft.com/office/officeart/2005/8/layout/process1"/>
     <dgm:cxn modelId="{8680802E-01AB-4DF1-A8F3-9B34A9EAB391}" type="presParOf" srcId="{2DCE2E91-E807-446A-BEBE-7C84CDD96D2E}" destId="{0892BC10-3644-4823-B89D-11F0C2A0F771}" srcOrd="1" destOrd="0" presId="urn:microsoft.com/office/officeart/2005/8/layout/process1"/>
     <dgm:cxn modelId="{A3EBC940-E2C7-4B4B-B735-F3B8BDCC461A}" type="presParOf" srcId="{0892BC10-3644-4823-B89D-11F0C2A0F771}" destId="{DB4DA60E-000A-4337-852D-96EF7C39D962}" srcOrd="0" destOrd="0" presId="urn:microsoft.com/office/officeart/2005/8/layout/process1"/>
@@ -2398,7 +2141,7 @@
         </a:bodyPr>
         <a:lstStyle/>
         <a:p>
-          <a:pPr lvl="0" algn="ctr" defTabSz="577850">
+          <a:pPr marL="0" lvl="0" indent="0" algn="ctr" defTabSz="577850">
             <a:lnSpc>
               <a:spcPct val="90000"/>
             </a:lnSpc>
@@ -2408,6 +2151,7 @@
             <a:spcAft>
               <a:spcPct val="35000"/>
             </a:spcAft>
+            <a:buNone/>
           </a:pPr>
           <a:r>
             <a:rPr lang="de-DE" sz="1300" kern="1200"/>
@@ -2470,7 +2214,7 @@
         </a:bodyPr>
         <a:lstStyle/>
         <a:p>
-          <a:pPr lvl="0" algn="ctr" defTabSz="488950">
+          <a:pPr marL="0" lvl="0" indent="0" algn="ctr" defTabSz="488950">
             <a:lnSpc>
               <a:spcPct val="90000"/>
             </a:lnSpc>
@@ -2480,6 +2224,7 @@
             <a:spcAft>
               <a:spcPct val="35000"/>
             </a:spcAft>
+            <a:buNone/>
           </a:pPr>
           <a:endParaRPr lang="de-DE" sz="1100" kern="1200"/>
         </a:p>
@@ -2536,7 +2281,7 @@
         </a:bodyPr>
         <a:lstStyle/>
         <a:p>
-          <a:pPr lvl="0" algn="ctr" defTabSz="577850">
+          <a:pPr marL="0" lvl="0" indent="0" algn="ctr" defTabSz="577850">
             <a:lnSpc>
               <a:spcPct val="90000"/>
             </a:lnSpc>
@@ -2546,6 +2291,7 @@
             <a:spcAft>
               <a:spcPct val="35000"/>
             </a:spcAft>
+            <a:buNone/>
           </a:pPr>
           <a:r>
             <a:rPr lang="de-DE" sz="1300" kern="1200"/>
@@ -2608,7 +2354,7 @@
         </a:bodyPr>
         <a:lstStyle/>
         <a:p>
-          <a:pPr lvl="0" algn="ctr" defTabSz="488950">
+          <a:pPr marL="0" lvl="0" indent="0" algn="ctr" defTabSz="488950">
             <a:lnSpc>
               <a:spcPct val="90000"/>
             </a:lnSpc>
@@ -2618,6 +2364,7 @@
             <a:spcAft>
               <a:spcPct val="35000"/>
             </a:spcAft>
+            <a:buNone/>
           </a:pPr>
           <a:endParaRPr lang="de-DE" sz="1100" kern="1200"/>
         </a:p>
@@ -2674,7 +2421,7 @@
         </a:bodyPr>
         <a:lstStyle/>
         <a:p>
-          <a:pPr lvl="0" algn="ctr" defTabSz="577850">
+          <a:pPr marL="0" lvl="0" indent="0" algn="ctr" defTabSz="577850">
             <a:lnSpc>
               <a:spcPct val="90000"/>
             </a:lnSpc>
@@ -2684,6 +2431,7 @@
             <a:spcAft>
               <a:spcPct val="35000"/>
             </a:spcAft>
+            <a:buNone/>
           </a:pPr>
           <a:r>
             <a:rPr lang="de-DE" sz="1300" kern="1200"/>
@@ -2746,7 +2494,7 @@
         </a:bodyPr>
         <a:lstStyle/>
         <a:p>
-          <a:pPr lvl="0" algn="ctr" defTabSz="488950">
+          <a:pPr marL="0" lvl="0" indent="0" algn="ctr" defTabSz="488950">
             <a:lnSpc>
               <a:spcPct val="90000"/>
             </a:lnSpc>
@@ -2756,6 +2504,7 @@
             <a:spcAft>
               <a:spcPct val="35000"/>
             </a:spcAft>
+            <a:buNone/>
           </a:pPr>
           <a:endParaRPr lang="de-DE" sz="1100" kern="1200"/>
         </a:p>
@@ -2812,7 +2561,7 @@
         </a:bodyPr>
         <a:lstStyle/>
         <a:p>
-          <a:pPr lvl="0" algn="ctr" defTabSz="577850">
+          <a:pPr marL="0" lvl="0" indent="0" algn="ctr" defTabSz="577850">
             <a:lnSpc>
               <a:spcPct val="90000"/>
             </a:lnSpc>
@@ -2822,6 +2571,7 @@
             <a:spcAft>
               <a:spcPct val="35000"/>
             </a:spcAft>
+            <a:buNone/>
           </a:pPr>
           <a:r>
             <a:rPr lang="de-DE" sz="1300" kern="1200"/>
@@ -2884,7 +2634,7 @@
         </a:bodyPr>
         <a:lstStyle/>
         <a:p>
-          <a:pPr lvl="0" algn="ctr" defTabSz="488950">
+          <a:pPr marL="0" lvl="0" indent="0" algn="ctr" defTabSz="488950">
             <a:lnSpc>
               <a:spcPct val="90000"/>
             </a:lnSpc>
@@ -2894,6 +2644,7 @@
             <a:spcAft>
               <a:spcPct val="35000"/>
             </a:spcAft>
+            <a:buNone/>
           </a:pPr>
           <a:endParaRPr lang="de-DE" sz="1100" kern="1200"/>
         </a:p>
@@ -2950,7 +2701,7 @@
         </a:bodyPr>
         <a:lstStyle/>
         <a:p>
-          <a:pPr lvl="0" algn="ctr" defTabSz="577850">
+          <a:pPr marL="0" lvl="0" indent="0" algn="ctr" defTabSz="577850">
             <a:lnSpc>
               <a:spcPct val="90000"/>
             </a:lnSpc>
@@ -2960,6 +2711,7 @@
             <a:spcAft>
               <a:spcPct val="35000"/>
             </a:spcAft>
+            <a:buNone/>
           </a:pPr>
           <a:r>
             <a:rPr lang="de-DE" sz="1300" kern="1200"/>
@@ -3022,7 +2774,7 @@
         </a:bodyPr>
         <a:lstStyle/>
         <a:p>
-          <a:pPr lvl="0" algn="ctr" defTabSz="488950">
+          <a:pPr marL="0" lvl="0" indent="0" algn="ctr" defTabSz="488950">
             <a:lnSpc>
               <a:spcPct val="90000"/>
             </a:lnSpc>
@@ -3032,6 +2784,7 @@
             <a:spcAft>
               <a:spcPct val="35000"/>
             </a:spcAft>
+            <a:buNone/>
           </a:pPr>
           <a:endParaRPr lang="de-DE" sz="1100" kern="1200"/>
         </a:p>
@@ -3088,7 +2841,7 @@
         </a:bodyPr>
         <a:lstStyle/>
         <a:p>
-          <a:pPr lvl="0" algn="ctr" defTabSz="577850">
+          <a:pPr marL="0" lvl="0" indent="0" algn="ctr" defTabSz="577850">
             <a:lnSpc>
               <a:spcPct val="90000"/>
             </a:lnSpc>
@@ -3098,6 +2851,7 @@
             <a:spcAft>
               <a:spcPct val="35000"/>
             </a:spcAft>
+            <a:buNone/>
           </a:pPr>
           <a:r>
             <a:rPr lang="de-DE" sz="1300" kern="1200"/>
@@ -3160,7 +2914,7 @@
         </a:bodyPr>
         <a:lstStyle/>
         <a:p>
-          <a:pPr lvl="0" algn="ctr" defTabSz="488950">
+          <a:pPr marL="0" lvl="0" indent="0" algn="ctr" defTabSz="488950">
             <a:lnSpc>
               <a:spcPct val="90000"/>
             </a:lnSpc>
@@ -3170,6 +2924,7 @@
             <a:spcAft>
               <a:spcPct val="35000"/>
             </a:spcAft>
+            <a:buNone/>
           </a:pPr>
           <a:endParaRPr lang="de-DE" sz="1100" kern="1200"/>
         </a:p>
@@ -3226,7 +2981,7 @@
         </a:bodyPr>
         <a:lstStyle/>
         <a:p>
-          <a:pPr lvl="0" algn="ctr" defTabSz="577850">
+          <a:pPr marL="0" lvl="0" indent="0" algn="ctr" defTabSz="577850">
             <a:lnSpc>
               <a:spcPct val="90000"/>
             </a:lnSpc>
@@ -3236,6 +2991,7 @@
             <a:spcAft>
               <a:spcPct val="35000"/>
             </a:spcAft>
+            <a:buNone/>
           </a:pPr>
           <a:r>
             <a:rPr lang="de-DE" sz="1300" kern="1200"/>
@@ -3298,7 +3054,7 @@
         </a:bodyPr>
         <a:lstStyle/>
         <a:p>
-          <a:pPr lvl="0" algn="ctr" defTabSz="488950">
+          <a:pPr marL="0" lvl="0" indent="0" algn="ctr" defTabSz="488950">
             <a:lnSpc>
               <a:spcPct val="90000"/>
             </a:lnSpc>
@@ -3308,6 +3064,7 @@
             <a:spcAft>
               <a:spcPct val="35000"/>
             </a:spcAft>
+            <a:buNone/>
           </a:pPr>
           <a:endParaRPr lang="de-DE" sz="1100" kern="1200"/>
         </a:p>
@@ -3364,7 +3121,7 @@
         </a:bodyPr>
         <a:lstStyle/>
         <a:p>
-          <a:pPr lvl="0" algn="ctr" defTabSz="577850">
+          <a:pPr marL="0" lvl="0" indent="0" algn="ctr" defTabSz="577850">
             <a:lnSpc>
               <a:spcPct val="90000"/>
             </a:lnSpc>
@@ -3374,6 +3131,7 @@
             <a:spcAft>
               <a:spcPct val="35000"/>
             </a:spcAft>
+            <a:buNone/>
           </a:pPr>
           <a:r>
             <a:rPr lang="de-DE" sz="1300" kern="1200"/>
@@ -3436,7 +3194,7 @@
         </a:bodyPr>
         <a:lstStyle/>
         <a:p>
-          <a:pPr lvl="0" algn="ctr" defTabSz="488950">
+          <a:pPr marL="0" lvl="0" indent="0" algn="ctr" defTabSz="488950">
             <a:lnSpc>
               <a:spcPct val="90000"/>
             </a:lnSpc>
@@ -3446,6 +3204,7 @@
             <a:spcAft>
               <a:spcPct val="35000"/>
             </a:spcAft>
+            <a:buNone/>
           </a:pPr>
           <a:endParaRPr lang="de-DE" sz="1100" kern="1200"/>
         </a:p>
@@ -3502,7 +3261,7 @@
         </a:bodyPr>
         <a:lstStyle/>
         <a:p>
-          <a:pPr lvl="0" algn="ctr" defTabSz="577850">
+          <a:pPr marL="0" lvl="0" indent="0" algn="ctr" defTabSz="577850">
             <a:lnSpc>
               <a:spcPct val="90000"/>
             </a:lnSpc>
@@ -3512,6 +3271,7 @@
             <a:spcAft>
               <a:spcPct val="35000"/>
             </a:spcAft>
+            <a:buNone/>
           </a:pPr>
           <a:r>
             <a:rPr lang="de-DE" sz="1300" kern="1200"/>
@@ -3574,7 +3334,7 @@
         </a:bodyPr>
         <a:lstStyle/>
         <a:p>
-          <a:pPr lvl="0" algn="ctr" defTabSz="488950">
+          <a:pPr marL="0" lvl="0" indent="0" algn="ctr" defTabSz="488950">
             <a:lnSpc>
               <a:spcPct val="90000"/>
             </a:lnSpc>
@@ -3584,6 +3344,7 @@
             <a:spcAft>
               <a:spcPct val="35000"/>
             </a:spcAft>
+            <a:buNone/>
           </a:pPr>
           <a:endParaRPr lang="de-DE" sz="1100" kern="1200"/>
         </a:p>
@@ -3640,7 +3401,7 @@
         </a:bodyPr>
         <a:lstStyle/>
         <a:p>
-          <a:pPr lvl="0" algn="ctr" defTabSz="577850">
+          <a:pPr marL="0" lvl="0" indent="0" algn="ctr" defTabSz="577850">
             <a:lnSpc>
               <a:spcPct val="90000"/>
             </a:lnSpc>
@@ -3650,6 +3411,7 @@
             <a:spcAft>
               <a:spcPct val="35000"/>
             </a:spcAft>
+            <a:buNone/>
           </a:pPr>
           <a:r>
             <a:rPr lang="de-DE" sz="1300" kern="1200"/>
@@ -3712,7 +3474,7 @@
         </a:bodyPr>
         <a:lstStyle/>
         <a:p>
-          <a:pPr lvl="0" algn="ctr" defTabSz="488950">
+          <a:pPr marL="0" lvl="0" indent="0" algn="ctr" defTabSz="488950">
             <a:lnSpc>
               <a:spcPct val="90000"/>
             </a:lnSpc>
@@ -3722,6 +3484,7 @@
             <a:spcAft>
               <a:spcPct val="35000"/>
             </a:spcAft>
+            <a:buNone/>
           </a:pPr>
           <a:endParaRPr lang="de-DE" sz="1100" kern="1200"/>
         </a:p>
@@ -3778,7 +3541,7 @@
         </a:bodyPr>
         <a:lstStyle/>
         <a:p>
-          <a:pPr lvl="0" algn="ctr" defTabSz="577850">
+          <a:pPr marL="0" lvl="0" indent="0" algn="ctr" defTabSz="577850">
             <a:lnSpc>
               <a:spcPct val="90000"/>
             </a:lnSpc>
@@ -3788,6 +3551,7 @@
             <a:spcAft>
               <a:spcPct val="35000"/>
             </a:spcAft>
+            <a:buNone/>
           </a:pPr>
           <a:r>
             <a:rPr lang="de-DE" sz="1300" kern="1200"/>
@@ -3850,7 +3614,7 @@
         </a:bodyPr>
         <a:lstStyle/>
         <a:p>
-          <a:pPr lvl="0" algn="ctr" defTabSz="488950">
+          <a:pPr marL="0" lvl="0" indent="0" algn="ctr" defTabSz="488950">
             <a:lnSpc>
               <a:spcPct val="90000"/>
             </a:lnSpc>
@@ -3860,6 +3624,7 @@
             <a:spcAft>
               <a:spcPct val="35000"/>
             </a:spcAft>
+            <a:buNone/>
           </a:pPr>
           <a:endParaRPr lang="de-DE" sz="1100" kern="1200"/>
         </a:p>
@@ -3916,7 +3681,7 @@
         </a:bodyPr>
         <a:lstStyle/>
         <a:p>
-          <a:pPr lvl="0" algn="ctr" defTabSz="577850">
+          <a:pPr marL="0" lvl="0" indent="0" algn="ctr" defTabSz="577850">
             <a:lnSpc>
               <a:spcPct val="90000"/>
             </a:lnSpc>
@@ -3926,6 +3691,7 @@
             <a:spcAft>
               <a:spcPct val="35000"/>
             </a:spcAft>
+            <a:buNone/>
           </a:pPr>
           <a:r>
             <a:rPr lang="de-DE" sz="1300" b="1" kern="1200"/>
@@ -3988,7 +3754,7 @@
         </a:bodyPr>
         <a:lstStyle/>
         <a:p>
-          <a:pPr lvl="0" algn="ctr" defTabSz="488950">
+          <a:pPr marL="0" lvl="0" indent="0" algn="ctr" defTabSz="488950">
             <a:lnSpc>
               <a:spcPct val="90000"/>
             </a:lnSpc>
@@ -3998,6 +3764,7 @@
             <a:spcAft>
               <a:spcPct val="35000"/>
             </a:spcAft>
+            <a:buNone/>
           </a:pPr>
           <a:endParaRPr lang="de-DE" sz="1100" kern="1200"/>
         </a:p>
@@ -4054,7 +3821,7 @@
         </a:bodyPr>
         <a:lstStyle/>
         <a:p>
-          <a:pPr lvl="0" algn="ctr" defTabSz="577850">
+          <a:pPr marL="0" lvl="0" indent="0" algn="ctr" defTabSz="577850">
             <a:lnSpc>
               <a:spcPct val="90000"/>
             </a:lnSpc>
@@ -4064,6 +3831,7 @@
             <a:spcAft>
               <a:spcPct val="35000"/>
             </a:spcAft>
+            <a:buNone/>
           </a:pPr>
           <a:r>
             <a:rPr lang="de-DE" sz="1300" kern="1200"/>
@@ -5298,7 +5066,7 @@
           <a:lstStyle/>
           <a:p>
             <a:r>
-              <a:rPr lang="de-DE" smtClean="0"/>
+              <a:rPr lang="de-DE"/>
               <a:t>Titelmasterformat durch Klicken bearbeiten</a:t>
             </a:r>
             <a:endParaRPr lang="en-GB"/>
@@ -5417,7 +5185,7 @@
           </a:lstStyle>
           <a:p>
             <a:r>
-              <a:rPr lang="de-DE" smtClean="0"/>
+              <a:rPr lang="de-DE"/>
               <a:t>Formatvorlage des Untertitelmasters durch Klicken bearbeiten</a:t>
             </a:r>
             <a:endParaRPr lang="en-GB"/>
@@ -5441,7 +5209,7 @@
           <a:p>
             <a:fld id="{11A2203D-8DA4-4655-BF9E-AA17BDE25312}" type="datetimeFigureOut">
               <a:rPr lang="en-GB" smtClean="0"/>
-              <a:t>11/11/2016</a:t>
+              <a:t>26/01/2021</a:t>
             </a:fld>
             <a:endParaRPr lang="en-GB"/>
           </a:p>
@@ -5535,7 +5303,7 @@
           <a:lstStyle/>
           <a:p>
             <a:r>
-              <a:rPr lang="de-DE" smtClean="0"/>
+              <a:rPr lang="de-DE"/>
               <a:t>Titelmasterformat durch Klicken bearbeiten</a:t>
             </a:r>
             <a:endParaRPr lang="en-GB"/>
@@ -5559,35 +5327,35 @@
           <a:p>
             <a:pPr lvl="0"/>
             <a:r>
-              <a:rPr lang="de-DE" smtClean="0"/>
+              <a:rPr lang="de-DE"/>
               <a:t>Textmasterformat bearbeiten</a:t>
             </a:r>
           </a:p>
           <a:p>
             <a:pPr lvl="1"/>
             <a:r>
-              <a:rPr lang="de-DE" smtClean="0"/>
+              <a:rPr lang="de-DE"/>
               <a:t>Zweite Ebene</a:t>
             </a:r>
           </a:p>
           <a:p>
             <a:pPr lvl="2"/>
             <a:r>
-              <a:rPr lang="de-DE" smtClean="0"/>
+              <a:rPr lang="de-DE"/>
               <a:t>Dritte Ebene</a:t>
             </a:r>
           </a:p>
           <a:p>
             <a:pPr lvl="3"/>
             <a:r>
-              <a:rPr lang="de-DE" smtClean="0"/>
+              <a:rPr lang="de-DE"/>
               <a:t>Vierte Ebene</a:t>
             </a:r>
           </a:p>
           <a:p>
             <a:pPr lvl="4"/>
             <a:r>
-              <a:rPr lang="de-DE" smtClean="0"/>
+              <a:rPr lang="de-DE"/>
               <a:t>Fünfte Ebene</a:t>
             </a:r>
             <a:endParaRPr lang="en-GB"/>
@@ -5611,7 +5379,7 @@
           <a:p>
             <a:fld id="{11A2203D-8DA4-4655-BF9E-AA17BDE25312}" type="datetimeFigureOut">
               <a:rPr lang="en-GB" smtClean="0"/>
-              <a:t>11/11/2016</a:t>
+              <a:t>26/01/2021</a:t>
             </a:fld>
             <a:endParaRPr lang="en-GB"/>
           </a:p>
@@ -5710,7 +5478,7 @@
           <a:lstStyle/>
           <a:p>
             <a:r>
-              <a:rPr lang="de-DE" smtClean="0"/>
+              <a:rPr lang="de-DE"/>
               <a:t>Titelmasterformat durch Klicken bearbeiten</a:t>
             </a:r>
             <a:endParaRPr lang="en-GB"/>
@@ -5739,35 +5507,35 @@
           <a:p>
             <a:pPr lvl="0"/>
             <a:r>
-              <a:rPr lang="de-DE" smtClean="0"/>
+              <a:rPr lang="de-DE"/>
               <a:t>Textmasterformat bearbeiten</a:t>
             </a:r>
           </a:p>
           <a:p>
             <a:pPr lvl="1"/>
             <a:r>
-              <a:rPr lang="de-DE" smtClean="0"/>
+              <a:rPr lang="de-DE"/>
               <a:t>Zweite Ebene</a:t>
             </a:r>
           </a:p>
           <a:p>
             <a:pPr lvl="2"/>
             <a:r>
-              <a:rPr lang="de-DE" smtClean="0"/>
+              <a:rPr lang="de-DE"/>
               <a:t>Dritte Ebene</a:t>
             </a:r>
           </a:p>
           <a:p>
             <a:pPr lvl="3"/>
             <a:r>
-              <a:rPr lang="de-DE" smtClean="0"/>
+              <a:rPr lang="de-DE"/>
               <a:t>Vierte Ebene</a:t>
             </a:r>
           </a:p>
           <a:p>
             <a:pPr lvl="4"/>
             <a:r>
-              <a:rPr lang="de-DE" smtClean="0"/>
+              <a:rPr lang="de-DE"/>
               <a:t>Fünfte Ebene</a:t>
             </a:r>
             <a:endParaRPr lang="en-GB"/>
@@ -5791,7 +5559,7 @@
           <a:p>
             <a:fld id="{11A2203D-8DA4-4655-BF9E-AA17BDE25312}" type="datetimeFigureOut">
               <a:rPr lang="en-GB" smtClean="0"/>
-              <a:t>11/11/2016</a:t>
+              <a:t>26/01/2021</a:t>
             </a:fld>
             <a:endParaRPr lang="en-GB"/>
           </a:p>
@@ -5885,7 +5653,7 @@
           <a:lstStyle/>
           <a:p>
             <a:r>
-              <a:rPr lang="de-DE" smtClean="0"/>
+              <a:rPr lang="de-DE"/>
               <a:t>Titelmasterformat durch Klicken bearbeiten</a:t>
             </a:r>
             <a:endParaRPr lang="en-GB"/>
@@ -5909,35 +5677,35 @@
           <a:p>
             <a:pPr lvl="0"/>
             <a:r>
-              <a:rPr lang="de-DE" smtClean="0"/>
+              <a:rPr lang="de-DE"/>
               <a:t>Textmasterformat bearbeiten</a:t>
             </a:r>
           </a:p>
           <a:p>
             <a:pPr lvl="1"/>
             <a:r>
-              <a:rPr lang="de-DE" smtClean="0"/>
+              <a:rPr lang="de-DE"/>
               <a:t>Zweite Ebene</a:t>
             </a:r>
           </a:p>
           <a:p>
             <a:pPr lvl="2"/>
             <a:r>
-              <a:rPr lang="de-DE" smtClean="0"/>
+              <a:rPr lang="de-DE"/>
               <a:t>Dritte Ebene</a:t>
             </a:r>
           </a:p>
           <a:p>
             <a:pPr lvl="3"/>
             <a:r>
-              <a:rPr lang="de-DE" smtClean="0"/>
+              <a:rPr lang="de-DE"/>
               <a:t>Vierte Ebene</a:t>
             </a:r>
           </a:p>
           <a:p>
             <a:pPr lvl="4"/>
             <a:r>
-              <a:rPr lang="de-DE" smtClean="0"/>
+              <a:rPr lang="de-DE"/>
               <a:t>Fünfte Ebene</a:t>
             </a:r>
             <a:endParaRPr lang="en-GB"/>
@@ -5961,7 +5729,7 @@
           <a:p>
             <a:fld id="{11A2203D-8DA4-4655-BF9E-AA17BDE25312}" type="datetimeFigureOut">
               <a:rPr lang="en-GB" smtClean="0"/>
-              <a:t>11/11/2016</a:t>
+              <a:t>26/01/2021</a:t>
             </a:fld>
             <a:endParaRPr lang="en-GB"/>
           </a:p>
@@ -6064,7 +5832,7 @@
           </a:lstStyle>
           <a:p>
             <a:r>
-              <a:rPr lang="de-DE" smtClean="0"/>
+              <a:rPr lang="de-DE"/>
               <a:t>Titelmasterformat durch Klicken bearbeiten</a:t>
             </a:r>
             <a:endParaRPr lang="en-GB"/>
@@ -6184,7 +5952,7 @@
           <a:p>
             <a:pPr lvl="0"/>
             <a:r>
-              <a:rPr lang="de-DE" smtClean="0"/>
+              <a:rPr lang="de-DE"/>
               <a:t>Textmasterformat bearbeiten</a:t>
             </a:r>
           </a:p>
@@ -6207,7 +5975,7 @@
           <a:p>
             <a:fld id="{11A2203D-8DA4-4655-BF9E-AA17BDE25312}" type="datetimeFigureOut">
               <a:rPr lang="en-GB" smtClean="0"/>
-              <a:t>11/11/2016</a:t>
+              <a:t>26/01/2021</a:t>
             </a:fld>
             <a:endParaRPr lang="en-GB"/>
           </a:p>
@@ -6301,7 +6069,7 @@
           <a:lstStyle/>
           <a:p>
             <a:r>
-              <a:rPr lang="de-DE" smtClean="0"/>
+              <a:rPr lang="de-DE"/>
               <a:t>Titelmasterformat durch Klicken bearbeiten</a:t>
             </a:r>
             <a:endParaRPr lang="en-GB"/>
@@ -6358,35 +6126,35 @@
           <a:p>
             <a:pPr lvl="0"/>
             <a:r>
-              <a:rPr lang="de-DE" smtClean="0"/>
+              <a:rPr lang="de-DE"/>
               <a:t>Textmasterformat bearbeiten</a:t>
             </a:r>
           </a:p>
           <a:p>
             <a:pPr lvl="1"/>
             <a:r>
-              <a:rPr lang="de-DE" smtClean="0"/>
+              <a:rPr lang="de-DE"/>
               <a:t>Zweite Ebene</a:t>
             </a:r>
           </a:p>
           <a:p>
             <a:pPr lvl="2"/>
             <a:r>
-              <a:rPr lang="de-DE" smtClean="0"/>
+              <a:rPr lang="de-DE"/>
               <a:t>Dritte Ebene</a:t>
             </a:r>
           </a:p>
           <a:p>
             <a:pPr lvl="3"/>
             <a:r>
-              <a:rPr lang="de-DE" smtClean="0"/>
+              <a:rPr lang="de-DE"/>
               <a:t>Vierte Ebene</a:t>
             </a:r>
           </a:p>
           <a:p>
             <a:pPr lvl="4"/>
             <a:r>
-              <a:rPr lang="de-DE" smtClean="0"/>
+              <a:rPr lang="de-DE"/>
               <a:t>Fünfte Ebene</a:t>
             </a:r>
             <a:endParaRPr lang="en-GB"/>
@@ -6443,35 +6211,35 @@
           <a:p>
             <a:pPr lvl="0"/>
             <a:r>
-              <a:rPr lang="de-DE" smtClean="0"/>
+              <a:rPr lang="de-DE"/>
               <a:t>Textmasterformat bearbeiten</a:t>
             </a:r>
           </a:p>
           <a:p>
             <a:pPr lvl="1"/>
             <a:r>
-              <a:rPr lang="de-DE" smtClean="0"/>
+              <a:rPr lang="de-DE"/>
               <a:t>Zweite Ebene</a:t>
             </a:r>
           </a:p>
           <a:p>
             <a:pPr lvl="2"/>
             <a:r>
-              <a:rPr lang="de-DE" smtClean="0"/>
+              <a:rPr lang="de-DE"/>
               <a:t>Dritte Ebene</a:t>
             </a:r>
           </a:p>
           <a:p>
             <a:pPr lvl="3"/>
             <a:r>
-              <a:rPr lang="de-DE" smtClean="0"/>
+              <a:rPr lang="de-DE"/>
               <a:t>Vierte Ebene</a:t>
             </a:r>
           </a:p>
           <a:p>
             <a:pPr lvl="4"/>
             <a:r>
-              <a:rPr lang="de-DE" smtClean="0"/>
+              <a:rPr lang="de-DE"/>
               <a:t>Fünfte Ebene</a:t>
             </a:r>
             <a:endParaRPr lang="en-GB"/>
@@ -6495,7 +6263,7 @@
           <a:p>
             <a:fld id="{11A2203D-8DA4-4655-BF9E-AA17BDE25312}" type="datetimeFigureOut">
               <a:rPr lang="en-GB" smtClean="0"/>
-              <a:t>11/11/2016</a:t>
+              <a:t>26/01/2021</a:t>
             </a:fld>
             <a:endParaRPr lang="en-GB"/>
           </a:p>
@@ -6593,7 +6361,7 @@
           </a:lstStyle>
           <a:p>
             <a:r>
-              <a:rPr lang="de-DE" smtClean="0"/>
+              <a:rPr lang="de-DE"/>
               <a:t>Titelmasterformat durch Klicken bearbeiten</a:t>
             </a:r>
             <a:endParaRPr lang="en-GB"/>
@@ -6659,7 +6427,7 @@
           <a:p>
             <a:pPr lvl="0"/>
             <a:r>
-              <a:rPr lang="de-DE" smtClean="0"/>
+              <a:rPr lang="de-DE"/>
               <a:t>Textmasterformat bearbeiten</a:t>
             </a:r>
           </a:p>
@@ -6715,35 +6483,35 @@
           <a:p>
             <a:pPr lvl="0"/>
             <a:r>
-              <a:rPr lang="de-DE" smtClean="0"/>
+              <a:rPr lang="de-DE"/>
               <a:t>Textmasterformat bearbeiten</a:t>
             </a:r>
           </a:p>
           <a:p>
             <a:pPr lvl="1"/>
             <a:r>
-              <a:rPr lang="de-DE" smtClean="0"/>
+              <a:rPr lang="de-DE"/>
               <a:t>Zweite Ebene</a:t>
             </a:r>
           </a:p>
           <a:p>
             <a:pPr lvl="2"/>
             <a:r>
-              <a:rPr lang="de-DE" smtClean="0"/>
+              <a:rPr lang="de-DE"/>
               <a:t>Dritte Ebene</a:t>
             </a:r>
           </a:p>
           <a:p>
             <a:pPr lvl="3"/>
             <a:r>
-              <a:rPr lang="de-DE" smtClean="0"/>
+              <a:rPr lang="de-DE"/>
               <a:t>Vierte Ebene</a:t>
             </a:r>
           </a:p>
           <a:p>
             <a:pPr lvl="4"/>
             <a:r>
-              <a:rPr lang="de-DE" smtClean="0"/>
+              <a:rPr lang="de-DE"/>
               <a:t>Fünfte Ebene</a:t>
             </a:r>
             <a:endParaRPr lang="en-GB"/>
@@ -6809,7 +6577,7 @@
           <a:p>
             <a:pPr lvl="0"/>
             <a:r>
-              <a:rPr lang="de-DE" smtClean="0"/>
+              <a:rPr lang="de-DE"/>
               <a:t>Textmasterformat bearbeiten</a:t>
             </a:r>
           </a:p>
@@ -6865,35 +6633,35 @@
           <a:p>
             <a:pPr lvl="0"/>
             <a:r>
-              <a:rPr lang="de-DE" smtClean="0"/>
+              <a:rPr lang="de-DE"/>
               <a:t>Textmasterformat bearbeiten</a:t>
             </a:r>
           </a:p>
           <a:p>
             <a:pPr lvl="1"/>
             <a:r>
-              <a:rPr lang="de-DE" smtClean="0"/>
+              <a:rPr lang="de-DE"/>
               <a:t>Zweite Ebene</a:t>
             </a:r>
           </a:p>
           <a:p>
             <a:pPr lvl="2"/>
             <a:r>
-              <a:rPr lang="de-DE" smtClean="0"/>
+              <a:rPr lang="de-DE"/>
               <a:t>Dritte Ebene</a:t>
             </a:r>
           </a:p>
           <a:p>
             <a:pPr lvl="3"/>
             <a:r>
-              <a:rPr lang="de-DE" smtClean="0"/>
+              <a:rPr lang="de-DE"/>
               <a:t>Vierte Ebene</a:t>
             </a:r>
           </a:p>
           <a:p>
             <a:pPr lvl="4"/>
             <a:r>
-              <a:rPr lang="de-DE" smtClean="0"/>
+              <a:rPr lang="de-DE"/>
               <a:t>Fünfte Ebene</a:t>
             </a:r>
             <a:endParaRPr lang="en-GB"/>
@@ -6917,7 +6685,7 @@
           <a:p>
             <a:fld id="{11A2203D-8DA4-4655-BF9E-AA17BDE25312}" type="datetimeFigureOut">
               <a:rPr lang="en-GB" smtClean="0"/>
-              <a:t>11/11/2016</a:t>
+              <a:t>26/01/2021</a:t>
             </a:fld>
             <a:endParaRPr lang="en-GB"/>
           </a:p>
@@ -7011,7 +6779,7 @@
           <a:lstStyle/>
           <a:p>
             <a:r>
-              <a:rPr lang="de-DE" smtClean="0"/>
+              <a:rPr lang="de-DE"/>
               <a:t>Titelmasterformat durch Klicken bearbeiten</a:t>
             </a:r>
             <a:endParaRPr lang="en-GB"/>
@@ -7035,7 +6803,7 @@
           <a:p>
             <a:fld id="{11A2203D-8DA4-4655-BF9E-AA17BDE25312}" type="datetimeFigureOut">
               <a:rPr lang="en-GB" smtClean="0"/>
-              <a:t>11/11/2016</a:t>
+              <a:t>26/01/2021</a:t>
             </a:fld>
             <a:endParaRPr lang="en-GB"/>
           </a:p>
@@ -7130,7 +6898,7 @@
           <a:p>
             <a:fld id="{11A2203D-8DA4-4655-BF9E-AA17BDE25312}" type="datetimeFigureOut">
               <a:rPr lang="en-GB" smtClean="0"/>
-              <a:t>11/11/2016</a:t>
+              <a:t>26/01/2021</a:t>
             </a:fld>
             <a:endParaRPr lang="en-GB"/>
           </a:p>
@@ -7233,7 +7001,7 @@
           </a:lstStyle>
           <a:p>
             <a:r>
-              <a:rPr lang="de-DE" smtClean="0"/>
+              <a:rPr lang="de-DE"/>
               <a:t>Titelmasterformat durch Klicken bearbeiten</a:t>
             </a:r>
             <a:endParaRPr lang="en-GB"/>
@@ -7290,35 +7058,35 @@
           <a:p>
             <a:pPr lvl="0"/>
             <a:r>
-              <a:rPr lang="de-DE" smtClean="0"/>
+              <a:rPr lang="de-DE"/>
               <a:t>Textmasterformat bearbeiten</a:t>
             </a:r>
           </a:p>
           <a:p>
             <a:pPr lvl="1"/>
             <a:r>
-              <a:rPr lang="de-DE" smtClean="0"/>
+              <a:rPr lang="de-DE"/>
               <a:t>Zweite Ebene</a:t>
             </a:r>
           </a:p>
           <a:p>
             <a:pPr lvl="2"/>
             <a:r>
-              <a:rPr lang="de-DE" smtClean="0"/>
+              <a:rPr lang="de-DE"/>
               <a:t>Dritte Ebene</a:t>
             </a:r>
           </a:p>
           <a:p>
             <a:pPr lvl="3"/>
             <a:r>
-              <a:rPr lang="de-DE" smtClean="0"/>
+              <a:rPr lang="de-DE"/>
               <a:t>Vierte Ebene</a:t>
             </a:r>
           </a:p>
           <a:p>
             <a:pPr lvl="4"/>
             <a:r>
-              <a:rPr lang="de-DE" smtClean="0"/>
+              <a:rPr lang="de-DE"/>
               <a:t>Fünfte Ebene</a:t>
             </a:r>
             <a:endParaRPr lang="en-GB"/>
@@ -7384,7 +7152,7 @@
           <a:p>
             <a:pPr lvl="0"/>
             <a:r>
-              <a:rPr lang="de-DE" smtClean="0"/>
+              <a:rPr lang="de-DE"/>
               <a:t>Textmasterformat bearbeiten</a:t>
             </a:r>
           </a:p>
@@ -7407,7 +7175,7 @@
           <a:p>
             <a:fld id="{11A2203D-8DA4-4655-BF9E-AA17BDE25312}" type="datetimeFigureOut">
               <a:rPr lang="en-GB" smtClean="0"/>
-              <a:t>11/11/2016</a:t>
+              <a:t>26/01/2021</a:t>
             </a:fld>
             <a:endParaRPr lang="en-GB"/>
           </a:p>
@@ -7510,7 +7278,7 @@
           </a:lstStyle>
           <a:p>
             <a:r>
-              <a:rPr lang="de-DE" smtClean="0"/>
+              <a:rPr lang="de-DE"/>
               <a:t>Titelmasterformat durch Klicken bearbeiten</a:t>
             </a:r>
             <a:endParaRPr lang="en-GB"/>
@@ -7637,7 +7405,7 @@
           <a:p>
             <a:pPr lvl="0"/>
             <a:r>
-              <a:rPr lang="de-DE" smtClean="0"/>
+              <a:rPr lang="de-DE"/>
               <a:t>Textmasterformat bearbeiten</a:t>
             </a:r>
           </a:p>
@@ -7660,7 +7428,7 @@
           <a:p>
             <a:fld id="{11A2203D-8DA4-4655-BF9E-AA17BDE25312}" type="datetimeFigureOut">
               <a:rPr lang="en-GB" smtClean="0"/>
-              <a:t>11/11/2016</a:t>
+              <a:t>26/01/2021</a:t>
             </a:fld>
             <a:endParaRPr lang="en-GB"/>
           </a:p>
@@ -7772,7 +7540,7 @@
           <a:lstStyle/>
           <a:p>
             <a:r>
-              <a:rPr lang="de-DE" smtClean="0"/>
+              <a:rPr lang="de-DE"/>
               <a:t>Titelmasterformat durch Klicken bearbeiten</a:t>
             </a:r>
             <a:endParaRPr lang="en-GB"/>
@@ -7806,35 +7574,35 @@
           <a:p>
             <a:pPr lvl="0"/>
             <a:r>
-              <a:rPr lang="de-DE" smtClean="0"/>
+              <a:rPr lang="de-DE"/>
               <a:t>Textmasterformat bearbeiten</a:t>
             </a:r>
           </a:p>
           <a:p>
             <a:pPr lvl="1"/>
             <a:r>
-              <a:rPr lang="de-DE" smtClean="0"/>
+              <a:rPr lang="de-DE"/>
               <a:t>Zweite Ebene</a:t>
             </a:r>
           </a:p>
           <a:p>
             <a:pPr lvl="2"/>
             <a:r>
-              <a:rPr lang="de-DE" smtClean="0"/>
+              <a:rPr lang="de-DE"/>
               <a:t>Dritte Ebene</a:t>
             </a:r>
           </a:p>
           <a:p>
             <a:pPr lvl="3"/>
             <a:r>
-              <a:rPr lang="de-DE" smtClean="0"/>
+              <a:rPr lang="de-DE"/>
               <a:t>Vierte Ebene</a:t>
             </a:r>
           </a:p>
           <a:p>
             <a:pPr lvl="4"/>
             <a:r>
-              <a:rPr lang="de-DE" smtClean="0"/>
+              <a:rPr lang="de-DE"/>
               <a:t>Fünfte Ebene</a:t>
             </a:r>
             <a:endParaRPr lang="en-GB"/>
@@ -7876,7 +7644,7 @@
           <a:p>
             <a:fld id="{11A2203D-8DA4-4655-BF9E-AA17BDE25312}" type="datetimeFigureOut">
               <a:rPr lang="en-GB" smtClean="0"/>
-              <a:t>11/11/2016</a:t>
+              <a:t>26/01/2021</a:t>
             </a:fld>
             <a:endParaRPr lang="en-GB"/>
           </a:p>
@@ -10070,14 +9838,6 @@
                 </a:rPr>
                 <a:t>curve</a:t>
               </a:r>
-              <a:r>
-                <a:rPr lang="de-AT" sz="1100" dirty="0">
-                  <a:solidFill>
-                    <a:schemeClr val="accent2"/>
-                  </a:solidFill>
-                </a:rPr>
-                <a:t/>
-              </a:r>
               <a:br>
                 <a:rPr lang="de-AT" sz="1100" dirty="0">
                   <a:solidFill>
@@ -10300,10 +10060,6 @@
               <a:r>
                 <a:rPr lang="de-AT" sz="1200" b="1" baseline="-25000"/>
                 <a:t>lookahead</a:t>
-              </a:r>
-              <a:r>
-                <a:rPr lang="de-AT" sz="1200" b="1"/>
-                <a:t/>
               </a:r>
               <a:br>
                 <a:rPr lang="de-AT" sz="1200" b="1"/>
@@ -12255,13 +12011,6 @@
   <p:clrMapOvr>
     <a:masterClrMapping/>
   </p:clrMapOvr>
-  <p:timing>
-    <p:tnLst>
-      <p:par>
-        <p:cTn id="1" dur="indefinite" restart="never" nodeType="tmRoot"/>
-      </p:par>
-    </p:tnLst>
-  </p:timing>
 </p:sld>
 </file>
 
@@ -12699,13 +12448,6 @@
   <p:clrMapOvr>
     <a:masterClrMapping/>
   </p:clrMapOvr>
-  <p:timing>
-    <p:tnLst>
-      <p:par>
-        <p:cTn id="1" dur="indefinite" restart="never" nodeType="tmRoot"/>
-      </p:par>
-    </p:tnLst>
-  </p:timing>
 </p:sld>
 </file>
 
@@ -16085,6 +15827,297 @@
           </p:txBody>
         </p:sp>
       </p:grpSp>
+      <p:grpSp>
+        <p:nvGrpSpPr>
+          <p:cNvPr id="58" name="Gruppieren 57">
+            <a:extLst>
+              <a:ext uri="{FF2B5EF4-FFF2-40B4-BE49-F238E27FC236}">
+                <a16:creationId xmlns:a16="http://schemas.microsoft.com/office/drawing/2014/main" id="{A6893A34-7CC8-4DBF-AB07-612B89BFE370}"/>
+              </a:ext>
+            </a:extLst>
+          </p:cNvPr>
+          <p:cNvGrpSpPr/>
+          <p:nvPr/>
+        </p:nvGrpSpPr>
+        <p:grpSpPr>
+          <a:xfrm>
+            <a:off x="8166703" y="1512576"/>
+            <a:ext cx="1081585" cy="648951"/>
+            <a:chOff x="6061582" y="1115684"/>
+            <a:chExt cx="1081585" cy="648951"/>
+          </a:xfrm>
+        </p:grpSpPr>
+        <p:sp>
+          <p:nvSpPr>
+            <p:cNvPr id="59" name="Rechteck 58">
+              <a:extLst>
+                <a:ext uri="{FF2B5EF4-FFF2-40B4-BE49-F238E27FC236}">
+                  <a16:creationId xmlns:a16="http://schemas.microsoft.com/office/drawing/2014/main" id="{E72A0C68-6A5D-4EFE-8641-2B539DA3C18B}"/>
+                </a:ext>
+              </a:extLst>
+            </p:cNvPr>
+            <p:cNvSpPr/>
+            <p:nvPr/>
+          </p:nvSpPr>
+          <p:spPr>
+            <a:xfrm>
+              <a:off x="6061582" y="1115684"/>
+              <a:ext cx="1081585" cy="648951"/>
+            </a:xfrm>
+            <a:prstGeom prst="rect">
+              <a:avLst/>
+            </a:prstGeom>
+            <a:solidFill>
+              <a:schemeClr val="accent1">
+                <a:lumMod val="40000"/>
+                <a:lumOff val="60000"/>
+              </a:schemeClr>
+            </a:solidFill>
+            <a:ln w="12700">
+              <a:solidFill>
+                <a:schemeClr val="accent1"/>
+              </a:solidFill>
+            </a:ln>
+          </p:spPr>
+          <p:style>
+            <a:lnRef idx="2">
+              <a:schemeClr val="accent1"/>
+            </a:lnRef>
+            <a:fillRef idx="1">
+              <a:schemeClr val="lt1"/>
+            </a:fillRef>
+            <a:effectRef idx="0">
+              <a:schemeClr val="accent1"/>
+            </a:effectRef>
+            <a:fontRef idx="minor">
+              <a:schemeClr val="dk1"/>
+            </a:fontRef>
+          </p:style>
+        </p:sp>
+        <p:sp>
+          <p:nvSpPr>
+            <p:cNvPr id="60" name="Textfeld 59">
+              <a:extLst>
+                <a:ext uri="{FF2B5EF4-FFF2-40B4-BE49-F238E27FC236}">
+                  <a16:creationId xmlns:a16="http://schemas.microsoft.com/office/drawing/2014/main" id="{F65CCFD7-1242-4E78-80C3-20AA8AD7D041}"/>
+                </a:ext>
+              </a:extLst>
+            </p:cNvPr>
+            <p:cNvSpPr txBox="1"/>
+            <p:nvPr/>
+          </p:nvSpPr>
+          <p:spPr>
+            <a:xfrm>
+              <a:off x="6061582" y="1115684"/>
+              <a:ext cx="1081585" cy="648951"/>
+            </a:xfrm>
+            <a:prstGeom prst="rect">
+              <a:avLst/>
+            </a:prstGeom>
+          </p:spPr>
+          <p:style>
+            <a:lnRef idx="0">
+              <a:scrgbClr r="0" g="0" b="0"/>
+            </a:lnRef>
+            <a:fillRef idx="0">
+              <a:scrgbClr r="0" g="0" b="0"/>
+            </a:fillRef>
+            <a:effectRef idx="0">
+              <a:scrgbClr r="0" g="0" b="0"/>
+            </a:effectRef>
+            <a:fontRef idx="minor">
+              <a:schemeClr val="dk1"/>
+            </a:fontRef>
+          </p:style>
+          <p:txBody>
+            <a:bodyPr spcFirstLastPara="0" vert="horz" wrap="square" lIns="49530" tIns="49530" rIns="49530" bIns="49530" numCol="1" spcCol="1270" anchor="ctr" anchorCtr="0">
+              <a:noAutofit/>
+            </a:bodyPr>
+            <a:lstStyle/>
+            <a:p>
+              <a:pPr marL="0" lvl="0" indent="0" algn="ctr" defTabSz="577850">
+                <a:lnSpc>
+                  <a:spcPct val="90000"/>
+                </a:lnSpc>
+                <a:spcBef>
+                  <a:spcPct val="0"/>
+                </a:spcBef>
+                <a:spcAft>
+                  <a:spcPct val="35000"/>
+                </a:spcAft>
+                <a:buNone/>
+              </a:pPr>
+              <a:r>
+                <a:rPr lang="de-DE" sz="1300" kern="1200" dirty="0" err="1"/>
+                <a:t>Gearshift</a:t>
+              </a:r>
+              <a:br>
+                <a:rPr lang="de-DE" sz="1300" kern="1200" dirty="0"/>
+              </a:br>
+              <a:r>
+                <a:rPr lang="de-DE" sz="1300" kern="1200" dirty="0" err="1"/>
+                <a:t>Strategy</a:t>
+              </a:r>
+              <a:endParaRPr lang="de-DE" sz="1300" kern="1200" dirty="0"/>
+            </a:p>
+          </p:txBody>
+        </p:sp>
+      </p:grpSp>
+      <p:sp>
+        <p:nvSpPr>
+          <p:cNvPr id="78" name="Freihandform 16">
+            <a:extLst>
+              <a:ext uri="{FF2B5EF4-FFF2-40B4-BE49-F238E27FC236}">
+                <a16:creationId xmlns:a16="http://schemas.microsoft.com/office/drawing/2014/main" id="{21AC26AB-58C8-4F6C-9A4A-81AB084E2662}"/>
+              </a:ext>
+            </a:extLst>
+          </p:cNvPr>
+          <p:cNvSpPr/>
+          <p:nvPr/>
+        </p:nvSpPr>
+        <p:spPr>
+          <a:xfrm rot="5400000">
+            <a:off x="8496111" y="1230205"/>
+            <a:ext cx="362138" cy="268233"/>
+          </a:xfrm>
+          <a:custGeom>
+            <a:avLst/>
+            <a:gdLst>
+              <a:gd name="connsiteX0" fmla="*/ 0 w 229296"/>
+              <a:gd name="connsiteY0" fmla="*/ 53647 h 268233"/>
+              <a:gd name="connsiteX1" fmla="*/ 114648 w 229296"/>
+              <a:gd name="connsiteY1" fmla="*/ 53647 h 268233"/>
+              <a:gd name="connsiteX2" fmla="*/ 114648 w 229296"/>
+              <a:gd name="connsiteY2" fmla="*/ 0 h 268233"/>
+              <a:gd name="connsiteX3" fmla="*/ 229296 w 229296"/>
+              <a:gd name="connsiteY3" fmla="*/ 134117 h 268233"/>
+              <a:gd name="connsiteX4" fmla="*/ 114648 w 229296"/>
+              <a:gd name="connsiteY4" fmla="*/ 268233 h 268233"/>
+              <a:gd name="connsiteX5" fmla="*/ 114648 w 229296"/>
+              <a:gd name="connsiteY5" fmla="*/ 214586 h 268233"/>
+              <a:gd name="connsiteX6" fmla="*/ 0 w 229296"/>
+              <a:gd name="connsiteY6" fmla="*/ 214586 h 268233"/>
+              <a:gd name="connsiteX7" fmla="*/ 0 w 229296"/>
+              <a:gd name="connsiteY7" fmla="*/ 53647 h 268233"/>
+            </a:gdLst>
+            <a:ahLst/>
+            <a:cxnLst>
+              <a:cxn ang="0">
+                <a:pos x="connsiteX0" y="connsiteY0"/>
+              </a:cxn>
+              <a:cxn ang="0">
+                <a:pos x="connsiteX1" y="connsiteY1"/>
+              </a:cxn>
+              <a:cxn ang="0">
+                <a:pos x="connsiteX2" y="connsiteY2"/>
+              </a:cxn>
+              <a:cxn ang="0">
+                <a:pos x="connsiteX3" y="connsiteY3"/>
+              </a:cxn>
+              <a:cxn ang="0">
+                <a:pos x="connsiteX4" y="connsiteY4"/>
+              </a:cxn>
+              <a:cxn ang="0">
+                <a:pos x="connsiteX5" y="connsiteY5"/>
+              </a:cxn>
+              <a:cxn ang="0">
+                <a:pos x="connsiteX6" y="connsiteY6"/>
+              </a:cxn>
+              <a:cxn ang="0">
+                <a:pos x="connsiteX7" y="connsiteY7"/>
+              </a:cxn>
+            </a:cxnLst>
+            <a:rect l="l" t="t" r="r" b="b"/>
+            <a:pathLst>
+              <a:path w="229296" h="268233">
+                <a:moveTo>
+                  <a:pt x="0" y="53647"/>
+                </a:moveTo>
+                <a:lnTo>
+                  <a:pt x="114648" y="53647"/>
+                </a:lnTo>
+                <a:lnTo>
+                  <a:pt x="114648" y="0"/>
+                </a:lnTo>
+                <a:lnTo>
+                  <a:pt x="229296" y="134117"/>
+                </a:lnTo>
+                <a:lnTo>
+                  <a:pt x="114648" y="268233"/>
+                </a:lnTo>
+                <a:lnTo>
+                  <a:pt x="114648" y="214586"/>
+                </a:lnTo>
+                <a:lnTo>
+                  <a:pt x="0" y="214586"/>
+                </a:lnTo>
+                <a:lnTo>
+                  <a:pt x="0" y="53647"/>
+                </a:lnTo>
+                <a:close/>
+              </a:path>
+            </a:pathLst>
+          </a:custGeom>
+          <a:solidFill>
+            <a:srgbClr val="FF0000"/>
+          </a:solidFill>
+          <a:ln w="19050">
+            <a:noFill/>
+          </a:ln>
+        </p:spPr>
+        <p:style>
+          <a:lnRef idx="0">
+            <a:schemeClr val="accent1">
+              <a:tint val="60000"/>
+              <a:hueOff val="0"/>
+              <a:satOff val="0"/>
+              <a:lumOff val="0"/>
+              <a:alphaOff val="0"/>
+            </a:schemeClr>
+          </a:lnRef>
+          <a:fillRef idx="1">
+            <a:schemeClr val="accent1">
+              <a:tint val="60000"/>
+              <a:hueOff val="0"/>
+              <a:satOff val="0"/>
+              <a:lumOff val="0"/>
+              <a:alphaOff val="0"/>
+            </a:schemeClr>
+          </a:fillRef>
+          <a:effectRef idx="0">
+            <a:schemeClr val="accent1">
+              <a:tint val="60000"/>
+              <a:hueOff val="0"/>
+              <a:satOff val="0"/>
+              <a:lumOff val="0"/>
+              <a:alphaOff val="0"/>
+            </a:schemeClr>
+          </a:effectRef>
+          <a:fontRef idx="minor">
+            <a:schemeClr val="lt1"/>
+          </a:fontRef>
+        </p:style>
+        <p:txBody>
+          <a:bodyPr spcFirstLastPara="0" vert="horz" wrap="square" lIns="0" tIns="53647" rIns="68789" bIns="53647" numCol="1" spcCol="1270" anchor="ctr" anchorCtr="0">
+            <a:noAutofit/>
+          </a:bodyPr>
+          <a:lstStyle/>
+          <a:p>
+            <a:pPr algn="ctr" defTabSz="488930">
+              <a:lnSpc>
+                <a:spcPct val="90000"/>
+              </a:lnSpc>
+              <a:spcBef>
+                <a:spcPct val="0"/>
+              </a:spcBef>
+              <a:spcAft>
+                <a:spcPct val="35000"/>
+              </a:spcAft>
+            </a:pPr>
+            <a:endParaRPr lang="de-DE" sz="1100"/>
+          </a:p>
+        </p:txBody>
+      </p:sp>
     </p:spTree>
     <p:extLst>
       <p:ext uri="{BB962C8B-B14F-4D97-AF65-F5344CB8AC3E}">
@@ -16099,6 +16132,4469 @@
 </file>
 
 <file path=ppt/slides/slide19.xml><?xml version="1.0" encoding="utf-8"?>
+<p:sld xmlns:a="http://schemas.openxmlformats.org/drawingml/2006/main" xmlns:r="http://schemas.openxmlformats.org/officeDocument/2006/relationships" xmlns:p="http://schemas.openxmlformats.org/presentationml/2006/main">
+  <p:cSld>
+    <p:spTree>
+      <p:nvGrpSpPr>
+        <p:cNvPr id="1" name=""/>
+        <p:cNvGrpSpPr/>
+        <p:nvPr/>
+      </p:nvGrpSpPr>
+      <p:grpSpPr>
+        <a:xfrm>
+          <a:off x="0" y="0"/>
+          <a:ext cx="0" cy="0"/>
+          <a:chOff x="0" y="0"/>
+          <a:chExt cx="0" cy="0"/>
+        </a:xfrm>
+      </p:grpSpPr>
+      <p:grpSp>
+        <p:nvGrpSpPr>
+          <p:cNvPr id="73" name="Gruppieren 72">
+            <a:extLst>
+              <a:ext uri="{FF2B5EF4-FFF2-40B4-BE49-F238E27FC236}">
+                <a16:creationId xmlns:a16="http://schemas.microsoft.com/office/drawing/2014/main" id="{A5DB297B-674E-4EF9-ADFB-DEA19D618173}"/>
+              </a:ext>
+            </a:extLst>
+          </p:cNvPr>
+          <p:cNvGrpSpPr/>
+          <p:nvPr/>
+        </p:nvGrpSpPr>
+        <p:grpSpPr>
+          <a:xfrm>
+            <a:off x="4219759" y="4187803"/>
+            <a:ext cx="4434070" cy="1686097"/>
+            <a:chOff x="6061582" y="1115684"/>
+            <a:chExt cx="1081585" cy="648951"/>
+          </a:xfrm>
+        </p:grpSpPr>
+        <p:sp>
+          <p:nvSpPr>
+            <p:cNvPr id="74" name="Rechteck 73">
+              <a:extLst>
+                <a:ext uri="{FF2B5EF4-FFF2-40B4-BE49-F238E27FC236}">
+                  <a16:creationId xmlns:a16="http://schemas.microsoft.com/office/drawing/2014/main" id="{34D685FF-145F-4BA4-9F3B-20553CB0C7D3}"/>
+                </a:ext>
+              </a:extLst>
+            </p:cNvPr>
+            <p:cNvSpPr/>
+            <p:nvPr/>
+          </p:nvSpPr>
+          <p:spPr>
+            <a:xfrm>
+              <a:off x="6061582" y="1115684"/>
+              <a:ext cx="1081585" cy="648951"/>
+            </a:xfrm>
+            <a:prstGeom prst="rect">
+              <a:avLst/>
+            </a:prstGeom>
+            <a:solidFill>
+              <a:schemeClr val="accent1">
+                <a:lumMod val="40000"/>
+                <a:lumOff val="60000"/>
+              </a:schemeClr>
+            </a:solidFill>
+            <a:ln w="12700">
+              <a:solidFill>
+                <a:schemeClr val="accent1"/>
+              </a:solidFill>
+            </a:ln>
+          </p:spPr>
+          <p:style>
+            <a:lnRef idx="2">
+              <a:schemeClr val="accent1"/>
+            </a:lnRef>
+            <a:fillRef idx="1">
+              <a:schemeClr val="lt1"/>
+            </a:fillRef>
+            <a:effectRef idx="0">
+              <a:schemeClr val="accent1"/>
+            </a:effectRef>
+            <a:fontRef idx="minor">
+              <a:schemeClr val="dk1"/>
+            </a:fontRef>
+          </p:style>
+        </p:sp>
+        <p:sp>
+          <p:nvSpPr>
+            <p:cNvPr id="76" name="Textfeld 75">
+              <a:extLst>
+                <a:ext uri="{FF2B5EF4-FFF2-40B4-BE49-F238E27FC236}">
+                  <a16:creationId xmlns:a16="http://schemas.microsoft.com/office/drawing/2014/main" id="{34440801-AB69-464A-820F-167E56A62286}"/>
+                </a:ext>
+              </a:extLst>
+            </p:cNvPr>
+            <p:cNvSpPr txBox="1"/>
+            <p:nvPr/>
+          </p:nvSpPr>
+          <p:spPr>
+            <a:xfrm>
+              <a:off x="6061582" y="1115684"/>
+              <a:ext cx="1081585" cy="648951"/>
+            </a:xfrm>
+            <a:prstGeom prst="rect">
+              <a:avLst/>
+            </a:prstGeom>
+          </p:spPr>
+          <p:style>
+            <a:lnRef idx="0">
+              <a:scrgbClr r="0" g="0" b="0"/>
+            </a:lnRef>
+            <a:fillRef idx="0">
+              <a:scrgbClr r="0" g="0" b="0"/>
+            </a:fillRef>
+            <a:effectRef idx="0">
+              <a:scrgbClr r="0" g="0" b="0"/>
+            </a:effectRef>
+            <a:fontRef idx="minor">
+              <a:schemeClr val="dk1"/>
+            </a:fontRef>
+          </p:style>
+          <p:txBody>
+            <a:bodyPr spcFirstLastPara="0" vert="horz" wrap="square" lIns="49530" tIns="144000" rIns="49530" bIns="49530" numCol="1" spcCol="1270" anchor="t" anchorCtr="0">
+              <a:noAutofit/>
+            </a:bodyPr>
+            <a:lstStyle/>
+            <a:p>
+              <a:pPr marL="0" lvl="0" indent="0" algn="ctr" defTabSz="577850">
+                <a:lnSpc>
+                  <a:spcPct val="90000"/>
+                </a:lnSpc>
+                <a:spcBef>
+                  <a:spcPct val="0"/>
+                </a:spcBef>
+                <a:spcAft>
+                  <a:spcPct val="35000"/>
+                </a:spcAft>
+                <a:buNone/>
+              </a:pPr>
+              <a:r>
+                <a:rPr lang="de-DE" sz="1300" kern="1200" dirty="0"/>
+                <a:t>Test Powertrain</a:t>
+              </a:r>
+            </a:p>
+          </p:txBody>
+        </p:sp>
+      </p:grpSp>
+      <p:sp>
+        <p:nvSpPr>
+          <p:cNvPr id="61" name="Freihandform 21">
+            <a:extLst>
+              <a:ext uri="{FF2B5EF4-FFF2-40B4-BE49-F238E27FC236}">
+                <a16:creationId xmlns:a16="http://schemas.microsoft.com/office/drawing/2014/main" id="{39858EE9-3DC9-4FD8-AE70-59FA1C2B6623}"/>
+              </a:ext>
+            </a:extLst>
+          </p:cNvPr>
+          <p:cNvSpPr/>
+          <p:nvPr/>
+        </p:nvSpPr>
+        <p:spPr>
+          <a:xfrm>
+            <a:off x="7428987" y="2132855"/>
+            <a:ext cx="792088" cy="648951"/>
+          </a:xfrm>
+          <a:custGeom>
+            <a:avLst/>
+            <a:gdLst>
+              <a:gd name="connsiteX0" fmla="*/ 0 w 1081585"/>
+              <a:gd name="connsiteY0" fmla="*/ 0 h 648951"/>
+              <a:gd name="connsiteX1" fmla="*/ 1081585 w 1081585"/>
+              <a:gd name="connsiteY1" fmla="*/ 0 h 648951"/>
+              <a:gd name="connsiteX2" fmla="*/ 1081585 w 1081585"/>
+              <a:gd name="connsiteY2" fmla="*/ 648951 h 648951"/>
+              <a:gd name="connsiteX3" fmla="*/ 0 w 1081585"/>
+              <a:gd name="connsiteY3" fmla="*/ 648951 h 648951"/>
+              <a:gd name="connsiteX4" fmla="*/ 0 w 1081585"/>
+              <a:gd name="connsiteY4" fmla="*/ 0 h 648951"/>
+            </a:gdLst>
+            <a:ahLst/>
+            <a:cxnLst>
+              <a:cxn ang="0">
+                <a:pos x="connsiteX0" y="connsiteY0"/>
+              </a:cxn>
+              <a:cxn ang="0">
+                <a:pos x="connsiteX1" y="connsiteY1"/>
+              </a:cxn>
+              <a:cxn ang="0">
+                <a:pos x="connsiteX2" y="connsiteY2"/>
+              </a:cxn>
+              <a:cxn ang="0">
+                <a:pos x="connsiteX3" y="connsiteY3"/>
+              </a:cxn>
+              <a:cxn ang="0">
+                <a:pos x="connsiteX4" y="connsiteY4"/>
+              </a:cxn>
+            </a:cxnLst>
+            <a:rect l="l" t="t" r="r" b="b"/>
+            <a:pathLst>
+              <a:path w="1081585" h="648951">
+                <a:moveTo>
+                  <a:pt x="0" y="0"/>
+                </a:moveTo>
+                <a:lnTo>
+                  <a:pt x="1081585" y="0"/>
+                </a:lnTo>
+                <a:lnTo>
+                  <a:pt x="1081585" y="648951"/>
+                </a:lnTo>
+                <a:lnTo>
+                  <a:pt x="0" y="648951"/>
+                </a:lnTo>
+                <a:lnTo>
+                  <a:pt x="0" y="0"/>
+                </a:lnTo>
+                <a:close/>
+              </a:path>
+            </a:pathLst>
+          </a:custGeom>
+          <a:ln/>
+        </p:spPr>
+        <p:style>
+          <a:lnRef idx="2">
+            <a:schemeClr val="accent1">
+              <a:shade val="50000"/>
+            </a:schemeClr>
+          </a:lnRef>
+          <a:fillRef idx="1">
+            <a:schemeClr val="accent1"/>
+          </a:fillRef>
+          <a:effectRef idx="0">
+            <a:schemeClr val="accent1"/>
+          </a:effectRef>
+          <a:fontRef idx="minor">
+            <a:schemeClr val="lt1"/>
+          </a:fontRef>
+        </p:style>
+        <p:txBody>
+          <a:bodyPr spcFirstLastPara="0" vert="horz" wrap="square" lIns="49530" tIns="49530" rIns="49530" bIns="49530" numCol="1" spcCol="1270" anchor="ctr" anchorCtr="0">
+            <a:noAutofit/>
+          </a:bodyPr>
+          <a:lstStyle/>
+          <a:p>
+            <a:pPr algn="ctr" defTabSz="577826">
+              <a:lnSpc>
+                <a:spcPct val="90000"/>
+              </a:lnSpc>
+              <a:spcBef>
+                <a:spcPct val="0"/>
+              </a:spcBef>
+              <a:spcAft>
+                <a:spcPct val="35000"/>
+              </a:spcAft>
+            </a:pPr>
+            <a:r>
+              <a:rPr lang="de-DE" sz="1300"/>
+              <a:t>Gearbox</a:t>
+            </a:r>
+          </a:p>
+        </p:txBody>
+      </p:sp>
+      <p:sp>
+        <p:nvSpPr>
+          <p:cNvPr id="33" name="Freihandform 5">
+            <a:extLst>
+              <a:ext uri="{FF2B5EF4-FFF2-40B4-BE49-F238E27FC236}">
+                <a16:creationId xmlns:a16="http://schemas.microsoft.com/office/drawing/2014/main" id="{978B1CA5-326D-48A3-8085-D51A681FDF38}"/>
+              </a:ext>
+            </a:extLst>
+          </p:cNvPr>
+          <p:cNvSpPr/>
+          <p:nvPr/>
+        </p:nvSpPr>
+        <p:spPr>
+          <a:xfrm>
+            <a:off x="284568" y="2136228"/>
+            <a:ext cx="792088" cy="648951"/>
+          </a:xfrm>
+          <a:custGeom>
+            <a:avLst/>
+            <a:gdLst>
+              <a:gd name="connsiteX0" fmla="*/ 0 w 1081585"/>
+              <a:gd name="connsiteY0" fmla="*/ 0 h 648951"/>
+              <a:gd name="connsiteX1" fmla="*/ 1081585 w 1081585"/>
+              <a:gd name="connsiteY1" fmla="*/ 0 h 648951"/>
+              <a:gd name="connsiteX2" fmla="*/ 1081585 w 1081585"/>
+              <a:gd name="connsiteY2" fmla="*/ 648951 h 648951"/>
+              <a:gd name="connsiteX3" fmla="*/ 0 w 1081585"/>
+              <a:gd name="connsiteY3" fmla="*/ 648951 h 648951"/>
+              <a:gd name="connsiteX4" fmla="*/ 0 w 1081585"/>
+              <a:gd name="connsiteY4" fmla="*/ 0 h 648951"/>
+            </a:gdLst>
+            <a:ahLst/>
+            <a:cxnLst>
+              <a:cxn ang="0">
+                <a:pos x="connsiteX0" y="connsiteY0"/>
+              </a:cxn>
+              <a:cxn ang="0">
+                <a:pos x="connsiteX1" y="connsiteY1"/>
+              </a:cxn>
+              <a:cxn ang="0">
+                <a:pos x="connsiteX2" y="connsiteY2"/>
+              </a:cxn>
+              <a:cxn ang="0">
+                <a:pos x="connsiteX3" y="connsiteY3"/>
+              </a:cxn>
+              <a:cxn ang="0">
+                <a:pos x="connsiteX4" y="connsiteY4"/>
+              </a:cxn>
+            </a:cxnLst>
+            <a:rect l="l" t="t" r="r" b="b"/>
+            <a:pathLst>
+              <a:path w="1081585" h="648951">
+                <a:moveTo>
+                  <a:pt x="0" y="0"/>
+                </a:moveTo>
+                <a:lnTo>
+                  <a:pt x="1081585" y="0"/>
+                </a:lnTo>
+                <a:lnTo>
+                  <a:pt x="1081585" y="648951"/>
+                </a:lnTo>
+                <a:lnTo>
+                  <a:pt x="0" y="648951"/>
+                </a:lnTo>
+                <a:lnTo>
+                  <a:pt x="0" y="0"/>
+                </a:lnTo>
+                <a:close/>
+              </a:path>
+            </a:pathLst>
+          </a:custGeom>
+          <a:ln/>
+        </p:spPr>
+        <p:style>
+          <a:lnRef idx="2">
+            <a:schemeClr val="accent1">
+              <a:shade val="50000"/>
+            </a:schemeClr>
+          </a:lnRef>
+          <a:fillRef idx="1">
+            <a:schemeClr val="accent1"/>
+          </a:fillRef>
+          <a:effectRef idx="0">
+            <a:schemeClr val="accent1"/>
+          </a:effectRef>
+          <a:fontRef idx="minor">
+            <a:schemeClr val="lt1"/>
+          </a:fontRef>
+        </p:style>
+        <p:txBody>
+          <a:bodyPr spcFirstLastPara="0" vert="horz" wrap="square" lIns="49530" tIns="49530" rIns="49530" bIns="49530" numCol="1" spcCol="1270" anchor="ctr" anchorCtr="0">
+            <a:noAutofit/>
+          </a:bodyPr>
+          <a:lstStyle/>
+          <a:p>
+            <a:pPr algn="ctr" defTabSz="577826">
+              <a:lnSpc>
+                <a:spcPct val="90000"/>
+              </a:lnSpc>
+              <a:spcBef>
+                <a:spcPct val="0"/>
+              </a:spcBef>
+              <a:spcAft>
+                <a:spcPct val="35000"/>
+              </a:spcAft>
+            </a:pPr>
+            <a:r>
+              <a:rPr lang="de-DE" sz="1300" dirty="0" err="1"/>
+              <a:t>Driving</a:t>
+            </a:r>
+            <a:r>
+              <a:rPr lang="de-DE" sz="1300" dirty="0"/>
+              <a:t> Cycle</a:t>
+            </a:r>
+          </a:p>
+        </p:txBody>
+      </p:sp>
+      <p:sp>
+        <p:nvSpPr>
+          <p:cNvPr id="34" name="Freihandform 7">
+            <a:extLst>
+              <a:ext uri="{FF2B5EF4-FFF2-40B4-BE49-F238E27FC236}">
+                <a16:creationId xmlns:a16="http://schemas.microsoft.com/office/drawing/2014/main" id="{9F482D04-B8C0-440A-86B9-9D774D939A4D}"/>
+              </a:ext>
+            </a:extLst>
+          </p:cNvPr>
+          <p:cNvSpPr/>
+          <p:nvPr/>
+        </p:nvSpPr>
+        <p:spPr>
+          <a:xfrm>
+            <a:off x="1309939" y="2136228"/>
+            <a:ext cx="792088" cy="648951"/>
+          </a:xfrm>
+          <a:custGeom>
+            <a:avLst/>
+            <a:gdLst>
+              <a:gd name="connsiteX0" fmla="*/ 0 w 1081585"/>
+              <a:gd name="connsiteY0" fmla="*/ 0 h 648951"/>
+              <a:gd name="connsiteX1" fmla="*/ 1081585 w 1081585"/>
+              <a:gd name="connsiteY1" fmla="*/ 0 h 648951"/>
+              <a:gd name="connsiteX2" fmla="*/ 1081585 w 1081585"/>
+              <a:gd name="connsiteY2" fmla="*/ 648951 h 648951"/>
+              <a:gd name="connsiteX3" fmla="*/ 0 w 1081585"/>
+              <a:gd name="connsiteY3" fmla="*/ 648951 h 648951"/>
+              <a:gd name="connsiteX4" fmla="*/ 0 w 1081585"/>
+              <a:gd name="connsiteY4" fmla="*/ 0 h 648951"/>
+            </a:gdLst>
+            <a:ahLst/>
+            <a:cxnLst>
+              <a:cxn ang="0">
+                <a:pos x="connsiteX0" y="connsiteY0"/>
+              </a:cxn>
+              <a:cxn ang="0">
+                <a:pos x="connsiteX1" y="connsiteY1"/>
+              </a:cxn>
+              <a:cxn ang="0">
+                <a:pos x="connsiteX2" y="connsiteY2"/>
+              </a:cxn>
+              <a:cxn ang="0">
+                <a:pos x="connsiteX3" y="connsiteY3"/>
+              </a:cxn>
+              <a:cxn ang="0">
+                <a:pos x="connsiteX4" y="connsiteY4"/>
+              </a:cxn>
+            </a:cxnLst>
+            <a:rect l="l" t="t" r="r" b="b"/>
+            <a:pathLst>
+              <a:path w="1081585" h="648951">
+                <a:moveTo>
+                  <a:pt x="0" y="0"/>
+                </a:moveTo>
+                <a:lnTo>
+                  <a:pt x="1081585" y="0"/>
+                </a:lnTo>
+                <a:lnTo>
+                  <a:pt x="1081585" y="648951"/>
+                </a:lnTo>
+                <a:lnTo>
+                  <a:pt x="0" y="648951"/>
+                </a:lnTo>
+                <a:lnTo>
+                  <a:pt x="0" y="0"/>
+                </a:lnTo>
+                <a:close/>
+              </a:path>
+            </a:pathLst>
+          </a:custGeom>
+          <a:ln/>
+        </p:spPr>
+        <p:style>
+          <a:lnRef idx="2">
+            <a:schemeClr val="accent1">
+              <a:shade val="50000"/>
+            </a:schemeClr>
+          </a:lnRef>
+          <a:fillRef idx="1">
+            <a:schemeClr val="accent1"/>
+          </a:fillRef>
+          <a:effectRef idx="0">
+            <a:schemeClr val="accent1"/>
+          </a:effectRef>
+          <a:fontRef idx="minor">
+            <a:schemeClr val="lt1"/>
+          </a:fontRef>
+        </p:style>
+        <p:txBody>
+          <a:bodyPr spcFirstLastPara="0" vert="horz" wrap="square" lIns="49530" tIns="49530" rIns="49530" bIns="49530" numCol="1" spcCol="1270" anchor="ctr" anchorCtr="0">
+            <a:noAutofit/>
+          </a:bodyPr>
+          <a:lstStyle/>
+          <a:p>
+            <a:pPr algn="ctr" defTabSz="577826">
+              <a:lnSpc>
+                <a:spcPct val="90000"/>
+              </a:lnSpc>
+              <a:spcBef>
+                <a:spcPct val="0"/>
+              </a:spcBef>
+              <a:spcAft>
+                <a:spcPct val="35000"/>
+              </a:spcAft>
+            </a:pPr>
+            <a:r>
+              <a:rPr lang="de-DE" sz="1300"/>
+              <a:t>Driver</a:t>
+            </a:r>
+          </a:p>
+        </p:txBody>
+      </p:sp>
+      <p:sp>
+        <p:nvSpPr>
+          <p:cNvPr id="35" name="Freihandform 9">
+            <a:extLst>
+              <a:ext uri="{FF2B5EF4-FFF2-40B4-BE49-F238E27FC236}">
+                <a16:creationId xmlns:a16="http://schemas.microsoft.com/office/drawing/2014/main" id="{AC57AC06-BEF8-43DD-8906-5155EE085233}"/>
+              </a:ext>
+            </a:extLst>
+          </p:cNvPr>
+          <p:cNvSpPr/>
+          <p:nvPr/>
+        </p:nvSpPr>
+        <p:spPr>
+          <a:xfrm>
+            <a:off x="2335310" y="2136228"/>
+            <a:ext cx="792088" cy="648951"/>
+          </a:xfrm>
+          <a:custGeom>
+            <a:avLst/>
+            <a:gdLst>
+              <a:gd name="connsiteX0" fmla="*/ 0 w 1081585"/>
+              <a:gd name="connsiteY0" fmla="*/ 0 h 648951"/>
+              <a:gd name="connsiteX1" fmla="*/ 1081585 w 1081585"/>
+              <a:gd name="connsiteY1" fmla="*/ 0 h 648951"/>
+              <a:gd name="connsiteX2" fmla="*/ 1081585 w 1081585"/>
+              <a:gd name="connsiteY2" fmla="*/ 648951 h 648951"/>
+              <a:gd name="connsiteX3" fmla="*/ 0 w 1081585"/>
+              <a:gd name="connsiteY3" fmla="*/ 648951 h 648951"/>
+              <a:gd name="connsiteX4" fmla="*/ 0 w 1081585"/>
+              <a:gd name="connsiteY4" fmla="*/ 0 h 648951"/>
+            </a:gdLst>
+            <a:ahLst/>
+            <a:cxnLst>
+              <a:cxn ang="0">
+                <a:pos x="connsiteX0" y="connsiteY0"/>
+              </a:cxn>
+              <a:cxn ang="0">
+                <a:pos x="connsiteX1" y="connsiteY1"/>
+              </a:cxn>
+              <a:cxn ang="0">
+                <a:pos x="connsiteX2" y="connsiteY2"/>
+              </a:cxn>
+              <a:cxn ang="0">
+                <a:pos x="connsiteX3" y="connsiteY3"/>
+              </a:cxn>
+              <a:cxn ang="0">
+                <a:pos x="connsiteX4" y="connsiteY4"/>
+              </a:cxn>
+            </a:cxnLst>
+            <a:rect l="l" t="t" r="r" b="b"/>
+            <a:pathLst>
+              <a:path w="1081585" h="648951">
+                <a:moveTo>
+                  <a:pt x="0" y="0"/>
+                </a:moveTo>
+                <a:lnTo>
+                  <a:pt x="1081585" y="0"/>
+                </a:lnTo>
+                <a:lnTo>
+                  <a:pt x="1081585" y="648951"/>
+                </a:lnTo>
+                <a:lnTo>
+                  <a:pt x="0" y="648951"/>
+                </a:lnTo>
+                <a:lnTo>
+                  <a:pt x="0" y="0"/>
+                </a:lnTo>
+                <a:close/>
+              </a:path>
+            </a:pathLst>
+          </a:custGeom>
+          <a:ln/>
+        </p:spPr>
+        <p:style>
+          <a:lnRef idx="2">
+            <a:schemeClr val="accent1">
+              <a:shade val="50000"/>
+            </a:schemeClr>
+          </a:lnRef>
+          <a:fillRef idx="1">
+            <a:schemeClr val="accent1"/>
+          </a:fillRef>
+          <a:effectRef idx="0">
+            <a:schemeClr val="accent1"/>
+          </a:effectRef>
+          <a:fontRef idx="minor">
+            <a:schemeClr val="lt1"/>
+          </a:fontRef>
+        </p:style>
+        <p:txBody>
+          <a:bodyPr spcFirstLastPara="0" vert="horz" wrap="square" lIns="49530" tIns="49530" rIns="49530" bIns="49530" numCol="1" spcCol="1270" anchor="ctr" anchorCtr="0">
+            <a:noAutofit/>
+          </a:bodyPr>
+          <a:lstStyle/>
+          <a:p>
+            <a:pPr algn="ctr" defTabSz="577826">
+              <a:lnSpc>
+                <a:spcPct val="90000"/>
+              </a:lnSpc>
+              <a:spcBef>
+                <a:spcPct val="0"/>
+              </a:spcBef>
+              <a:spcAft>
+                <a:spcPct val="35000"/>
+              </a:spcAft>
+            </a:pPr>
+            <a:r>
+              <a:rPr lang="de-DE" sz="1300" dirty="0" err="1"/>
+              <a:t>Vehicle</a:t>
+            </a:r>
+            <a:endParaRPr lang="de-DE" sz="1300" dirty="0"/>
+          </a:p>
+        </p:txBody>
+      </p:sp>
+      <p:sp>
+        <p:nvSpPr>
+          <p:cNvPr id="36" name="Freihandform 11">
+            <a:extLst>
+              <a:ext uri="{FF2B5EF4-FFF2-40B4-BE49-F238E27FC236}">
+                <a16:creationId xmlns:a16="http://schemas.microsoft.com/office/drawing/2014/main" id="{128F34BD-3F3F-42E7-889A-D15ADAAFFED8}"/>
+              </a:ext>
+            </a:extLst>
+          </p:cNvPr>
+          <p:cNvSpPr/>
+          <p:nvPr/>
+        </p:nvSpPr>
+        <p:spPr>
+          <a:xfrm>
+            <a:off x="3360681" y="2136228"/>
+            <a:ext cx="792088" cy="648951"/>
+          </a:xfrm>
+          <a:custGeom>
+            <a:avLst/>
+            <a:gdLst>
+              <a:gd name="connsiteX0" fmla="*/ 0 w 1081585"/>
+              <a:gd name="connsiteY0" fmla="*/ 0 h 648951"/>
+              <a:gd name="connsiteX1" fmla="*/ 1081585 w 1081585"/>
+              <a:gd name="connsiteY1" fmla="*/ 0 h 648951"/>
+              <a:gd name="connsiteX2" fmla="*/ 1081585 w 1081585"/>
+              <a:gd name="connsiteY2" fmla="*/ 648951 h 648951"/>
+              <a:gd name="connsiteX3" fmla="*/ 0 w 1081585"/>
+              <a:gd name="connsiteY3" fmla="*/ 648951 h 648951"/>
+              <a:gd name="connsiteX4" fmla="*/ 0 w 1081585"/>
+              <a:gd name="connsiteY4" fmla="*/ 0 h 648951"/>
+            </a:gdLst>
+            <a:ahLst/>
+            <a:cxnLst>
+              <a:cxn ang="0">
+                <a:pos x="connsiteX0" y="connsiteY0"/>
+              </a:cxn>
+              <a:cxn ang="0">
+                <a:pos x="connsiteX1" y="connsiteY1"/>
+              </a:cxn>
+              <a:cxn ang="0">
+                <a:pos x="connsiteX2" y="connsiteY2"/>
+              </a:cxn>
+              <a:cxn ang="0">
+                <a:pos x="connsiteX3" y="connsiteY3"/>
+              </a:cxn>
+              <a:cxn ang="0">
+                <a:pos x="connsiteX4" y="connsiteY4"/>
+              </a:cxn>
+            </a:cxnLst>
+            <a:rect l="l" t="t" r="r" b="b"/>
+            <a:pathLst>
+              <a:path w="1081585" h="648951">
+                <a:moveTo>
+                  <a:pt x="0" y="0"/>
+                </a:moveTo>
+                <a:lnTo>
+                  <a:pt x="1081585" y="0"/>
+                </a:lnTo>
+                <a:lnTo>
+                  <a:pt x="1081585" y="648951"/>
+                </a:lnTo>
+                <a:lnTo>
+                  <a:pt x="0" y="648951"/>
+                </a:lnTo>
+                <a:lnTo>
+                  <a:pt x="0" y="0"/>
+                </a:lnTo>
+                <a:close/>
+              </a:path>
+            </a:pathLst>
+          </a:custGeom>
+          <a:ln/>
+        </p:spPr>
+        <p:style>
+          <a:lnRef idx="2">
+            <a:schemeClr val="accent1">
+              <a:shade val="50000"/>
+            </a:schemeClr>
+          </a:lnRef>
+          <a:fillRef idx="1">
+            <a:schemeClr val="accent1"/>
+          </a:fillRef>
+          <a:effectRef idx="0">
+            <a:schemeClr val="accent1"/>
+          </a:effectRef>
+          <a:fontRef idx="minor">
+            <a:schemeClr val="lt1"/>
+          </a:fontRef>
+        </p:style>
+        <p:txBody>
+          <a:bodyPr spcFirstLastPara="0" vert="horz" wrap="square" lIns="49530" tIns="49530" rIns="49530" bIns="49530" numCol="1" spcCol="1270" anchor="ctr" anchorCtr="0">
+            <a:noAutofit/>
+          </a:bodyPr>
+          <a:lstStyle/>
+          <a:p>
+            <a:pPr algn="ctr" defTabSz="577826">
+              <a:lnSpc>
+                <a:spcPct val="90000"/>
+              </a:lnSpc>
+              <a:spcBef>
+                <a:spcPct val="0"/>
+              </a:spcBef>
+              <a:spcAft>
+                <a:spcPct val="35000"/>
+              </a:spcAft>
+            </a:pPr>
+            <a:r>
+              <a:rPr lang="de-DE" sz="1300"/>
+              <a:t>Wheels</a:t>
+            </a:r>
+          </a:p>
+        </p:txBody>
+      </p:sp>
+      <p:sp>
+        <p:nvSpPr>
+          <p:cNvPr id="37" name="Freihandform 13">
+            <a:extLst>
+              <a:ext uri="{FF2B5EF4-FFF2-40B4-BE49-F238E27FC236}">
+                <a16:creationId xmlns:a16="http://schemas.microsoft.com/office/drawing/2014/main" id="{33EFCA5C-4E7B-4BF9-8400-53F96EB03309}"/>
+              </a:ext>
+            </a:extLst>
+          </p:cNvPr>
+          <p:cNvSpPr/>
+          <p:nvPr/>
+        </p:nvSpPr>
+        <p:spPr>
+          <a:xfrm>
+            <a:off x="5381675" y="2132856"/>
+            <a:ext cx="792088" cy="648951"/>
+          </a:xfrm>
+          <a:custGeom>
+            <a:avLst/>
+            <a:gdLst>
+              <a:gd name="connsiteX0" fmla="*/ 0 w 1081585"/>
+              <a:gd name="connsiteY0" fmla="*/ 0 h 648951"/>
+              <a:gd name="connsiteX1" fmla="*/ 1081585 w 1081585"/>
+              <a:gd name="connsiteY1" fmla="*/ 0 h 648951"/>
+              <a:gd name="connsiteX2" fmla="*/ 1081585 w 1081585"/>
+              <a:gd name="connsiteY2" fmla="*/ 648951 h 648951"/>
+              <a:gd name="connsiteX3" fmla="*/ 0 w 1081585"/>
+              <a:gd name="connsiteY3" fmla="*/ 648951 h 648951"/>
+              <a:gd name="connsiteX4" fmla="*/ 0 w 1081585"/>
+              <a:gd name="connsiteY4" fmla="*/ 0 h 648951"/>
+            </a:gdLst>
+            <a:ahLst/>
+            <a:cxnLst>
+              <a:cxn ang="0">
+                <a:pos x="connsiteX0" y="connsiteY0"/>
+              </a:cxn>
+              <a:cxn ang="0">
+                <a:pos x="connsiteX1" y="connsiteY1"/>
+              </a:cxn>
+              <a:cxn ang="0">
+                <a:pos x="connsiteX2" y="connsiteY2"/>
+              </a:cxn>
+              <a:cxn ang="0">
+                <a:pos x="connsiteX3" y="connsiteY3"/>
+              </a:cxn>
+              <a:cxn ang="0">
+                <a:pos x="connsiteX4" y="connsiteY4"/>
+              </a:cxn>
+            </a:cxnLst>
+            <a:rect l="l" t="t" r="r" b="b"/>
+            <a:pathLst>
+              <a:path w="1081585" h="648951">
+                <a:moveTo>
+                  <a:pt x="0" y="0"/>
+                </a:moveTo>
+                <a:lnTo>
+                  <a:pt x="1081585" y="0"/>
+                </a:lnTo>
+                <a:lnTo>
+                  <a:pt x="1081585" y="648951"/>
+                </a:lnTo>
+                <a:lnTo>
+                  <a:pt x="0" y="648951"/>
+                </a:lnTo>
+                <a:lnTo>
+                  <a:pt x="0" y="0"/>
+                </a:lnTo>
+                <a:close/>
+              </a:path>
+            </a:pathLst>
+          </a:custGeom>
+          <a:ln/>
+        </p:spPr>
+        <p:style>
+          <a:lnRef idx="2">
+            <a:schemeClr val="accent1">
+              <a:shade val="50000"/>
+            </a:schemeClr>
+          </a:lnRef>
+          <a:fillRef idx="1">
+            <a:schemeClr val="accent1"/>
+          </a:fillRef>
+          <a:effectRef idx="0">
+            <a:schemeClr val="accent1"/>
+          </a:effectRef>
+          <a:fontRef idx="minor">
+            <a:schemeClr val="lt1"/>
+          </a:fontRef>
+        </p:style>
+        <p:txBody>
+          <a:bodyPr spcFirstLastPara="0" vert="horz" wrap="square" lIns="49530" tIns="49530" rIns="49530" bIns="49530" numCol="1" spcCol="1270" anchor="ctr" anchorCtr="0">
+            <a:noAutofit/>
+          </a:bodyPr>
+          <a:lstStyle/>
+          <a:p>
+            <a:pPr algn="ctr" defTabSz="577826">
+              <a:lnSpc>
+                <a:spcPct val="90000"/>
+              </a:lnSpc>
+              <a:spcBef>
+                <a:spcPct val="0"/>
+              </a:spcBef>
+              <a:spcAft>
+                <a:spcPct val="35000"/>
+              </a:spcAft>
+            </a:pPr>
+            <a:r>
+              <a:rPr lang="de-DE" sz="1300" dirty="0"/>
+              <a:t>Brakes</a:t>
+            </a:r>
+          </a:p>
+        </p:txBody>
+      </p:sp>
+      <p:sp>
+        <p:nvSpPr>
+          <p:cNvPr id="38" name="Freihandform 15">
+            <a:extLst>
+              <a:ext uri="{FF2B5EF4-FFF2-40B4-BE49-F238E27FC236}">
+                <a16:creationId xmlns:a16="http://schemas.microsoft.com/office/drawing/2014/main" id="{C36212F6-8FF8-479A-812F-D35455ABF1A2}"/>
+              </a:ext>
+            </a:extLst>
+          </p:cNvPr>
+          <p:cNvSpPr/>
+          <p:nvPr/>
+        </p:nvSpPr>
+        <p:spPr>
+          <a:xfrm>
+            <a:off x="6436794" y="2132857"/>
+            <a:ext cx="792088" cy="648951"/>
+          </a:xfrm>
+          <a:custGeom>
+            <a:avLst/>
+            <a:gdLst>
+              <a:gd name="connsiteX0" fmla="*/ 0 w 1081585"/>
+              <a:gd name="connsiteY0" fmla="*/ 0 h 648951"/>
+              <a:gd name="connsiteX1" fmla="*/ 1081585 w 1081585"/>
+              <a:gd name="connsiteY1" fmla="*/ 0 h 648951"/>
+              <a:gd name="connsiteX2" fmla="*/ 1081585 w 1081585"/>
+              <a:gd name="connsiteY2" fmla="*/ 648951 h 648951"/>
+              <a:gd name="connsiteX3" fmla="*/ 0 w 1081585"/>
+              <a:gd name="connsiteY3" fmla="*/ 648951 h 648951"/>
+              <a:gd name="connsiteX4" fmla="*/ 0 w 1081585"/>
+              <a:gd name="connsiteY4" fmla="*/ 0 h 648951"/>
+            </a:gdLst>
+            <a:ahLst/>
+            <a:cxnLst>
+              <a:cxn ang="0">
+                <a:pos x="connsiteX0" y="connsiteY0"/>
+              </a:cxn>
+              <a:cxn ang="0">
+                <a:pos x="connsiteX1" y="connsiteY1"/>
+              </a:cxn>
+              <a:cxn ang="0">
+                <a:pos x="connsiteX2" y="connsiteY2"/>
+              </a:cxn>
+              <a:cxn ang="0">
+                <a:pos x="connsiteX3" y="connsiteY3"/>
+              </a:cxn>
+              <a:cxn ang="0">
+                <a:pos x="connsiteX4" y="connsiteY4"/>
+              </a:cxn>
+            </a:cxnLst>
+            <a:rect l="l" t="t" r="r" b="b"/>
+            <a:pathLst>
+              <a:path w="1081585" h="648951">
+                <a:moveTo>
+                  <a:pt x="0" y="0"/>
+                </a:moveTo>
+                <a:lnTo>
+                  <a:pt x="1081585" y="0"/>
+                </a:lnTo>
+                <a:lnTo>
+                  <a:pt x="1081585" y="648951"/>
+                </a:lnTo>
+                <a:lnTo>
+                  <a:pt x="0" y="648951"/>
+                </a:lnTo>
+                <a:lnTo>
+                  <a:pt x="0" y="0"/>
+                </a:lnTo>
+                <a:close/>
+              </a:path>
+            </a:pathLst>
+          </a:custGeom>
+          <a:ln/>
+        </p:spPr>
+        <p:style>
+          <a:lnRef idx="2">
+            <a:schemeClr val="accent1">
+              <a:shade val="50000"/>
+            </a:schemeClr>
+          </a:lnRef>
+          <a:fillRef idx="1">
+            <a:schemeClr val="accent1"/>
+          </a:fillRef>
+          <a:effectRef idx="0">
+            <a:schemeClr val="accent1"/>
+          </a:effectRef>
+          <a:fontRef idx="minor">
+            <a:schemeClr val="lt1"/>
+          </a:fontRef>
+        </p:style>
+        <p:txBody>
+          <a:bodyPr spcFirstLastPara="0" vert="horz" wrap="square" lIns="49530" tIns="49530" rIns="49530" bIns="49530" numCol="1" spcCol="1270" anchor="ctr" anchorCtr="0">
+            <a:noAutofit/>
+          </a:bodyPr>
+          <a:lstStyle/>
+          <a:p>
+            <a:pPr algn="ctr" defTabSz="577826">
+              <a:lnSpc>
+                <a:spcPct val="90000"/>
+              </a:lnSpc>
+              <a:spcBef>
+                <a:spcPct val="0"/>
+              </a:spcBef>
+              <a:spcAft>
+                <a:spcPct val="35000"/>
+              </a:spcAft>
+            </a:pPr>
+            <a:r>
+              <a:rPr lang="de-DE" sz="1300" dirty="0" err="1"/>
+              <a:t>AxleGear</a:t>
+            </a:r>
+            <a:endParaRPr lang="de-DE" sz="1300" dirty="0"/>
+          </a:p>
+        </p:txBody>
+      </p:sp>
+      <p:sp>
+        <p:nvSpPr>
+          <p:cNvPr id="39" name="Freihandform 17">
+            <a:extLst>
+              <a:ext uri="{FF2B5EF4-FFF2-40B4-BE49-F238E27FC236}">
+                <a16:creationId xmlns:a16="http://schemas.microsoft.com/office/drawing/2014/main" id="{A4410D85-26D3-49B2-B9AC-935A61E00D0F}"/>
+              </a:ext>
+            </a:extLst>
+          </p:cNvPr>
+          <p:cNvSpPr/>
+          <p:nvPr/>
+        </p:nvSpPr>
+        <p:spPr>
+          <a:xfrm>
+            <a:off x="4389537" y="984100"/>
+            <a:ext cx="792088" cy="1797703"/>
+          </a:xfrm>
+          <a:custGeom>
+            <a:avLst/>
+            <a:gdLst>
+              <a:gd name="connsiteX0" fmla="*/ 0 w 1081585"/>
+              <a:gd name="connsiteY0" fmla="*/ 0 h 648951"/>
+              <a:gd name="connsiteX1" fmla="*/ 1081585 w 1081585"/>
+              <a:gd name="connsiteY1" fmla="*/ 0 h 648951"/>
+              <a:gd name="connsiteX2" fmla="*/ 1081585 w 1081585"/>
+              <a:gd name="connsiteY2" fmla="*/ 648951 h 648951"/>
+              <a:gd name="connsiteX3" fmla="*/ 0 w 1081585"/>
+              <a:gd name="connsiteY3" fmla="*/ 648951 h 648951"/>
+              <a:gd name="connsiteX4" fmla="*/ 0 w 1081585"/>
+              <a:gd name="connsiteY4" fmla="*/ 0 h 648951"/>
+            </a:gdLst>
+            <a:ahLst/>
+            <a:cxnLst>
+              <a:cxn ang="0">
+                <a:pos x="connsiteX0" y="connsiteY0"/>
+              </a:cxn>
+              <a:cxn ang="0">
+                <a:pos x="connsiteX1" y="connsiteY1"/>
+              </a:cxn>
+              <a:cxn ang="0">
+                <a:pos x="connsiteX2" y="connsiteY2"/>
+              </a:cxn>
+              <a:cxn ang="0">
+                <a:pos x="connsiteX3" y="connsiteY3"/>
+              </a:cxn>
+              <a:cxn ang="0">
+                <a:pos x="connsiteX4" y="connsiteY4"/>
+              </a:cxn>
+            </a:cxnLst>
+            <a:rect l="l" t="t" r="r" b="b"/>
+            <a:pathLst>
+              <a:path w="1081585" h="648951">
+                <a:moveTo>
+                  <a:pt x="0" y="0"/>
+                </a:moveTo>
+                <a:lnTo>
+                  <a:pt x="1081585" y="0"/>
+                </a:lnTo>
+                <a:lnTo>
+                  <a:pt x="1081585" y="648951"/>
+                </a:lnTo>
+                <a:lnTo>
+                  <a:pt x="0" y="648951"/>
+                </a:lnTo>
+                <a:lnTo>
+                  <a:pt x="0" y="0"/>
+                </a:lnTo>
+                <a:close/>
+              </a:path>
+            </a:pathLst>
+          </a:custGeom>
+          <a:ln/>
+        </p:spPr>
+        <p:style>
+          <a:lnRef idx="2">
+            <a:schemeClr val="accent1">
+              <a:shade val="50000"/>
+            </a:schemeClr>
+          </a:lnRef>
+          <a:fillRef idx="1">
+            <a:schemeClr val="accent1"/>
+          </a:fillRef>
+          <a:effectRef idx="0">
+            <a:schemeClr val="accent1"/>
+          </a:effectRef>
+          <a:fontRef idx="minor">
+            <a:schemeClr val="lt1"/>
+          </a:fontRef>
+        </p:style>
+        <p:txBody>
+          <a:bodyPr spcFirstLastPara="0" vert="horz" wrap="square" lIns="49530" tIns="144000" rIns="49530" bIns="144000" numCol="1" spcCol="1270" anchor="b" anchorCtr="0">
+            <a:noAutofit/>
+          </a:bodyPr>
+          <a:lstStyle/>
+          <a:p>
+            <a:pPr algn="ctr" defTabSz="577826">
+              <a:lnSpc>
+                <a:spcPct val="90000"/>
+              </a:lnSpc>
+              <a:spcBef>
+                <a:spcPct val="0"/>
+              </a:spcBef>
+              <a:spcAft>
+                <a:spcPct val="35000"/>
+              </a:spcAft>
+            </a:pPr>
+            <a:r>
+              <a:rPr lang="de-DE" sz="1300" dirty="0"/>
+              <a:t>Hybrid</a:t>
+            </a:r>
+            <a:br>
+              <a:rPr lang="de-DE" sz="1300" dirty="0"/>
+            </a:br>
+            <a:r>
+              <a:rPr lang="de-DE" sz="1300" dirty="0"/>
+              <a:t>Controller</a:t>
+            </a:r>
+          </a:p>
+        </p:txBody>
+      </p:sp>
+      <p:sp>
+        <p:nvSpPr>
+          <p:cNvPr id="41" name="Freihandform 21">
+            <a:extLst>
+              <a:ext uri="{FF2B5EF4-FFF2-40B4-BE49-F238E27FC236}">
+                <a16:creationId xmlns:a16="http://schemas.microsoft.com/office/drawing/2014/main" id="{DE09EE19-28E1-4277-A8CE-DE6CE2459901}"/>
+              </a:ext>
+            </a:extLst>
+          </p:cNvPr>
+          <p:cNvSpPr/>
+          <p:nvPr/>
+        </p:nvSpPr>
+        <p:spPr>
+          <a:xfrm>
+            <a:off x="8487536" y="2136228"/>
+            <a:ext cx="792088" cy="648951"/>
+          </a:xfrm>
+          <a:custGeom>
+            <a:avLst/>
+            <a:gdLst>
+              <a:gd name="connsiteX0" fmla="*/ 0 w 1081585"/>
+              <a:gd name="connsiteY0" fmla="*/ 0 h 648951"/>
+              <a:gd name="connsiteX1" fmla="*/ 1081585 w 1081585"/>
+              <a:gd name="connsiteY1" fmla="*/ 0 h 648951"/>
+              <a:gd name="connsiteX2" fmla="*/ 1081585 w 1081585"/>
+              <a:gd name="connsiteY2" fmla="*/ 648951 h 648951"/>
+              <a:gd name="connsiteX3" fmla="*/ 0 w 1081585"/>
+              <a:gd name="connsiteY3" fmla="*/ 648951 h 648951"/>
+              <a:gd name="connsiteX4" fmla="*/ 0 w 1081585"/>
+              <a:gd name="connsiteY4" fmla="*/ 0 h 648951"/>
+            </a:gdLst>
+            <a:ahLst/>
+            <a:cxnLst>
+              <a:cxn ang="0">
+                <a:pos x="connsiteX0" y="connsiteY0"/>
+              </a:cxn>
+              <a:cxn ang="0">
+                <a:pos x="connsiteX1" y="connsiteY1"/>
+              </a:cxn>
+              <a:cxn ang="0">
+                <a:pos x="connsiteX2" y="connsiteY2"/>
+              </a:cxn>
+              <a:cxn ang="0">
+                <a:pos x="connsiteX3" y="connsiteY3"/>
+              </a:cxn>
+              <a:cxn ang="0">
+                <a:pos x="connsiteX4" y="connsiteY4"/>
+              </a:cxn>
+            </a:cxnLst>
+            <a:rect l="l" t="t" r="r" b="b"/>
+            <a:pathLst>
+              <a:path w="1081585" h="648951">
+                <a:moveTo>
+                  <a:pt x="0" y="0"/>
+                </a:moveTo>
+                <a:lnTo>
+                  <a:pt x="1081585" y="0"/>
+                </a:lnTo>
+                <a:lnTo>
+                  <a:pt x="1081585" y="648951"/>
+                </a:lnTo>
+                <a:lnTo>
+                  <a:pt x="0" y="648951"/>
+                </a:lnTo>
+                <a:lnTo>
+                  <a:pt x="0" y="0"/>
+                </a:lnTo>
+                <a:close/>
+              </a:path>
+            </a:pathLst>
+          </a:custGeom>
+          <a:ln/>
+        </p:spPr>
+        <p:style>
+          <a:lnRef idx="2">
+            <a:schemeClr val="accent1">
+              <a:shade val="50000"/>
+            </a:schemeClr>
+          </a:lnRef>
+          <a:fillRef idx="1">
+            <a:schemeClr val="accent1"/>
+          </a:fillRef>
+          <a:effectRef idx="0">
+            <a:schemeClr val="accent1"/>
+          </a:effectRef>
+          <a:fontRef idx="minor">
+            <a:schemeClr val="lt1"/>
+          </a:fontRef>
+        </p:style>
+        <p:txBody>
+          <a:bodyPr spcFirstLastPara="0" vert="horz" wrap="square" lIns="49530" tIns="49530" rIns="49530" bIns="49530" numCol="1" spcCol="1270" anchor="ctr" anchorCtr="0">
+            <a:noAutofit/>
+          </a:bodyPr>
+          <a:lstStyle/>
+          <a:p>
+            <a:pPr algn="ctr" defTabSz="577826">
+              <a:lnSpc>
+                <a:spcPct val="90000"/>
+              </a:lnSpc>
+              <a:spcBef>
+                <a:spcPct val="0"/>
+              </a:spcBef>
+              <a:spcAft>
+                <a:spcPct val="35000"/>
+              </a:spcAft>
+            </a:pPr>
+            <a:r>
+              <a:rPr lang="de-DE" sz="1300" dirty="0"/>
+              <a:t>Electric</a:t>
+            </a:r>
+            <a:br>
+              <a:rPr lang="de-DE" sz="1300" dirty="0"/>
+            </a:br>
+            <a:r>
+              <a:rPr lang="de-DE" sz="1300" dirty="0"/>
+              <a:t>Motor</a:t>
+            </a:r>
+          </a:p>
+        </p:txBody>
+      </p:sp>
+      <p:sp>
+        <p:nvSpPr>
+          <p:cNvPr id="43" name="Freihandform 25">
+            <a:extLst>
+              <a:ext uri="{FF2B5EF4-FFF2-40B4-BE49-F238E27FC236}">
+                <a16:creationId xmlns:a16="http://schemas.microsoft.com/office/drawing/2014/main" id="{AB68E56C-CE74-49E6-BAB6-7AC83E9C99DA}"/>
+              </a:ext>
+            </a:extLst>
+          </p:cNvPr>
+          <p:cNvSpPr/>
+          <p:nvPr/>
+        </p:nvSpPr>
+        <p:spPr>
+          <a:xfrm>
+            <a:off x="9517319" y="2132855"/>
+            <a:ext cx="792088" cy="648951"/>
+          </a:xfrm>
+          <a:custGeom>
+            <a:avLst/>
+            <a:gdLst>
+              <a:gd name="connsiteX0" fmla="*/ 0 w 1081585"/>
+              <a:gd name="connsiteY0" fmla="*/ 0 h 648951"/>
+              <a:gd name="connsiteX1" fmla="*/ 1081585 w 1081585"/>
+              <a:gd name="connsiteY1" fmla="*/ 0 h 648951"/>
+              <a:gd name="connsiteX2" fmla="*/ 1081585 w 1081585"/>
+              <a:gd name="connsiteY2" fmla="*/ 648951 h 648951"/>
+              <a:gd name="connsiteX3" fmla="*/ 0 w 1081585"/>
+              <a:gd name="connsiteY3" fmla="*/ 648951 h 648951"/>
+              <a:gd name="connsiteX4" fmla="*/ 0 w 1081585"/>
+              <a:gd name="connsiteY4" fmla="*/ 0 h 648951"/>
+            </a:gdLst>
+            <a:ahLst/>
+            <a:cxnLst>
+              <a:cxn ang="0">
+                <a:pos x="connsiteX0" y="connsiteY0"/>
+              </a:cxn>
+              <a:cxn ang="0">
+                <a:pos x="connsiteX1" y="connsiteY1"/>
+              </a:cxn>
+              <a:cxn ang="0">
+                <a:pos x="connsiteX2" y="connsiteY2"/>
+              </a:cxn>
+              <a:cxn ang="0">
+                <a:pos x="connsiteX3" y="connsiteY3"/>
+              </a:cxn>
+              <a:cxn ang="0">
+                <a:pos x="connsiteX4" y="connsiteY4"/>
+              </a:cxn>
+            </a:cxnLst>
+            <a:rect l="l" t="t" r="r" b="b"/>
+            <a:pathLst>
+              <a:path w="1081585" h="648951">
+                <a:moveTo>
+                  <a:pt x="0" y="0"/>
+                </a:moveTo>
+                <a:lnTo>
+                  <a:pt x="1081585" y="0"/>
+                </a:lnTo>
+                <a:lnTo>
+                  <a:pt x="1081585" y="648951"/>
+                </a:lnTo>
+                <a:lnTo>
+                  <a:pt x="0" y="648951"/>
+                </a:lnTo>
+                <a:lnTo>
+                  <a:pt x="0" y="0"/>
+                </a:lnTo>
+                <a:close/>
+              </a:path>
+            </a:pathLst>
+          </a:custGeom>
+          <a:ln/>
+        </p:spPr>
+        <p:style>
+          <a:lnRef idx="2">
+            <a:schemeClr val="accent1">
+              <a:shade val="50000"/>
+            </a:schemeClr>
+          </a:lnRef>
+          <a:fillRef idx="1">
+            <a:schemeClr val="accent1"/>
+          </a:fillRef>
+          <a:effectRef idx="0">
+            <a:schemeClr val="accent1"/>
+          </a:effectRef>
+          <a:fontRef idx="minor">
+            <a:schemeClr val="lt1"/>
+          </a:fontRef>
+        </p:style>
+        <p:txBody>
+          <a:bodyPr spcFirstLastPara="0" vert="horz" wrap="square" lIns="49530" tIns="49530" rIns="49530" bIns="49530" numCol="1" spcCol="1270" anchor="ctr" anchorCtr="0">
+            <a:noAutofit/>
+          </a:bodyPr>
+          <a:lstStyle/>
+          <a:p>
+            <a:pPr algn="ctr" defTabSz="577826">
+              <a:lnSpc>
+                <a:spcPct val="90000"/>
+              </a:lnSpc>
+              <a:spcBef>
+                <a:spcPct val="0"/>
+              </a:spcBef>
+              <a:spcAft>
+                <a:spcPct val="35000"/>
+              </a:spcAft>
+            </a:pPr>
+            <a:r>
+              <a:rPr lang="de-DE" sz="1300"/>
+              <a:t>Clutch</a:t>
+            </a:r>
+          </a:p>
+        </p:txBody>
+      </p:sp>
+      <p:sp>
+        <p:nvSpPr>
+          <p:cNvPr id="44" name="Freihandform 27">
+            <a:extLst>
+              <a:ext uri="{FF2B5EF4-FFF2-40B4-BE49-F238E27FC236}">
+                <a16:creationId xmlns:a16="http://schemas.microsoft.com/office/drawing/2014/main" id="{5F77396A-EA39-4972-B8A1-26FB02074D73}"/>
+              </a:ext>
+            </a:extLst>
+          </p:cNvPr>
+          <p:cNvSpPr/>
+          <p:nvPr/>
+        </p:nvSpPr>
+        <p:spPr>
+          <a:xfrm>
+            <a:off x="10542690" y="2132855"/>
+            <a:ext cx="792088" cy="648951"/>
+          </a:xfrm>
+          <a:custGeom>
+            <a:avLst/>
+            <a:gdLst>
+              <a:gd name="connsiteX0" fmla="*/ 0 w 1081585"/>
+              <a:gd name="connsiteY0" fmla="*/ 0 h 648951"/>
+              <a:gd name="connsiteX1" fmla="*/ 1081585 w 1081585"/>
+              <a:gd name="connsiteY1" fmla="*/ 0 h 648951"/>
+              <a:gd name="connsiteX2" fmla="*/ 1081585 w 1081585"/>
+              <a:gd name="connsiteY2" fmla="*/ 648951 h 648951"/>
+              <a:gd name="connsiteX3" fmla="*/ 0 w 1081585"/>
+              <a:gd name="connsiteY3" fmla="*/ 648951 h 648951"/>
+              <a:gd name="connsiteX4" fmla="*/ 0 w 1081585"/>
+              <a:gd name="connsiteY4" fmla="*/ 0 h 648951"/>
+            </a:gdLst>
+            <a:ahLst/>
+            <a:cxnLst>
+              <a:cxn ang="0">
+                <a:pos x="connsiteX0" y="connsiteY0"/>
+              </a:cxn>
+              <a:cxn ang="0">
+                <a:pos x="connsiteX1" y="connsiteY1"/>
+              </a:cxn>
+              <a:cxn ang="0">
+                <a:pos x="connsiteX2" y="connsiteY2"/>
+              </a:cxn>
+              <a:cxn ang="0">
+                <a:pos x="connsiteX3" y="connsiteY3"/>
+              </a:cxn>
+              <a:cxn ang="0">
+                <a:pos x="connsiteX4" y="connsiteY4"/>
+              </a:cxn>
+            </a:cxnLst>
+            <a:rect l="l" t="t" r="r" b="b"/>
+            <a:pathLst>
+              <a:path w="1081585" h="648951">
+                <a:moveTo>
+                  <a:pt x="0" y="0"/>
+                </a:moveTo>
+                <a:lnTo>
+                  <a:pt x="1081585" y="0"/>
+                </a:lnTo>
+                <a:lnTo>
+                  <a:pt x="1081585" y="648951"/>
+                </a:lnTo>
+                <a:lnTo>
+                  <a:pt x="0" y="648951"/>
+                </a:lnTo>
+                <a:lnTo>
+                  <a:pt x="0" y="0"/>
+                </a:lnTo>
+                <a:close/>
+              </a:path>
+            </a:pathLst>
+          </a:custGeom>
+          <a:ln/>
+        </p:spPr>
+        <p:style>
+          <a:lnRef idx="2">
+            <a:schemeClr val="accent1">
+              <a:shade val="50000"/>
+            </a:schemeClr>
+          </a:lnRef>
+          <a:fillRef idx="1">
+            <a:schemeClr val="accent1"/>
+          </a:fillRef>
+          <a:effectRef idx="0">
+            <a:schemeClr val="accent1"/>
+          </a:effectRef>
+          <a:fontRef idx="minor">
+            <a:schemeClr val="lt1"/>
+          </a:fontRef>
+        </p:style>
+        <p:txBody>
+          <a:bodyPr spcFirstLastPara="0" vert="horz" wrap="square" lIns="49530" tIns="49530" rIns="49530" bIns="49530" numCol="1" spcCol="1270" anchor="ctr" anchorCtr="0">
+            <a:noAutofit/>
+          </a:bodyPr>
+          <a:lstStyle/>
+          <a:p>
+            <a:pPr algn="ctr" defTabSz="577826">
+              <a:lnSpc>
+                <a:spcPct val="90000"/>
+              </a:lnSpc>
+              <a:spcBef>
+                <a:spcPct val="0"/>
+              </a:spcBef>
+              <a:spcAft>
+                <a:spcPct val="35000"/>
+              </a:spcAft>
+            </a:pPr>
+            <a:r>
+              <a:rPr lang="de-DE" sz="1300" b="1"/>
+              <a:t>Engine</a:t>
+            </a:r>
+          </a:p>
+        </p:txBody>
+      </p:sp>
+      <p:sp>
+        <p:nvSpPr>
+          <p:cNvPr id="45" name="Freihandform 29">
+            <a:extLst>
+              <a:ext uri="{FF2B5EF4-FFF2-40B4-BE49-F238E27FC236}">
+                <a16:creationId xmlns:a16="http://schemas.microsoft.com/office/drawing/2014/main" id="{93C59FD3-7B20-46A5-A932-BFC7FA4FBF38}"/>
+              </a:ext>
+            </a:extLst>
+          </p:cNvPr>
+          <p:cNvSpPr/>
+          <p:nvPr/>
+        </p:nvSpPr>
+        <p:spPr>
+          <a:xfrm>
+            <a:off x="11605878" y="2132852"/>
+            <a:ext cx="792088" cy="648951"/>
+          </a:xfrm>
+          <a:custGeom>
+            <a:avLst/>
+            <a:gdLst>
+              <a:gd name="connsiteX0" fmla="*/ 0 w 1081585"/>
+              <a:gd name="connsiteY0" fmla="*/ 0 h 648951"/>
+              <a:gd name="connsiteX1" fmla="*/ 1081585 w 1081585"/>
+              <a:gd name="connsiteY1" fmla="*/ 0 h 648951"/>
+              <a:gd name="connsiteX2" fmla="*/ 1081585 w 1081585"/>
+              <a:gd name="connsiteY2" fmla="*/ 648951 h 648951"/>
+              <a:gd name="connsiteX3" fmla="*/ 0 w 1081585"/>
+              <a:gd name="connsiteY3" fmla="*/ 648951 h 648951"/>
+              <a:gd name="connsiteX4" fmla="*/ 0 w 1081585"/>
+              <a:gd name="connsiteY4" fmla="*/ 0 h 648951"/>
+            </a:gdLst>
+            <a:ahLst/>
+            <a:cxnLst>
+              <a:cxn ang="0">
+                <a:pos x="connsiteX0" y="connsiteY0"/>
+              </a:cxn>
+              <a:cxn ang="0">
+                <a:pos x="connsiteX1" y="connsiteY1"/>
+              </a:cxn>
+              <a:cxn ang="0">
+                <a:pos x="connsiteX2" y="connsiteY2"/>
+              </a:cxn>
+              <a:cxn ang="0">
+                <a:pos x="connsiteX3" y="connsiteY3"/>
+              </a:cxn>
+              <a:cxn ang="0">
+                <a:pos x="connsiteX4" y="connsiteY4"/>
+              </a:cxn>
+            </a:cxnLst>
+            <a:rect l="l" t="t" r="r" b="b"/>
+            <a:pathLst>
+              <a:path w="1081585" h="648951">
+                <a:moveTo>
+                  <a:pt x="0" y="0"/>
+                </a:moveTo>
+                <a:lnTo>
+                  <a:pt x="1081585" y="0"/>
+                </a:lnTo>
+                <a:lnTo>
+                  <a:pt x="1081585" y="648951"/>
+                </a:lnTo>
+                <a:lnTo>
+                  <a:pt x="0" y="648951"/>
+                </a:lnTo>
+                <a:lnTo>
+                  <a:pt x="0" y="0"/>
+                </a:lnTo>
+                <a:close/>
+              </a:path>
+            </a:pathLst>
+          </a:custGeom>
+          <a:ln/>
+        </p:spPr>
+        <p:style>
+          <a:lnRef idx="2">
+            <a:schemeClr val="accent1">
+              <a:shade val="50000"/>
+            </a:schemeClr>
+          </a:lnRef>
+          <a:fillRef idx="1">
+            <a:schemeClr val="accent1"/>
+          </a:fillRef>
+          <a:effectRef idx="0">
+            <a:schemeClr val="accent1"/>
+          </a:effectRef>
+          <a:fontRef idx="minor">
+            <a:schemeClr val="lt1"/>
+          </a:fontRef>
+        </p:style>
+        <p:txBody>
+          <a:bodyPr spcFirstLastPara="0" vert="horz" wrap="square" lIns="49530" tIns="49530" rIns="49530" bIns="49530" numCol="1" spcCol="1270" anchor="ctr" anchorCtr="0">
+            <a:noAutofit/>
+          </a:bodyPr>
+          <a:lstStyle/>
+          <a:p>
+            <a:pPr algn="ctr" defTabSz="577826">
+              <a:lnSpc>
+                <a:spcPct val="90000"/>
+              </a:lnSpc>
+              <a:spcBef>
+                <a:spcPct val="0"/>
+              </a:spcBef>
+              <a:spcAft>
+                <a:spcPct val="35000"/>
+              </a:spcAft>
+            </a:pPr>
+            <a:r>
+              <a:rPr lang="de-DE" sz="1300" dirty="0" err="1"/>
+              <a:t>Auxiliaries</a:t>
+            </a:r>
+            <a:endParaRPr lang="de-DE" sz="1300" dirty="0"/>
+          </a:p>
+        </p:txBody>
+      </p:sp>
+      <p:sp>
+        <p:nvSpPr>
+          <p:cNvPr id="46" name="Freihandform 6">
+            <a:extLst>
+              <a:ext uri="{FF2B5EF4-FFF2-40B4-BE49-F238E27FC236}">
+                <a16:creationId xmlns:a16="http://schemas.microsoft.com/office/drawing/2014/main" id="{E9595D29-FBD4-4E27-B9BE-59BF04F5A818}"/>
+              </a:ext>
+            </a:extLst>
+          </p:cNvPr>
+          <p:cNvSpPr/>
+          <p:nvPr/>
+        </p:nvSpPr>
+        <p:spPr>
+          <a:xfrm>
+            <a:off x="1018436" y="2326585"/>
+            <a:ext cx="362138" cy="268233"/>
+          </a:xfrm>
+          <a:custGeom>
+            <a:avLst/>
+            <a:gdLst>
+              <a:gd name="connsiteX0" fmla="*/ 0 w 229296"/>
+              <a:gd name="connsiteY0" fmla="*/ 53647 h 268233"/>
+              <a:gd name="connsiteX1" fmla="*/ 114648 w 229296"/>
+              <a:gd name="connsiteY1" fmla="*/ 53647 h 268233"/>
+              <a:gd name="connsiteX2" fmla="*/ 114648 w 229296"/>
+              <a:gd name="connsiteY2" fmla="*/ 0 h 268233"/>
+              <a:gd name="connsiteX3" fmla="*/ 229296 w 229296"/>
+              <a:gd name="connsiteY3" fmla="*/ 134117 h 268233"/>
+              <a:gd name="connsiteX4" fmla="*/ 114648 w 229296"/>
+              <a:gd name="connsiteY4" fmla="*/ 268233 h 268233"/>
+              <a:gd name="connsiteX5" fmla="*/ 114648 w 229296"/>
+              <a:gd name="connsiteY5" fmla="*/ 214586 h 268233"/>
+              <a:gd name="connsiteX6" fmla="*/ 0 w 229296"/>
+              <a:gd name="connsiteY6" fmla="*/ 214586 h 268233"/>
+              <a:gd name="connsiteX7" fmla="*/ 0 w 229296"/>
+              <a:gd name="connsiteY7" fmla="*/ 53647 h 268233"/>
+            </a:gdLst>
+            <a:ahLst/>
+            <a:cxnLst>
+              <a:cxn ang="0">
+                <a:pos x="connsiteX0" y="connsiteY0"/>
+              </a:cxn>
+              <a:cxn ang="0">
+                <a:pos x="connsiteX1" y="connsiteY1"/>
+              </a:cxn>
+              <a:cxn ang="0">
+                <a:pos x="connsiteX2" y="connsiteY2"/>
+              </a:cxn>
+              <a:cxn ang="0">
+                <a:pos x="connsiteX3" y="connsiteY3"/>
+              </a:cxn>
+              <a:cxn ang="0">
+                <a:pos x="connsiteX4" y="connsiteY4"/>
+              </a:cxn>
+              <a:cxn ang="0">
+                <a:pos x="connsiteX5" y="connsiteY5"/>
+              </a:cxn>
+              <a:cxn ang="0">
+                <a:pos x="connsiteX6" y="connsiteY6"/>
+              </a:cxn>
+              <a:cxn ang="0">
+                <a:pos x="connsiteX7" y="connsiteY7"/>
+              </a:cxn>
+            </a:cxnLst>
+            <a:rect l="l" t="t" r="r" b="b"/>
+            <a:pathLst>
+              <a:path w="229296" h="268233">
+                <a:moveTo>
+                  <a:pt x="0" y="53647"/>
+                </a:moveTo>
+                <a:lnTo>
+                  <a:pt x="114648" y="53647"/>
+                </a:lnTo>
+                <a:lnTo>
+                  <a:pt x="114648" y="0"/>
+                </a:lnTo>
+                <a:lnTo>
+                  <a:pt x="229296" y="134117"/>
+                </a:lnTo>
+                <a:lnTo>
+                  <a:pt x="114648" y="268233"/>
+                </a:lnTo>
+                <a:lnTo>
+                  <a:pt x="114648" y="214586"/>
+                </a:lnTo>
+                <a:lnTo>
+                  <a:pt x="0" y="214586"/>
+                </a:lnTo>
+                <a:lnTo>
+                  <a:pt x="0" y="53647"/>
+                </a:lnTo>
+                <a:close/>
+              </a:path>
+            </a:pathLst>
+          </a:custGeom>
+          <a:solidFill>
+            <a:srgbClr val="FF0000"/>
+          </a:solidFill>
+          <a:ln w="19050">
+            <a:noFill/>
+          </a:ln>
+        </p:spPr>
+        <p:style>
+          <a:lnRef idx="0">
+            <a:schemeClr val="accent1">
+              <a:tint val="60000"/>
+              <a:hueOff val="0"/>
+              <a:satOff val="0"/>
+              <a:lumOff val="0"/>
+              <a:alphaOff val="0"/>
+            </a:schemeClr>
+          </a:lnRef>
+          <a:fillRef idx="1">
+            <a:schemeClr val="accent1">
+              <a:tint val="60000"/>
+              <a:hueOff val="0"/>
+              <a:satOff val="0"/>
+              <a:lumOff val="0"/>
+              <a:alphaOff val="0"/>
+            </a:schemeClr>
+          </a:fillRef>
+          <a:effectRef idx="0">
+            <a:schemeClr val="accent1">
+              <a:tint val="60000"/>
+              <a:hueOff val="0"/>
+              <a:satOff val="0"/>
+              <a:lumOff val="0"/>
+              <a:alphaOff val="0"/>
+            </a:schemeClr>
+          </a:effectRef>
+          <a:fontRef idx="minor">
+            <a:schemeClr val="lt1"/>
+          </a:fontRef>
+        </p:style>
+        <p:txBody>
+          <a:bodyPr spcFirstLastPara="0" vert="horz" wrap="square" lIns="0" tIns="53647" rIns="68789" bIns="53647" numCol="1" spcCol="1270" anchor="ctr" anchorCtr="0">
+            <a:noAutofit/>
+          </a:bodyPr>
+          <a:lstStyle/>
+          <a:p>
+            <a:pPr algn="ctr" defTabSz="488930">
+              <a:lnSpc>
+                <a:spcPct val="90000"/>
+              </a:lnSpc>
+              <a:spcBef>
+                <a:spcPct val="0"/>
+              </a:spcBef>
+              <a:spcAft>
+                <a:spcPct val="35000"/>
+              </a:spcAft>
+            </a:pPr>
+            <a:endParaRPr lang="de-DE" sz="1100"/>
+          </a:p>
+        </p:txBody>
+      </p:sp>
+      <p:sp>
+        <p:nvSpPr>
+          <p:cNvPr id="47" name="Freihandform 8">
+            <a:extLst>
+              <a:ext uri="{FF2B5EF4-FFF2-40B4-BE49-F238E27FC236}">
+                <a16:creationId xmlns:a16="http://schemas.microsoft.com/office/drawing/2014/main" id="{CE667342-5629-4FAB-843E-8C08D76181CA}"/>
+              </a:ext>
+            </a:extLst>
+          </p:cNvPr>
+          <p:cNvSpPr/>
+          <p:nvPr/>
+        </p:nvSpPr>
+        <p:spPr>
+          <a:xfrm>
+            <a:off x="2043807" y="2326585"/>
+            <a:ext cx="362138" cy="268233"/>
+          </a:xfrm>
+          <a:custGeom>
+            <a:avLst/>
+            <a:gdLst>
+              <a:gd name="connsiteX0" fmla="*/ 0 w 229296"/>
+              <a:gd name="connsiteY0" fmla="*/ 53647 h 268233"/>
+              <a:gd name="connsiteX1" fmla="*/ 114648 w 229296"/>
+              <a:gd name="connsiteY1" fmla="*/ 53647 h 268233"/>
+              <a:gd name="connsiteX2" fmla="*/ 114648 w 229296"/>
+              <a:gd name="connsiteY2" fmla="*/ 0 h 268233"/>
+              <a:gd name="connsiteX3" fmla="*/ 229296 w 229296"/>
+              <a:gd name="connsiteY3" fmla="*/ 134117 h 268233"/>
+              <a:gd name="connsiteX4" fmla="*/ 114648 w 229296"/>
+              <a:gd name="connsiteY4" fmla="*/ 268233 h 268233"/>
+              <a:gd name="connsiteX5" fmla="*/ 114648 w 229296"/>
+              <a:gd name="connsiteY5" fmla="*/ 214586 h 268233"/>
+              <a:gd name="connsiteX6" fmla="*/ 0 w 229296"/>
+              <a:gd name="connsiteY6" fmla="*/ 214586 h 268233"/>
+              <a:gd name="connsiteX7" fmla="*/ 0 w 229296"/>
+              <a:gd name="connsiteY7" fmla="*/ 53647 h 268233"/>
+            </a:gdLst>
+            <a:ahLst/>
+            <a:cxnLst>
+              <a:cxn ang="0">
+                <a:pos x="connsiteX0" y="connsiteY0"/>
+              </a:cxn>
+              <a:cxn ang="0">
+                <a:pos x="connsiteX1" y="connsiteY1"/>
+              </a:cxn>
+              <a:cxn ang="0">
+                <a:pos x="connsiteX2" y="connsiteY2"/>
+              </a:cxn>
+              <a:cxn ang="0">
+                <a:pos x="connsiteX3" y="connsiteY3"/>
+              </a:cxn>
+              <a:cxn ang="0">
+                <a:pos x="connsiteX4" y="connsiteY4"/>
+              </a:cxn>
+              <a:cxn ang="0">
+                <a:pos x="connsiteX5" y="connsiteY5"/>
+              </a:cxn>
+              <a:cxn ang="0">
+                <a:pos x="connsiteX6" y="connsiteY6"/>
+              </a:cxn>
+              <a:cxn ang="0">
+                <a:pos x="connsiteX7" y="connsiteY7"/>
+              </a:cxn>
+            </a:cxnLst>
+            <a:rect l="l" t="t" r="r" b="b"/>
+            <a:pathLst>
+              <a:path w="229296" h="268233">
+                <a:moveTo>
+                  <a:pt x="0" y="53647"/>
+                </a:moveTo>
+                <a:lnTo>
+                  <a:pt x="114648" y="53647"/>
+                </a:lnTo>
+                <a:lnTo>
+                  <a:pt x="114648" y="0"/>
+                </a:lnTo>
+                <a:lnTo>
+                  <a:pt x="229296" y="134117"/>
+                </a:lnTo>
+                <a:lnTo>
+                  <a:pt x="114648" y="268233"/>
+                </a:lnTo>
+                <a:lnTo>
+                  <a:pt x="114648" y="214586"/>
+                </a:lnTo>
+                <a:lnTo>
+                  <a:pt x="0" y="214586"/>
+                </a:lnTo>
+                <a:lnTo>
+                  <a:pt x="0" y="53647"/>
+                </a:lnTo>
+                <a:close/>
+              </a:path>
+            </a:pathLst>
+          </a:custGeom>
+          <a:solidFill>
+            <a:srgbClr val="FF0000"/>
+          </a:solidFill>
+          <a:ln w="19050">
+            <a:noFill/>
+          </a:ln>
+        </p:spPr>
+        <p:style>
+          <a:lnRef idx="0">
+            <a:schemeClr val="accent1">
+              <a:tint val="60000"/>
+              <a:hueOff val="0"/>
+              <a:satOff val="0"/>
+              <a:lumOff val="0"/>
+              <a:alphaOff val="0"/>
+            </a:schemeClr>
+          </a:lnRef>
+          <a:fillRef idx="1">
+            <a:schemeClr val="accent1">
+              <a:tint val="60000"/>
+              <a:hueOff val="0"/>
+              <a:satOff val="0"/>
+              <a:lumOff val="0"/>
+              <a:alphaOff val="0"/>
+            </a:schemeClr>
+          </a:fillRef>
+          <a:effectRef idx="0">
+            <a:schemeClr val="accent1">
+              <a:tint val="60000"/>
+              <a:hueOff val="0"/>
+              <a:satOff val="0"/>
+              <a:lumOff val="0"/>
+              <a:alphaOff val="0"/>
+            </a:schemeClr>
+          </a:effectRef>
+          <a:fontRef idx="minor">
+            <a:schemeClr val="lt1"/>
+          </a:fontRef>
+        </p:style>
+        <p:txBody>
+          <a:bodyPr spcFirstLastPara="0" vert="horz" wrap="square" lIns="0" tIns="53647" rIns="68789" bIns="53647" numCol="1" spcCol="1270" anchor="ctr" anchorCtr="0">
+            <a:noAutofit/>
+          </a:bodyPr>
+          <a:lstStyle/>
+          <a:p>
+            <a:pPr algn="ctr" defTabSz="488930">
+              <a:lnSpc>
+                <a:spcPct val="90000"/>
+              </a:lnSpc>
+              <a:spcBef>
+                <a:spcPct val="0"/>
+              </a:spcBef>
+              <a:spcAft>
+                <a:spcPct val="35000"/>
+              </a:spcAft>
+            </a:pPr>
+            <a:endParaRPr lang="de-DE" sz="1100"/>
+          </a:p>
+        </p:txBody>
+      </p:sp>
+      <p:sp>
+        <p:nvSpPr>
+          <p:cNvPr id="48" name="Freihandform 10">
+            <a:extLst>
+              <a:ext uri="{FF2B5EF4-FFF2-40B4-BE49-F238E27FC236}">
+                <a16:creationId xmlns:a16="http://schemas.microsoft.com/office/drawing/2014/main" id="{119EFE3F-A9FA-4925-866B-665C2992DB0B}"/>
+              </a:ext>
+            </a:extLst>
+          </p:cNvPr>
+          <p:cNvSpPr/>
+          <p:nvPr/>
+        </p:nvSpPr>
+        <p:spPr>
+          <a:xfrm>
+            <a:off x="4094549" y="2326585"/>
+            <a:ext cx="362138" cy="268233"/>
+          </a:xfrm>
+          <a:custGeom>
+            <a:avLst/>
+            <a:gdLst>
+              <a:gd name="connsiteX0" fmla="*/ 0 w 229296"/>
+              <a:gd name="connsiteY0" fmla="*/ 53647 h 268233"/>
+              <a:gd name="connsiteX1" fmla="*/ 114648 w 229296"/>
+              <a:gd name="connsiteY1" fmla="*/ 53647 h 268233"/>
+              <a:gd name="connsiteX2" fmla="*/ 114648 w 229296"/>
+              <a:gd name="connsiteY2" fmla="*/ 0 h 268233"/>
+              <a:gd name="connsiteX3" fmla="*/ 229296 w 229296"/>
+              <a:gd name="connsiteY3" fmla="*/ 134117 h 268233"/>
+              <a:gd name="connsiteX4" fmla="*/ 114648 w 229296"/>
+              <a:gd name="connsiteY4" fmla="*/ 268233 h 268233"/>
+              <a:gd name="connsiteX5" fmla="*/ 114648 w 229296"/>
+              <a:gd name="connsiteY5" fmla="*/ 214586 h 268233"/>
+              <a:gd name="connsiteX6" fmla="*/ 0 w 229296"/>
+              <a:gd name="connsiteY6" fmla="*/ 214586 h 268233"/>
+              <a:gd name="connsiteX7" fmla="*/ 0 w 229296"/>
+              <a:gd name="connsiteY7" fmla="*/ 53647 h 268233"/>
+            </a:gdLst>
+            <a:ahLst/>
+            <a:cxnLst>
+              <a:cxn ang="0">
+                <a:pos x="connsiteX0" y="connsiteY0"/>
+              </a:cxn>
+              <a:cxn ang="0">
+                <a:pos x="connsiteX1" y="connsiteY1"/>
+              </a:cxn>
+              <a:cxn ang="0">
+                <a:pos x="connsiteX2" y="connsiteY2"/>
+              </a:cxn>
+              <a:cxn ang="0">
+                <a:pos x="connsiteX3" y="connsiteY3"/>
+              </a:cxn>
+              <a:cxn ang="0">
+                <a:pos x="connsiteX4" y="connsiteY4"/>
+              </a:cxn>
+              <a:cxn ang="0">
+                <a:pos x="connsiteX5" y="connsiteY5"/>
+              </a:cxn>
+              <a:cxn ang="0">
+                <a:pos x="connsiteX6" y="connsiteY6"/>
+              </a:cxn>
+              <a:cxn ang="0">
+                <a:pos x="connsiteX7" y="connsiteY7"/>
+              </a:cxn>
+            </a:cxnLst>
+            <a:rect l="l" t="t" r="r" b="b"/>
+            <a:pathLst>
+              <a:path w="229296" h="268233">
+                <a:moveTo>
+                  <a:pt x="0" y="53647"/>
+                </a:moveTo>
+                <a:lnTo>
+                  <a:pt x="114648" y="53647"/>
+                </a:lnTo>
+                <a:lnTo>
+                  <a:pt x="114648" y="0"/>
+                </a:lnTo>
+                <a:lnTo>
+                  <a:pt x="229296" y="134117"/>
+                </a:lnTo>
+                <a:lnTo>
+                  <a:pt x="114648" y="268233"/>
+                </a:lnTo>
+                <a:lnTo>
+                  <a:pt x="114648" y="214586"/>
+                </a:lnTo>
+                <a:lnTo>
+                  <a:pt x="0" y="214586"/>
+                </a:lnTo>
+                <a:lnTo>
+                  <a:pt x="0" y="53647"/>
+                </a:lnTo>
+                <a:close/>
+              </a:path>
+            </a:pathLst>
+          </a:custGeom>
+          <a:solidFill>
+            <a:srgbClr val="FF0000"/>
+          </a:solidFill>
+          <a:ln w="19050">
+            <a:noFill/>
+          </a:ln>
+        </p:spPr>
+        <p:style>
+          <a:lnRef idx="0">
+            <a:schemeClr val="accent1">
+              <a:tint val="60000"/>
+              <a:hueOff val="0"/>
+              <a:satOff val="0"/>
+              <a:lumOff val="0"/>
+              <a:alphaOff val="0"/>
+            </a:schemeClr>
+          </a:lnRef>
+          <a:fillRef idx="1">
+            <a:schemeClr val="accent1">
+              <a:tint val="60000"/>
+              <a:hueOff val="0"/>
+              <a:satOff val="0"/>
+              <a:lumOff val="0"/>
+              <a:alphaOff val="0"/>
+            </a:schemeClr>
+          </a:fillRef>
+          <a:effectRef idx="0">
+            <a:schemeClr val="accent1">
+              <a:tint val="60000"/>
+              <a:hueOff val="0"/>
+              <a:satOff val="0"/>
+              <a:lumOff val="0"/>
+              <a:alphaOff val="0"/>
+            </a:schemeClr>
+          </a:effectRef>
+          <a:fontRef idx="minor">
+            <a:schemeClr val="lt1"/>
+          </a:fontRef>
+        </p:style>
+        <p:txBody>
+          <a:bodyPr spcFirstLastPara="0" vert="horz" wrap="square" lIns="0" tIns="53647" rIns="68789" bIns="53647" numCol="1" spcCol="1270" anchor="ctr" anchorCtr="0">
+            <a:noAutofit/>
+          </a:bodyPr>
+          <a:lstStyle/>
+          <a:p>
+            <a:pPr algn="ctr" defTabSz="488930">
+              <a:lnSpc>
+                <a:spcPct val="90000"/>
+              </a:lnSpc>
+              <a:spcBef>
+                <a:spcPct val="0"/>
+              </a:spcBef>
+              <a:spcAft>
+                <a:spcPct val="35000"/>
+              </a:spcAft>
+            </a:pPr>
+            <a:endParaRPr lang="de-DE" sz="1100"/>
+          </a:p>
+        </p:txBody>
+      </p:sp>
+      <p:sp>
+        <p:nvSpPr>
+          <p:cNvPr id="49" name="Freihandform 12">
+            <a:extLst>
+              <a:ext uri="{FF2B5EF4-FFF2-40B4-BE49-F238E27FC236}">
+                <a16:creationId xmlns:a16="http://schemas.microsoft.com/office/drawing/2014/main" id="{91D4059A-5BB1-4FEC-AA93-757E43639881}"/>
+              </a:ext>
+            </a:extLst>
+          </p:cNvPr>
+          <p:cNvSpPr/>
+          <p:nvPr/>
+        </p:nvSpPr>
+        <p:spPr>
+          <a:xfrm>
+            <a:off x="5119920" y="2326585"/>
+            <a:ext cx="362138" cy="268233"/>
+          </a:xfrm>
+          <a:custGeom>
+            <a:avLst/>
+            <a:gdLst>
+              <a:gd name="connsiteX0" fmla="*/ 0 w 229296"/>
+              <a:gd name="connsiteY0" fmla="*/ 53647 h 268233"/>
+              <a:gd name="connsiteX1" fmla="*/ 114648 w 229296"/>
+              <a:gd name="connsiteY1" fmla="*/ 53647 h 268233"/>
+              <a:gd name="connsiteX2" fmla="*/ 114648 w 229296"/>
+              <a:gd name="connsiteY2" fmla="*/ 0 h 268233"/>
+              <a:gd name="connsiteX3" fmla="*/ 229296 w 229296"/>
+              <a:gd name="connsiteY3" fmla="*/ 134117 h 268233"/>
+              <a:gd name="connsiteX4" fmla="*/ 114648 w 229296"/>
+              <a:gd name="connsiteY4" fmla="*/ 268233 h 268233"/>
+              <a:gd name="connsiteX5" fmla="*/ 114648 w 229296"/>
+              <a:gd name="connsiteY5" fmla="*/ 214586 h 268233"/>
+              <a:gd name="connsiteX6" fmla="*/ 0 w 229296"/>
+              <a:gd name="connsiteY6" fmla="*/ 214586 h 268233"/>
+              <a:gd name="connsiteX7" fmla="*/ 0 w 229296"/>
+              <a:gd name="connsiteY7" fmla="*/ 53647 h 268233"/>
+            </a:gdLst>
+            <a:ahLst/>
+            <a:cxnLst>
+              <a:cxn ang="0">
+                <a:pos x="connsiteX0" y="connsiteY0"/>
+              </a:cxn>
+              <a:cxn ang="0">
+                <a:pos x="connsiteX1" y="connsiteY1"/>
+              </a:cxn>
+              <a:cxn ang="0">
+                <a:pos x="connsiteX2" y="connsiteY2"/>
+              </a:cxn>
+              <a:cxn ang="0">
+                <a:pos x="connsiteX3" y="connsiteY3"/>
+              </a:cxn>
+              <a:cxn ang="0">
+                <a:pos x="connsiteX4" y="connsiteY4"/>
+              </a:cxn>
+              <a:cxn ang="0">
+                <a:pos x="connsiteX5" y="connsiteY5"/>
+              </a:cxn>
+              <a:cxn ang="0">
+                <a:pos x="connsiteX6" y="connsiteY6"/>
+              </a:cxn>
+              <a:cxn ang="0">
+                <a:pos x="connsiteX7" y="connsiteY7"/>
+              </a:cxn>
+            </a:cxnLst>
+            <a:rect l="l" t="t" r="r" b="b"/>
+            <a:pathLst>
+              <a:path w="229296" h="268233">
+                <a:moveTo>
+                  <a:pt x="0" y="53647"/>
+                </a:moveTo>
+                <a:lnTo>
+                  <a:pt x="114648" y="53647"/>
+                </a:lnTo>
+                <a:lnTo>
+                  <a:pt x="114648" y="0"/>
+                </a:lnTo>
+                <a:lnTo>
+                  <a:pt x="229296" y="134117"/>
+                </a:lnTo>
+                <a:lnTo>
+                  <a:pt x="114648" y="268233"/>
+                </a:lnTo>
+                <a:lnTo>
+                  <a:pt x="114648" y="214586"/>
+                </a:lnTo>
+                <a:lnTo>
+                  <a:pt x="0" y="214586"/>
+                </a:lnTo>
+                <a:lnTo>
+                  <a:pt x="0" y="53647"/>
+                </a:lnTo>
+                <a:close/>
+              </a:path>
+            </a:pathLst>
+          </a:custGeom>
+          <a:solidFill>
+            <a:srgbClr val="FF0000"/>
+          </a:solidFill>
+          <a:ln w="19050">
+            <a:noFill/>
+          </a:ln>
+        </p:spPr>
+        <p:style>
+          <a:lnRef idx="0">
+            <a:schemeClr val="accent1">
+              <a:tint val="60000"/>
+              <a:hueOff val="0"/>
+              <a:satOff val="0"/>
+              <a:lumOff val="0"/>
+              <a:alphaOff val="0"/>
+            </a:schemeClr>
+          </a:lnRef>
+          <a:fillRef idx="1">
+            <a:schemeClr val="accent1">
+              <a:tint val="60000"/>
+              <a:hueOff val="0"/>
+              <a:satOff val="0"/>
+              <a:lumOff val="0"/>
+              <a:alphaOff val="0"/>
+            </a:schemeClr>
+          </a:fillRef>
+          <a:effectRef idx="0">
+            <a:schemeClr val="accent1">
+              <a:tint val="60000"/>
+              <a:hueOff val="0"/>
+              <a:satOff val="0"/>
+              <a:lumOff val="0"/>
+              <a:alphaOff val="0"/>
+            </a:schemeClr>
+          </a:effectRef>
+          <a:fontRef idx="minor">
+            <a:schemeClr val="lt1"/>
+          </a:fontRef>
+        </p:style>
+        <p:txBody>
+          <a:bodyPr spcFirstLastPara="0" vert="horz" wrap="square" lIns="0" tIns="53647" rIns="68789" bIns="53647" numCol="1" spcCol="1270" anchor="ctr" anchorCtr="0">
+            <a:noAutofit/>
+          </a:bodyPr>
+          <a:lstStyle/>
+          <a:p>
+            <a:pPr algn="ctr" defTabSz="488930">
+              <a:lnSpc>
+                <a:spcPct val="90000"/>
+              </a:lnSpc>
+              <a:spcBef>
+                <a:spcPct val="0"/>
+              </a:spcBef>
+              <a:spcAft>
+                <a:spcPct val="35000"/>
+              </a:spcAft>
+            </a:pPr>
+            <a:endParaRPr lang="de-DE" sz="1100"/>
+          </a:p>
+        </p:txBody>
+      </p:sp>
+      <p:sp>
+        <p:nvSpPr>
+          <p:cNvPr id="50" name="Freihandform 14">
+            <a:extLst>
+              <a:ext uri="{FF2B5EF4-FFF2-40B4-BE49-F238E27FC236}">
+                <a16:creationId xmlns:a16="http://schemas.microsoft.com/office/drawing/2014/main" id="{DEFEFA10-E33E-4152-9018-E3218386C022}"/>
+              </a:ext>
+            </a:extLst>
+          </p:cNvPr>
+          <p:cNvSpPr/>
+          <p:nvPr/>
+        </p:nvSpPr>
+        <p:spPr>
+          <a:xfrm>
+            <a:off x="7170662" y="2326585"/>
+            <a:ext cx="362138" cy="268233"/>
+          </a:xfrm>
+          <a:custGeom>
+            <a:avLst/>
+            <a:gdLst>
+              <a:gd name="connsiteX0" fmla="*/ 0 w 229296"/>
+              <a:gd name="connsiteY0" fmla="*/ 53647 h 268233"/>
+              <a:gd name="connsiteX1" fmla="*/ 114648 w 229296"/>
+              <a:gd name="connsiteY1" fmla="*/ 53647 h 268233"/>
+              <a:gd name="connsiteX2" fmla="*/ 114648 w 229296"/>
+              <a:gd name="connsiteY2" fmla="*/ 0 h 268233"/>
+              <a:gd name="connsiteX3" fmla="*/ 229296 w 229296"/>
+              <a:gd name="connsiteY3" fmla="*/ 134117 h 268233"/>
+              <a:gd name="connsiteX4" fmla="*/ 114648 w 229296"/>
+              <a:gd name="connsiteY4" fmla="*/ 268233 h 268233"/>
+              <a:gd name="connsiteX5" fmla="*/ 114648 w 229296"/>
+              <a:gd name="connsiteY5" fmla="*/ 214586 h 268233"/>
+              <a:gd name="connsiteX6" fmla="*/ 0 w 229296"/>
+              <a:gd name="connsiteY6" fmla="*/ 214586 h 268233"/>
+              <a:gd name="connsiteX7" fmla="*/ 0 w 229296"/>
+              <a:gd name="connsiteY7" fmla="*/ 53647 h 268233"/>
+            </a:gdLst>
+            <a:ahLst/>
+            <a:cxnLst>
+              <a:cxn ang="0">
+                <a:pos x="connsiteX0" y="connsiteY0"/>
+              </a:cxn>
+              <a:cxn ang="0">
+                <a:pos x="connsiteX1" y="connsiteY1"/>
+              </a:cxn>
+              <a:cxn ang="0">
+                <a:pos x="connsiteX2" y="connsiteY2"/>
+              </a:cxn>
+              <a:cxn ang="0">
+                <a:pos x="connsiteX3" y="connsiteY3"/>
+              </a:cxn>
+              <a:cxn ang="0">
+                <a:pos x="connsiteX4" y="connsiteY4"/>
+              </a:cxn>
+              <a:cxn ang="0">
+                <a:pos x="connsiteX5" y="connsiteY5"/>
+              </a:cxn>
+              <a:cxn ang="0">
+                <a:pos x="connsiteX6" y="connsiteY6"/>
+              </a:cxn>
+              <a:cxn ang="0">
+                <a:pos x="connsiteX7" y="connsiteY7"/>
+              </a:cxn>
+            </a:cxnLst>
+            <a:rect l="l" t="t" r="r" b="b"/>
+            <a:pathLst>
+              <a:path w="229296" h="268233">
+                <a:moveTo>
+                  <a:pt x="0" y="53647"/>
+                </a:moveTo>
+                <a:lnTo>
+                  <a:pt x="114648" y="53647"/>
+                </a:lnTo>
+                <a:lnTo>
+                  <a:pt x="114648" y="0"/>
+                </a:lnTo>
+                <a:lnTo>
+                  <a:pt x="229296" y="134117"/>
+                </a:lnTo>
+                <a:lnTo>
+                  <a:pt x="114648" y="268233"/>
+                </a:lnTo>
+                <a:lnTo>
+                  <a:pt x="114648" y="214586"/>
+                </a:lnTo>
+                <a:lnTo>
+                  <a:pt x="0" y="214586"/>
+                </a:lnTo>
+                <a:lnTo>
+                  <a:pt x="0" y="53647"/>
+                </a:lnTo>
+                <a:close/>
+              </a:path>
+            </a:pathLst>
+          </a:custGeom>
+          <a:solidFill>
+            <a:srgbClr val="FF0000"/>
+          </a:solidFill>
+          <a:ln w="19050">
+            <a:noFill/>
+          </a:ln>
+        </p:spPr>
+        <p:style>
+          <a:lnRef idx="0">
+            <a:schemeClr val="accent1">
+              <a:tint val="60000"/>
+              <a:hueOff val="0"/>
+              <a:satOff val="0"/>
+              <a:lumOff val="0"/>
+              <a:alphaOff val="0"/>
+            </a:schemeClr>
+          </a:lnRef>
+          <a:fillRef idx="1">
+            <a:schemeClr val="accent1">
+              <a:tint val="60000"/>
+              <a:hueOff val="0"/>
+              <a:satOff val="0"/>
+              <a:lumOff val="0"/>
+              <a:alphaOff val="0"/>
+            </a:schemeClr>
+          </a:fillRef>
+          <a:effectRef idx="0">
+            <a:schemeClr val="accent1">
+              <a:tint val="60000"/>
+              <a:hueOff val="0"/>
+              <a:satOff val="0"/>
+              <a:lumOff val="0"/>
+              <a:alphaOff val="0"/>
+            </a:schemeClr>
+          </a:effectRef>
+          <a:fontRef idx="minor">
+            <a:schemeClr val="lt1"/>
+          </a:fontRef>
+        </p:style>
+        <p:txBody>
+          <a:bodyPr spcFirstLastPara="0" vert="horz" wrap="square" lIns="0" tIns="53647" rIns="68789" bIns="53647" numCol="1" spcCol="1270" anchor="ctr" anchorCtr="0">
+            <a:noAutofit/>
+          </a:bodyPr>
+          <a:lstStyle/>
+          <a:p>
+            <a:pPr algn="ctr" defTabSz="488930">
+              <a:lnSpc>
+                <a:spcPct val="90000"/>
+              </a:lnSpc>
+              <a:spcBef>
+                <a:spcPct val="0"/>
+              </a:spcBef>
+              <a:spcAft>
+                <a:spcPct val="35000"/>
+              </a:spcAft>
+            </a:pPr>
+            <a:endParaRPr lang="de-DE" sz="1100"/>
+          </a:p>
+        </p:txBody>
+      </p:sp>
+      <p:sp>
+        <p:nvSpPr>
+          <p:cNvPr id="51" name="Freihandform 16">
+            <a:extLst>
+              <a:ext uri="{FF2B5EF4-FFF2-40B4-BE49-F238E27FC236}">
+                <a16:creationId xmlns:a16="http://schemas.microsoft.com/office/drawing/2014/main" id="{25B7AE89-CC92-4A12-B6F0-C63825706B12}"/>
+              </a:ext>
+            </a:extLst>
+          </p:cNvPr>
+          <p:cNvSpPr/>
+          <p:nvPr/>
+        </p:nvSpPr>
+        <p:spPr>
+          <a:xfrm>
+            <a:off x="8196033" y="2326585"/>
+            <a:ext cx="362138" cy="268233"/>
+          </a:xfrm>
+          <a:custGeom>
+            <a:avLst/>
+            <a:gdLst>
+              <a:gd name="connsiteX0" fmla="*/ 0 w 229296"/>
+              <a:gd name="connsiteY0" fmla="*/ 53647 h 268233"/>
+              <a:gd name="connsiteX1" fmla="*/ 114648 w 229296"/>
+              <a:gd name="connsiteY1" fmla="*/ 53647 h 268233"/>
+              <a:gd name="connsiteX2" fmla="*/ 114648 w 229296"/>
+              <a:gd name="connsiteY2" fmla="*/ 0 h 268233"/>
+              <a:gd name="connsiteX3" fmla="*/ 229296 w 229296"/>
+              <a:gd name="connsiteY3" fmla="*/ 134117 h 268233"/>
+              <a:gd name="connsiteX4" fmla="*/ 114648 w 229296"/>
+              <a:gd name="connsiteY4" fmla="*/ 268233 h 268233"/>
+              <a:gd name="connsiteX5" fmla="*/ 114648 w 229296"/>
+              <a:gd name="connsiteY5" fmla="*/ 214586 h 268233"/>
+              <a:gd name="connsiteX6" fmla="*/ 0 w 229296"/>
+              <a:gd name="connsiteY6" fmla="*/ 214586 h 268233"/>
+              <a:gd name="connsiteX7" fmla="*/ 0 w 229296"/>
+              <a:gd name="connsiteY7" fmla="*/ 53647 h 268233"/>
+            </a:gdLst>
+            <a:ahLst/>
+            <a:cxnLst>
+              <a:cxn ang="0">
+                <a:pos x="connsiteX0" y="connsiteY0"/>
+              </a:cxn>
+              <a:cxn ang="0">
+                <a:pos x="connsiteX1" y="connsiteY1"/>
+              </a:cxn>
+              <a:cxn ang="0">
+                <a:pos x="connsiteX2" y="connsiteY2"/>
+              </a:cxn>
+              <a:cxn ang="0">
+                <a:pos x="connsiteX3" y="connsiteY3"/>
+              </a:cxn>
+              <a:cxn ang="0">
+                <a:pos x="connsiteX4" y="connsiteY4"/>
+              </a:cxn>
+              <a:cxn ang="0">
+                <a:pos x="connsiteX5" y="connsiteY5"/>
+              </a:cxn>
+              <a:cxn ang="0">
+                <a:pos x="connsiteX6" y="connsiteY6"/>
+              </a:cxn>
+              <a:cxn ang="0">
+                <a:pos x="connsiteX7" y="connsiteY7"/>
+              </a:cxn>
+            </a:cxnLst>
+            <a:rect l="l" t="t" r="r" b="b"/>
+            <a:pathLst>
+              <a:path w="229296" h="268233">
+                <a:moveTo>
+                  <a:pt x="0" y="53647"/>
+                </a:moveTo>
+                <a:lnTo>
+                  <a:pt x="114648" y="53647"/>
+                </a:lnTo>
+                <a:lnTo>
+                  <a:pt x="114648" y="0"/>
+                </a:lnTo>
+                <a:lnTo>
+                  <a:pt x="229296" y="134117"/>
+                </a:lnTo>
+                <a:lnTo>
+                  <a:pt x="114648" y="268233"/>
+                </a:lnTo>
+                <a:lnTo>
+                  <a:pt x="114648" y="214586"/>
+                </a:lnTo>
+                <a:lnTo>
+                  <a:pt x="0" y="214586"/>
+                </a:lnTo>
+                <a:lnTo>
+                  <a:pt x="0" y="53647"/>
+                </a:lnTo>
+                <a:close/>
+              </a:path>
+            </a:pathLst>
+          </a:custGeom>
+          <a:solidFill>
+            <a:srgbClr val="FF0000"/>
+          </a:solidFill>
+          <a:ln w="19050">
+            <a:noFill/>
+          </a:ln>
+        </p:spPr>
+        <p:style>
+          <a:lnRef idx="0">
+            <a:schemeClr val="accent1">
+              <a:tint val="60000"/>
+              <a:hueOff val="0"/>
+              <a:satOff val="0"/>
+              <a:lumOff val="0"/>
+              <a:alphaOff val="0"/>
+            </a:schemeClr>
+          </a:lnRef>
+          <a:fillRef idx="1">
+            <a:schemeClr val="accent1">
+              <a:tint val="60000"/>
+              <a:hueOff val="0"/>
+              <a:satOff val="0"/>
+              <a:lumOff val="0"/>
+              <a:alphaOff val="0"/>
+            </a:schemeClr>
+          </a:fillRef>
+          <a:effectRef idx="0">
+            <a:schemeClr val="accent1">
+              <a:tint val="60000"/>
+              <a:hueOff val="0"/>
+              <a:satOff val="0"/>
+              <a:lumOff val="0"/>
+              <a:alphaOff val="0"/>
+            </a:schemeClr>
+          </a:effectRef>
+          <a:fontRef idx="minor">
+            <a:schemeClr val="lt1"/>
+          </a:fontRef>
+        </p:style>
+        <p:txBody>
+          <a:bodyPr spcFirstLastPara="0" vert="horz" wrap="square" lIns="0" tIns="53647" rIns="68789" bIns="53647" numCol="1" spcCol="1270" anchor="ctr" anchorCtr="0">
+            <a:noAutofit/>
+          </a:bodyPr>
+          <a:lstStyle/>
+          <a:p>
+            <a:pPr algn="ctr" defTabSz="488930">
+              <a:lnSpc>
+                <a:spcPct val="90000"/>
+              </a:lnSpc>
+              <a:spcBef>
+                <a:spcPct val="0"/>
+              </a:spcBef>
+              <a:spcAft>
+                <a:spcPct val="35000"/>
+              </a:spcAft>
+            </a:pPr>
+            <a:endParaRPr lang="de-DE" sz="1100"/>
+          </a:p>
+        </p:txBody>
+      </p:sp>
+      <p:sp>
+        <p:nvSpPr>
+          <p:cNvPr id="52" name="Freihandform 18">
+            <a:extLst>
+              <a:ext uri="{FF2B5EF4-FFF2-40B4-BE49-F238E27FC236}">
+                <a16:creationId xmlns:a16="http://schemas.microsoft.com/office/drawing/2014/main" id="{DAF2DBE5-E71D-49C3-8081-79ACEFF09FF2}"/>
+              </a:ext>
+            </a:extLst>
+          </p:cNvPr>
+          <p:cNvSpPr/>
+          <p:nvPr/>
+        </p:nvSpPr>
+        <p:spPr>
+          <a:xfrm>
+            <a:off x="6145291" y="2326585"/>
+            <a:ext cx="362138" cy="268233"/>
+          </a:xfrm>
+          <a:custGeom>
+            <a:avLst/>
+            <a:gdLst>
+              <a:gd name="connsiteX0" fmla="*/ 0 w 229296"/>
+              <a:gd name="connsiteY0" fmla="*/ 53647 h 268233"/>
+              <a:gd name="connsiteX1" fmla="*/ 114648 w 229296"/>
+              <a:gd name="connsiteY1" fmla="*/ 53647 h 268233"/>
+              <a:gd name="connsiteX2" fmla="*/ 114648 w 229296"/>
+              <a:gd name="connsiteY2" fmla="*/ 0 h 268233"/>
+              <a:gd name="connsiteX3" fmla="*/ 229296 w 229296"/>
+              <a:gd name="connsiteY3" fmla="*/ 134117 h 268233"/>
+              <a:gd name="connsiteX4" fmla="*/ 114648 w 229296"/>
+              <a:gd name="connsiteY4" fmla="*/ 268233 h 268233"/>
+              <a:gd name="connsiteX5" fmla="*/ 114648 w 229296"/>
+              <a:gd name="connsiteY5" fmla="*/ 214586 h 268233"/>
+              <a:gd name="connsiteX6" fmla="*/ 0 w 229296"/>
+              <a:gd name="connsiteY6" fmla="*/ 214586 h 268233"/>
+              <a:gd name="connsiteX7" fmla="*/ 0 w 229296"/>
+              <a:gd name="connsiteY7" fmla="*/ 53647 h 268233"/>
+            </a:gdLst>
+            <a:ahLst/>
+            <a:cxnLst>
+              <a:cxn ang="0">
+                <a:pos x="connsiteX0" y="connsiteY0"/>
+              </a:cxn>
+              <a:cxn ang="0">
+                <a:pos x="connsiteX1" y="connsiteY1"/>
+              </a:cxn>
+              <a:cxn ang="0">
+                <a:pos x="connsiteX2" y="connsiteY2"/>
+              </a:cxn>
+              <a:cxn ang="0">
+                <a:pos x="connsiteX3" y="connsiteY3"/>
+              </a:cxn>
+              <a:cxn ang="0">
+                <a:pos x="connsiteX4" y="connsiteY4"/>
+              </a:cxn>
+              <a:cxn ang="0">
+                <a:pos x="connsiteX5" y="connsiteY5"/>
+              </a:cxn>
+              <a:cxn ang="0">
+                <a:pos x="connsiteX6" y="connsiteY6"/>
+              </a:cxn>
+              <a:cxn ang="0">
+                <a:pos x="connsiteX7" y="connsiteY7"/>
+              </a:cxn>
+            </a:cxnLst>
+            <a:rect l="l" t="t" r="r" b="b"/>
+            <a:pathLst>
+              <a:path w="229296" h="268233">
+                <a:moveTo>
+                  <a:pt x="0" y="53647"/>
+                </a:moveTo>
+                <a:lnTo>
+                  <a:pt x="114648" y="53647"/>
+                </a:lnTo>
+                <a:lnTo>
+                  <a:pt x="114648" y="0"/>
+                </a:lnTo>
+                <a:lnTo>
+                  <a:pt x="229296" y="134117"/>
+                </a:lnTo>
+                <a:lnTo>
+                  <a:pt x="114648" y="268233"/>
+                </a:lnTo>
+                <a:lnTo>
+                  <a:pt x="114648" y="214586"/>
+                </a:lnTo>
+                <a:lnTo>
+                  <a:pt x="0" y="214586"/>
+                </a:lnTo>
+                <a:lnTo>
+                  <a:pt x="0" y="53647"/>
+                </a:lnTo>
+                <a:close/>
+              </a:path>
+            </a:pathLst>
+          </a:custGeom>
+          <a:solidFill>
+            <a:srgbClr val="FF0000"/>
+          </a:solidFill>
+          <a:ln w="19050">
+            <a:noFill/>
+          </a:ln>
+        </p:spPr>
+        <p:style>
+          <a:lnRef idx="0">
+            <a:schemeClr val="accent1">
+              <a:tint val="60000"/>
+              <a:hueOff val="0"/>
+              <a:satOff val="0"/>
+              <a:lumOff val="0"/>
+              <a:alphaOff val="0"/>
+            </a:schemeClr>
+          </a:lnRef>
+          <a:fillRef idx="1">
+            <a:schemeClr val="accent1">
+              <a:tint val="60000"/>
+              <a:hueOff val="0"/>
+              <a:satOff val="0"/>
+              <a:lumOff val="0"/>
+              <a:alphaOff val="0"/>
+            </a:schemeClr>
+          </a:fillRef>
+          <a:effectRef idx="0">
+            <a:schemeClr val="accent1">
+              <a:tint val="60000"/>
+              <a:hueOff val="0"/>
+              <a:satOff val="0"/>
+              <a:lumOff val="0"/>
+              <a:alphaOff val="0"/>
+            </a:schemeClr>
+          </a:effectRef>
+          <a:fontRef idx="minor">
+            <a:schemeClr val="lt1"/>
+          </a:fontRef>
+        </p:style>
+        <p:txBody>
+          <a:bodyPr spcFirstLastPara="0" vert="horz" wrap="square" lIns="0" tIns="53647" rIns="68789" bIns="53647" numCol="1" spcCol="1270" anchor="ctr" anchorCtr="0">
+            <a:noAutofit/>
+          </a:bodyPr>
+          <a:lstStyle/>
+          <a:p>
+            <a:pPr algn="ctr" defTabSz="488930">
+              <a:lnSpc>
+                <a:spcPct val="90000"/>
+              </a:lnSpc>
+              <a:spcBef>
+                <a:spcPct val="0"/>
+              </a:spcBef>
+              <a:spcAft>
+                <a:spcPct val="35000"/>
+              </a:spcAft>
+            </a:pPr>
+            <a:endParaRPr lang="de-DE" sz="1100"/>
+          </a:p>
+        </p:txBody>
+      </p:sp>
+      <p:sp>
+        <p:nvSpPr>
+          <p:cNvPr id="54" name="Freihandform 22">
+            <a:extLst>
+              <a:ext uri="{FF2B5EF4-FFF2-40B4-BE49-F238E27FC236}">
+                <a16:creationId xmlns:a16="http://schemas.microsoft.com/office/drawing/2014/main" id="{518399F8-E2CB-4CE6-92BF-944AA2F5EF91}"/>
+              </a:ext>
+            </a:extLst>
+          </p:cNvPr>
+          <p:cNvSpPr/>
+          <p:nvPr/>
+        </p:nvSpPr>
+        <p:spPr>
+          <a:xfrm>
+            <a:off x="10251187" y="2323212"/>
+            <a:ext cx="362138" cy="268233"/>
+          </a:xfrm>
+          <a:custGeom>
+            <a:avLst/>
+            <a:gdLst>
+              <a:gd name="connsiteX0" fmla="*/ 0 w 229296"/>
+              <a:gd name="connsiteY0" fmla="*/ 53647 h 268233"/>
+              <a:gd name="connsiteX1" fmla="*/ 114648 w 229296"/>
+              <a:gd name="connsiteY1" fmla="*/ 53647 h 268233"/>
+              <a:gd name="connsiteX2" fmla="*/ 114648 w 229296"/>
+              <a:gd name="connsiteY2" fmla="*/ 0 h 268233"/>
+              <a:gd name="connsiteX3" fmla="*/ 229296 w 229296"/>
+              <a:gd name="connsiteY3" fmla="*/ 134117 h 268233"/>
+              <a:gd name="connsiteX4" fmla="*/ 114648 w 229296"/>
+              <a:gd name="connsiteY4" fmla="*/ 268233 h 268233"/>
+              <a:gd name="connsiteX5" fmla="*/ 114648 w 229296"/>
+              <a:gd name="connsiteY5" fmla="*/ 214586 h 268233"/>
+              <a:gd name="connsiteX6" fmla="*/ 0 w 229296"/>
+              <a:gd name="connsiteY6" fmla="*/ 214586 h 268233"/>
+              <a:gd name="connsiteX7" fmla="*/ 0 w 229296"/>
+              <a:gd name="connsiteY7" fmla="*/ 53647 h 268233"/>
+            </a:gdLst>
+            <a:ahLst/>
+            <a:cxnLst>
+              <a:cxn ang="0">
+                <a:pos x="connsiteX0" y="connsiteY0"/>
+              </a:cxn>
+              <a:cxn ang="0">
+                <a:pos x="connsiteX1" y="connsiteY1"/>
+              </a:cxn>
+              <a:cxn ang="0">
+                <a:pos x="connsiteX2" y="connsiteY2"/>
+              </a:cxn>
+              <a:cxn ang="0">
+                <a:pos x="connsiteX3" y="connsiteY3"/>
+              </a:cxn>
+              <a:cxn ang="0">
+                <a:pos x="connsiteX4" y="connsiteY4"/>
+              </a:cxn>
+              <a:cxn ang="0">
+                <a:pos x="connsiteX5" y="connsiteY5"/>
+              </a:cxn>
+              <a:cxn ang="0">
+                <a:pos x="connsiteX6" y="connsiteY6"/>
+              </a:cxn>
+              <a:cxn ang="0">
+                <a:pos x="connsiteX7" y="connsiteY7"/>
+              </a:cxn>
+            </a:cxnLst>
+            <a:rect l="l" t="t" r="r" b="b"/>
+            <a:pathLst>
+              <a:path w="229296" h="268233">
+                <a:moveTo>
+                  <a:pt x="0" y="53647"/>
+                </a:moveTo>
+                <a:lnTo>
+                  <a:pt x="114648" y="53647"/>
+                </a:lnTo>
+                <a:lnTo>
+                  <a:pt x="114648" y="0"/>
+                </a:lnTo>
+                <a:lnTo>
+                  <a:pt x="229296" y="134117"/>
+                </a:lnTo>
+                <a:lnTo>
+                  <a:pt x="114648" y="268233"/>
+                </a:lnTo>
+                <a:lnTo>
+                  <a:pt x="114648" y="214586"/>
+                </a:lnTo>
+                <a:lnTo>
+                  <a:pt x="0" y="214586"/>
+                </a:lnTo>
+                <a:lnTo>
+                  <a:pt x="0" y="53647"/>
+                </a:lnTo>
+                <a:close/>
+              </a:path>
+            </a:pathLst>
+          </a:custGeom>
+          <a:solidFill>
+            <a:srgbClr val="FF0000"/>
+          </a:solidFill>
+          <a:ln w="19050">
+            <a:noFill/>
+          </a:ln>
+        </p:spPr>
+        <p:style>
+          <a:lnRef idx="0">
+            <a:schemeClr val="accent1">
+              <a:tint val="60000"/>
+              <a:hueOff val="0"/>
+              <a:satOff val="0"/>
+              <a:lumOff val="0"/>
+              <a:alphaOff val="0"/>
+            </a:schemeClr>
+          </a:lnRef>
+          <a:fillRef idx="1">
+            <a:schemeClr val="accent1">
+              <a:tint val="60000"/>
+              <a:hueOff val="0"/>
+              <a:satOff val="0"/>
+              <a:lumOff val="0"/>
+              <a:alphaOff val="0"/>
+            </a:schemeClr>
+          </a:fillRef>
+          <a:effectRef idx="0">
+            <a:schemeClr val="accent1">
+              <a:tint val="60000"/>
+              <a:hueOff val="0"/>
+              <a:satOff val="0"/>
+              <a:lumOff val="0"/>
+              <a:alphaOff val="0"/>
+            </a:schemeClr>
+          </a:effectRef>
+          <a:fontRef idx="minor">
+            <a:schemeClr val="lt1"/>
+          </a:fontRef>
+        </p:style>
+        <p:txBody>
+          <a:bodyPr spcFirstLastPara="0" vert="horz" wrap="square" lIns="0" tIns="53647" rIns="68789" bIns="53647" numCol="1" spcCol="1270" anchor="ctr" anchorCtr="0">
+            <a:noAutofit/>
+          </a:bodyPr>
+          <a:lstStyle/>
+          <a:p>
+            <a:pPr algn="ctr" defTabSz="488930">
+              <a:lnSpc>
+                <a:spcPct val="90000"/>
+              </a:lnSpc>
+              <a:spcBef>
+                <a:spcPct val="0"/>
+              </a:spcBef>
+              <a:spcAft>
+                <a:spcPct val="35000"/>
+              </a:spcAft>
+            </a:pPr>
+            <a:endParaRPr lang="de-DE" sz="1100"/>
+          </a:p>
+        </p:txBody>
+      </p:sp>
+      <p:sp>
+        <p:nvSpPr>
+          <p:cNvPr id="55" name="Freihandform 24">
+            <a:extLst>
+              <a:ext uri="{FF2B5EF4-FFF2-40B4-BE49-F238E27FC236}">
+                <a16:creationId xmlns:a16="http://schemas.microsoft.com/office/drawing/2014/main" id="{289681F3-E45E-434E-B836-67771BBF0C1B}"/>
+              </a:ext>
+            </a:extLst>
+          </p:cNvPr>
+          <p:cNvSpPr/>
+          <p:nvPr/>
+        </p:nvSpPr>
+        <p:spPr>
+          <a:xfrm>
+            <a:off x="3069178" y="2326585"/>
+            <a:ext cx="362138" cy="268233"/>
+          </a:xfrm>
+          <a:custGeom>
+            <a:avLst/>
+            <a:gdLst>
+              <a:gd name="connsiteX0" fmla="*/ 0 w 229296"/>
+              <a:gd name="connsiteY0" fmla="*/ 53647 h 268233"/>
+              <a:gd name="connsiteX1" fmla="*/ 114648 w 229296"/>
+              <a:gd name="connsiteY1" fmla="*/ 53647 h 268233"/>
+              <a:gd name="connsiteX2" fmla="*/ 114648 w 229296"/>
+              <a:gd name="connsiteY2" fmla="*/ 0 h 268233"/>
+              <a:gd name="connsiteX3" fmla="*/ 229296 w 229296"/>
+              <a:gd name="connsiteY3" fmla="*/ 134117 h 268233"/>
+              <a:gd name="connsiteX4" fmla="*/ 114648 w 229296"/>
+              <a:gd name="connsiteY4" fmla="*/ 268233 h 268233"/>
+              <a:gd name="connsiteX5" fmla="*/ 114648 w 229296"/>
+              <a:gd name="connsiteY5" fmla="*/ 214586 h 268233"/>
+              <a:gd name="connsiteX6" fmla="*/ 0 w 229296"/>
+              <a:gd name="connsiteY6" fmla="*/ 214586 h 268233"/>
+              <a:gd name="connsiteX7" fmla="*/ 0 w 229296"/>
+              <a:gd name="connsiteY7" fmla="*/ 53647 h 268233"/>
+            </a:gdLst>
+            <a:ahLst/>
+            <a:cxnLst>
+              <a:cxn ang="0">
+                <a:pos x="connsiteX0" y="connsiteY0"/>
+              </a:cxn>
+              <a:cxn ang="0">
+                <a:pos x="connsiteX1" y="connsiteY1"/>
+              </a:cxn>
+              <a:cxn ang="0">
+                <a:pos x="connsiteX2" y="connsiteY2"/>
+              </a:cxn>
+              <a:cxn ang="0">
+                <a:pos x="connsiteX3" y="connsiteY3"/>
+              </a:cxn>
+              <a:cxn ang="0">
+                <a:pos x="connsiteX4" y="connsiteY4"/>
+              </a:cxn>
+              <a:cxn ang="0">
+                <a:pos x="connsiteX5" y="connsiteY5"/>
+              </a:cxn>
+              <a:cxn ang="0">
+                <a:pos x="connsiteX6" y="connsiteY6"/>
+              </a:cxn>
+              <a:cxn ang="0">
+                <a:pos x="connsiteX7" y="connsiteY7"/>
+              </a:cxn>
+            </a:cxnLst>
+            <a:rect l="l" t="t" r="r" b="b"/>
+            <a:pathLst>
+              <a:path w="229296" h="268233">
+                <a:moveTo>
+                  <a:pt x="0" y="53647"/>
+                </a:moveTo>
+                <a:lnTo>
+                  <a:pt x="114648" y="53647"/>
+                </a:lnTo>
+                <a:lnTo>
+                  <a:pt x="114648" y="0"/>
+                </a:lnTo>
+                <a:lnTo>
+                  <a:pt x="229296" y="134117"/>
+                </a:lnTo>
+                <a:lnTo>
+                  <a:pt x="114648" y="268233"/>
+                </a:lnTo>
+                <a:lnTo>
+                  <a:pt x="114648" y="214586"/>
+                </a:lnTo>
+                <a:lnTo>
+                  <a:pt x="0" y="214586"/>
+                </a:lnTo>
+                <a:lnTo>
+                  <a:pt x="0" y="53647"/>
+                </a:lnTo>
+                <a:close/>
+              </a:path>
+            </a:pathLst>
+          </a:custGeom>
+          <a:solidFill>
+            <a:srgbClr val="FF0000"/>
+          </a:solidFill>
+          <a:ln w="19050">
+            <a:noFill/>
+          </a:ln>
+        </p:spPr>
+        <p:style>
+          <a:lnRef idx="0">
+            <a:schemeClr val="accent1">
+              <a:tint val="60000"/>
+              <a:hueOff val="0"/>
+              <a:satOff val="0"/>
+              <a:lumOff val="0"/>
+              <a:alphaOff val="0"/>
+            </a:schemeClr>
+          </a:lnRef>
+          <a:fillRef idx="1">
+            <a:schemeClr val="accent1">
+              <a:tint val="60000"/>
+              <a:hueOff val="0"/>
+              <a:satOff val="0"/>
+              <a:lumOff val="0"/>
+              <a:alphaOff val="0"/>
+            </a:schemeClr>
+          </a:fillRef>
+          <a:effectRef idx="0">
+            <a:schemeClr val="accent1">
+              <a:tint val="60000"/>
+              <a:hueOff val="0"/>
+              <a:satOff val="0"/>
+              <a:lumOff val="0"/>
+              <a:alphaOff val="0"/>
+            </a:schemeClr>
+          </a:effectRef>
+          <a:fontRef idx="minor">
+            <a:schemeClr val="lt1"/>
+          </a:fontRef>
+        </p:style>
+        <p:txBody>
+          <a:bodyPr spcFirstLastPara="0" vert="horz" wrap="square" lIns="0" tIns="53647" rIns="68789" bIns="53647" numCol="1" spcCol="1270" anchor="ctr" anchorCtr="0">
+            <a:noAutofit/>
+          </a:bodyPr>
+          <a:lstStyle/>
+          <a:p>
+            <a:pPr algn="ctr" defTabSz="488930">
+              <a:lnSpc>
+                <a:spcPct val="90000"/>
+              </a:lnSpc>
+              <a:spcBef>
+                <a:spcPct val="0"/>
+              </a:spcBef>
+              <a:spcAft>
+                <a:spcPct val="35000"/>
+              </a:spcAft>
+            </a:pPr>
+            <a:endParaRPr lang="de-DE" sz="1100"/>
+          </a:p>
+        </p:txBody>
+      </p:sp>
+      <p:sp>
+        <p:nvSpPr>
+          <p:cNvPr id="56" name="Freihandform 26">
+            <a:extLst>
+              <a:ext uri="{FF2B5EF4-FFF2-40B4-BE49-F238E27FC236}">
+                <a16:creationId xmlns:a16="http://schemas.microsoft.com/office/drawing/2014/main" id="{A197CB3A-99CF-4184-BE4B-188DC614772A}"/>
+              </a:ext>
+            </a:extLst>
+          </p:cNvPr>
+          <p:cNvSpPr/>
+          <p:nvPr/>
+        </p:nvSpPr>
+        <p:spPr>
+          <a:xfrm>
+            <a:off x="9221404" y="2326585"/>
+            <a:ext cx="362138" cy="268233"/>
+          </a:xfrm>
+          <a:custGeom>
+            <a:avLst/>
+            <a:gdLst>
+              <a:gd name="connsiteX0" fmla="*/ 0 w 229296"/>
+              <a:gd name="connsiteY0" fmla="*/ 53647 h 268233"/>
+              <a:gd name="connsiteX1" fmla="*/ 114648 w 229296"/>
+              <a:gd name="connsiteY1" fmla="*/ 53647 h 268233"/>
+              <a:gd name="connsiteX2" fmla="*/ 114648 w 229296"/>
+              <a:gd name="connsiteY2" fmla="*/ 0 h 268233"/>
+              <a:gd name="connsiteX3" fmla="*/ 229296 w 229296"/>
+              <a:gd name="connsiteY3" fmla="*/ 134117 h 268233"/>
+              <a:gd name="connsiteX4" fmla="*/ 114648 w 229296"/>
+              <a:gd name="connsiteY4" fmla="*/ 268233 h 268233"/>
+              <a:gd name="connsiteX5" fmla="*/ 114648 w 229296"/>
+              <a:gd name="connsiteY5" fmla="*/ 214586 h 268233"/>
+              <a:gd name="connsiteX6" fmla="*/ 0 w 229296"/>
+              <a:gd name="connsiteY6" fmla="*/ 214586 h 268233"/>
+              <a:gd name="connsiteX7" fmla="*/ 0 w 229296"/>
+              <a:gd name="connsiteY7" fmla="*/ 53647 h 268233"/>
+            </a:gdLst>
+            <a:ahLst/>
+            <a:cxnLst>
+              <a:cxn ang="0">
+                <a:pos x="connsiteX0" y="connsiteY0"/>
+              </a:cxn>
+              <a:cxn ang="0">
+                <a:pos x="connsiteX1" y="connsiteY1"/>
+              </a:cxn>
+              <a:cxn ang="0">
+                <a:pos x="connsiteX2" y="connsiteY2"/>
+              </a:cxn>
+              <a:cxn ang="0">
+                <a:pos x="connsiteX3" y="connsiteY3"/>
+              </a:cxn>
+              <a:cxn ang="0">
+                <a:pos x="connsiteX4" y="connsiteY4"/>
+              </a:cxn>
+              <a:cxn ang="0">
+                <a:pos x="connsiteX5" y="connsiteY5"/>
+              </a:cxn>
+              <a:cxn ang="0">
+                <a:pos x="connsiteX6" y="connsiteY6"/>
+              </a:cxn>
+              <a:cxn ang="0">
+                <a:pos x="connsiteX7" y="connsiteY7"/>
+              </a:cxn>
+            </a:cxnLst>
+            <a:rect l="l" t="t" r="r" b="b"/>
+            <a:pathLst>
+              <a:path w="229296" h="268233">
+                <a:moveTo>
+                  <a:pt x="0" y="53647"/>
+                </a:moveTo>
+                <a:lnTo>
+                  <a:pt x="114648" y="53647"/>
+                </a:lnTo>
+                <a:lnTo>
+                  <a:pt x="114648" y="0"/>
+                </a:lnTo>
+                <a:lnTo>
+                  <a:pt x="229296" y="134117"/>
+                </a:lnTo>
+                <a:lnTo>
+                  <a:pt x="114648" y="268233"/>
+                </a:lnTo>
+                <a:lnTo>
+                  <a:pt x="114648" y="214586"/>
+                </a:lnTo>
+                <a:lnTo>
+                  <a:pt x="0" y="214586"/>
+                </a:lnTo>
+                <a:lnTo>
+                  <a:pt x="0" y="53647"/>
+                </a:lnTo>
+                <a:close/>
+              </a:path>
+            </a:pathLst>
+          </a:custGeom>
+          <a:solidFill>
+            <a:srgbClr val="FF0000"/>
+          </a:solidFill>
+          <a:ln w="19050">
+            <a:noFill/>
+          </a:ln>
+        </p:spPr>
+        <p:style>
+          <a:lnRef idx="0">
+            <a:schemeClr val="accent1">
+              <a:tint val="60000"/>
+              <a:hueOff val="0"/>
+              <a:satOff val="0"/>
+              <a:lumOff val="0"/>
+              <a:alphaOff val="0"/>
+            </a:schemeClr>
+          </a:lnRef>
+          <a:fillRef idx="1">
+            <a:schemeClr val="accent1">
+              <a:tint val="60000"/>
+              <a:hueOff val="0"/>
+              <a:satOff val="0"/>
+              <a:lumOff val="0"/>
+              <a:alphaOff val="0"/>
+            </a:schemeClr>
+          </a:fillRef>
+          <a:effectRef idx="0">
+            <a:schemeClr val="accent1">
+              <a:tint val="60000"/>
+              <a:hueOff val="0"/>
+              <a:satOff val="0"/>
+              <a:lumOff val="0"/>
+              <a:alphaOff val="0"/>
+            </a:schemeClr>
+          </a:effectRef>
+          <a:fontRef idx="minor">
+            <a:schemeClr val="lt1"/>
+          </a:fontRef>
+        </p:style>
+        <p:txBody>
+          <a:bodyPr spcFirstLastPara="0" vert="horz" wrap="square" lIns="0" tIns="53647" rIns="68789" bIns="53647" numCol="1" spcCol="1270" anchor="ctr" anchorCtr="0">
+            <a:noAutofit/>
+          </a:bodyPr>
+          <a:lstStyle/>
+          <a:p>
+            <a:pPr algn="ctr" defTabSz="488930">
+              <a:lnSpc>
+                <a:spcPct val="90000"/>
+              </a:lnSpc>
+              <a:spcBef>
+                <a:spcPct val="0"/>
+              </a:spcBef>
+              <a:spcAft>
+                <a:spcPct val="35000"/>
+              </a:spcAft>
+            </a:pPr>
+            <a:endParaRPr lang="de-DE" sz="1100"/>
+          </a:p>
+        </p:txBody>
+      </p:sp>
+      <p:sp>
+        <p:nvSpPr>
+          <p:cNvPr id="57" name="Freihandform 28">
+            <a:extLst>
+              <a:ext uri="{FF2B5EF4-FFF2-40B4-BE49-F238E27FC236}">
+                <a16:creationId xmlns:a16="http://schemas.microsoft.com/office/drawing/2014/main" id="{EEEC1EE7-54C0-4BEE-952A-0086F75569CE}"/>
+              </a:ext>
+            </a:extLst>
+          </p:cNvPr>
+          <p:cNvSpPr/>
+          <p:nvPr/>
+        </p:nvSpPr>
+        <p:spPr>
+          <a:xfrm flipH="1">
+            <a:off x="11276557" y="2323212"/>
+            <a:ext cx="362138" cy="268233"/>
+          </a:xfrm>
+          <a:custGeom>
+            <a:avLst/>
+            <a:gdLst>
+              <a:gd name="connsiteX0" fmla="*/ 0 w 229296"/>
+              <a:gd name="connsiteY0" fmla="*/ 53647 h 268233"/>
+              <a:gd name="connsiteX1" fmla="*/ 114648 w 229296"/>
+              <a:gd name="connsiteY1" fmla="*/ 53647 h 268233"/>
+              <a:gd name="connsiteX2" fmla="*/ 114648 w 229296"/>
+              <a:gd name="connsiteY2" fmla="*/ 0 h 268233"/>
+              <a:gd name="connsiteX3" fmla="*/ 229296 w 229296"/>
+              <a:gd name="connsiteY3" fmla="*/ 134117 h 268233"/>
+              <a:gd name="connsiteX4" fmla="*/ 114648 w 229296"/>
+              <a:gd name="connsiteY4" fmla="*/ 268233 h 268233"/>
+              <a:gd name="connsiteX5" fmla="*/ 114648 w 229296"/>
+              <a:gd name="connsiteY5" fmla="*/ 214586 h 268233"/>
+              <a:gd name="connsiteX6" fmla="*/ 0 w 229296"/>
+              <a:gd name="connsiteY6" fmla="*/ 214586 h 268233"/>
+              <a:gd name="connsiteX7" fmla="*/ 0 w 229296"/>
+              <a:gd name="connsiteY7" fmla="*/ 53647 h 268233"/>
+            </a:gdLst>
+            <a:ahLst/>
+            <a:cxnLst>
+              <a:cxn ang="0">
+                <a:pos x="connsiteX0" y="connsiteY0"/>
+              </a:cxn>
+              <a:cxn ang="0">
+                <a:pos x="connsiteX1" y="connsiteY1"/>
+              </a:cxn>
+              <a:cxn ang="0">
+                <a:pos x="connsiteX2" y="connsiteY2"/>
+              </a:cxn>
+              <a:cxn ang="0">
+                <a:pos x="connsiteX3" y="connsiteY3"/>
+              </a:cxn>
+              <a:cxn ang="0">
+                <a:pos x="connsiteX4" y="connsiteY4"/>
+              </a:cxn>
+              <a:cxn ang="0">
+                <a:pos x="connsiteX5" y="connsiteY5"/>
+              </a:cxn>
+              <a:cxn ang="0">
+                <a:pos x="connsiteX6" y="connsiteY6"/>
+              </a:cxn>
+              <a:cxn ang="0">
+                <a:pos x="connsiteX7" y="connsiteY7"/>
+              </a:cxn>
+            </a:cxnLst>
+            <a:rect l="l" t="t" r="r" b="b"/>
+            <a:pathLst>
+              <a:path w="229296" h="268233">
+                <a:moveTo>
+                  <a:pt x="0" y="53647"/>
+                </a:moveTo>
+                <a:lnTo>
+                  <a:pt x="114648" y="53647"/>
+                </a:lnTo>
+                <a:lnTo>
+                  <a:pt x="114648" y="0"/>
+                </a:lnTo>
+                <a:lnTo>
+                  <a:pt x="229296" y="134117"/>
+                </a:lnTo>
+                <a:lnTo>
+                  <a:pt x="114648" y="268233"/>
+                </a:lnTo>
+                <a:lnTo>
+                  <a:pt x="114648" y="214586"/>
+                </a:lnTo>
+                <a:lnTo>
+                  <a:pt x="0" y="214586"/>
+                </a:lnTo>
+                <a:lnTo>
+                  <a:pt x="0" y="53647"/>
+                </a:lnTo>
+                <a:close/>
+              </a:path>
+            </a:pathLst>
+          </a:custGeom>
+          <a:solidFill>
+            <a:srgbClr val="FF0000"/>
+          </a:solidFill>
+          <a:ln w="19050">
+            <a:noFill/>
+          </a:ln>
+        </p:spPr>
+        <p:style>
+          <a:lnRef idx="0">
+            <a:schemeClr val="accent1">
+              <a:tint val="60000"/>
+              <a:hueOff val="0"/>
+              <a:satOff val="0"/>
+              <a:lumOff val="0"/>
+              <a:alphaOff val="0"/>
+            </a:schemeClr>
+          </a:lnRef>
+          <a:fillRef idx="1">
+            <a:schemeClr val="accent1">
+              <a:tint val="60000"/>
+              <a:hueOff val="0"/>
+              <a:satOff val="0"/>
+              <a:lumOff val="0"/>
+              <a:alphaOff val="0"/>
+            </a:schemeClr>
+          </a:fillRef>
+          <a:effectRef idx="0">
+            <a:schemeClr val="accent1">
+              <a:tint val="60000"/>
+              <a:hueOff val="0"/>
+              <a:satOff val="0"/>
+              <a:lumOff val="0"/>
+              <a:alphaOff val="0"/>
+            </a:schemeClr>
+          </a:effectRef>
+          <a:fontRef idx="minor">
+            <a:schemeClr val="lt1"/>
+          </a:fontRef>
+        </p:style>
+        <p:txBody>
+          <a:bodyPr spcFirstLastPara="0" vert="horz" wrap="square" lIns="68789" tIns="53647" rIns="0" bIns="53647" numCol="1" spcCol="1270" anchor="ctr" anchorCtr="0">
+            <a:noAutofit/>
+          </a:bodyPr>
+          <a:lstStyle/>
+          <a:p>
+            <a:pPr algn="ctr" defTabSz="488930">
+              <a:lnSpc>
+                <a:spcPct val="90000"/>
+              </a:lnSpc>
+              <a:spcBef>
+                <a:spcPct val="0"/>
+              </a:spcBef>
+              <a:spcAft>
+                <a:spcPct val="35000"/>
+              </a:spcAft>
+            </a:pPr>
+            <a:endParaRPr lang="de-DE" sz="1100"/>
+          </a:p>
+        </p:txBody>
+      </p:sp>
+      <p:sp>
+        <p:nvSpPr>
+          <p:cNvPr id="62" name="Freihandform 21">
+            <a:extLst>
+              <a:ext uri="{FF2B5EF4-FFF2-40B4-BE49-F238E27FC236}">
+                <a16:creationId xmlns:a16="http://schemas.microsoft.com/office/drawing/2014/main" id="{31315188-D193-4C01-AFC1-7B9D87C4747E}"/>
+              </a:ext>
+            </a:extLst>
+          </p:cNvPr>
+          <p:cNvSpPr/>
+          <p:nvPr/>
+        </p:nvSpPr>
+        <p:spPr>
+          <a:xfrm>
+            <a:off x="8487535" y="3301682"/>
+            <a:ext cx="792088" cy="648951"/>
+          </a:xfrm>
+          <a:custGeom>
+            <a:avLst/>
+            <a:gdLst>
+              <a:gd name="connsiteX0" fmla="*/ 0 w 1081585"/>
+              <a:gd name="connsiteY0" fmla="*/ 0 h 648951"/>
+              <a:gd name="connsiteX1" fmla="*/ 1081585 w 1081585"/>
+              <a:gd name="connsiteY1" fmla="*/ 0 h 648951"/>
+              <a:gd name="connsiteX2" fmla="*/ 1081585 w 1081585"/>
+              <a:gd name="connsiteY2" fmla="*/ 648951 h 648951"/>
+              <a:gd name="connsiteX3" fmla="*/ 0 w 1081585"/>
+              <a:gd name="connsiteY3" fmla="*/ 648951 h 648951"/>
+              <a:gd name="connsiteX4" fmla="*/ 0 w 1081585"/>
+              <a:gd name="connsiteY4" fmla="*/ 0 h 648951"/>
+            </a:gdLst>
+            <a:ahLst/>
+            <a:cxnLst>
+              <a:cxn ang="0">
+                <a:pos x="connsiteX0" y="connsiteY0"/>
+              </a:cxn>
+              <a:cxn ang="0">
+                <a:pos x="connsiteX1" y="connsiteY1"/>
+              </a:cxn>
+              <a:cxn ang="0">
+                <a:pos x="connsiteX2" y="connsiteY2"/>
+              </a:cxn>
+              <a:cxn ang="0">
+                <a:pos x="connsiteX3" y="connsiteY3"/>
+              </a:cxn>
+              <a:cxn ang="0">
+                <a:pos x="connsiteX4" y="connsiteY4"/>
+              </a:cxn>
+            </a:cxnLst>
+            <a:rect l="l" t="t" r="r" b="b"/>
+            <a:pathLst>
+              <a:path w="1081585" h="648951">
+                <a:moveTo>
+                  <a:pt x="0" y="0"/>
+                </a:moveTo>
+                <a:lnTo>
+                  <a:pt x="1081585" y="0"/>
+                </a:lnTo>
+                <a:lnTo>
+                  <a:pt x="1081585" y="648951"/>
+                </a:lnTo>
+                <a:lnTo>
+                  <a:pt x="0" y="648951"/>
+                </a:lnTo>
+                <a:lnTo>
+                  <a:pt x="0" y="0"/>
+                </a:lnTo>
+                <a:close/>
+              </a:path>
+            </a:pathLst>
+          </a:custGeom>
+          <a:ln/>
+        </p:spPr>
+        <p:style>
+          <a:lnRef idx="2">
+            <a:schemeClr val="accent1">
+              <a:shade val="50000"/>
+            </a:schemeClr>
+          </a:lnRef>
+          <a:fillRef idx="1">
+            <a:schemeClr val="accent1"/>
+          </a:fillRef>
+          <a:effectRef idx="0">
+            <a:schemeClr val="accent1"/>
+          </a:effectRef>
+          <a:fontRef idx="minor">
+            <a:schemeClr val="lt1"/>
+          </a:fontRef>
+        </p:style>
+        <p:txBody>
+          <a:bodyPr spcFirstLastPara="0" vert="horz" wrap="square" lIns="49530" tIns="49530" rIns="49530" bIns="49530" numCol="1" spcCol="1270" anchor="ctr" anchorCtr="0">
+            <a:noAutofit/>
+          </a:bodyPr>
+          <a:lstStyle/>
+          <a:p>
+            <a:pPr algn="ctr" defTabSz="577826">
+              <a:lnSpc>
+                <a:spcPct val="90000"/>
+              </a:lnSpc>
+              <a:spcBef>
+                <a:spcPct val="0"/>
+              </a:spcBef>
+              <a:spcAft>
+                <a:spcPct val="35000"/>
+              </a:spcAft>
+            </a:pPr>
+            <a:r>
+              <a:rPr lang="de-DE" sz="1300" dirty="0"/>
+              <a:t>REESS</a:t>
+            </a:r>
+            <a:br>
+              <a:rPr lang="de-DE" sz="1300" dirty="0"/>
+            </a:br>
+            <a:r>
+              <a:rPr lang="de-DE" sz="1300" dirty="0"/>
+              <a:t>(</a:t>
+            </a:r>
+            <a:r>
+              <a:rPr lang="de-DE" sz="1300" dirty="0" err="1"/>
+              <a:t>Battery</a:t>
+            </a:r>
+            <a:r>
+              <a:rPr lang="de-DE" sz="1300" dirty="0"/>
+              <a:t>)</a:t>
+            </a:r>
+          </a:p>
+        </p:txBody>
+      </p:sp>
+      <p:sp>
+        <p:nvSpPr>
+          <p:cNvPr id="63" name="Freihandform 16">
+            <a:extLst>
+              <a:ext uri="{FF2B5EF4-FFF2-40B4-BE49-F238E27FC236}">
+                <a16:creationId xmlns:a16="http://schemas.microsoft.com/office/drawing/2014/main" id="{60F62BF8-CAAD-4D1A-A857-87FD06E99B90}"/>
+              </a:ext>
+            </a:extLst>
+          </p:cNvPr>
+          <p:cNvSpPr/>
+          <p:nvPr/>
+        </p:nvSpPr>
+        <p:spPr>
+          <a:xfrm rot="5400000">
+            <a:off x="8702510" y="2921531"/>
+            <a:ext cx="362138" cy="268233"/>
+          </a:xfrm>
+          <a:custGeom>
+            <a:avLst/>
+            <a:gdLst>
+              <a:gd name="connsiteX0" fmla="*/ 0 w 229296"/>
+              <a:gd name="connsiteY0" fmla="*/ 53647 h 268233"/>
+              <a:gd name="connsiteX1" fmla="*/ 114648 w 229296"/>
+              <a:gd name="connsiteY1" fmla="*/ 53647 h 268233"/>
+              <a:gd name="connsiteX2" fmla="*/ 114648 w 229296"/>
+              <a:gd name="connsiteY2" fmla="*/ 0 h 268233"/>
+              <a:gd name="connsiteX3" fmla="*/ 229296 w 229296"/>
+              <a:gd name="connsiteY3" fmla="*/ 134117 h 268233"/>
+              <a:gd name="connsiteX4" fmla="*/ 114648 w 229296"/>
+              <a:gd name="connsiteY4" fmla="*/ 268233 h 268233"/>
+              <a:gd name="connsiteX5" fmla="*/ 114648 w 229296"/>
+              <a:gd name="connsiteY5" fmla="*/ 214586 h 268233"/>
+              <a:gd name="connsiteX6" fmla="*/ 0 w 229296"/>
+              <a:gd name="connsiteY6" fmla="*/ 214586 h 268233"/>
+              <a:gd name="connsiteX7" fmla="*/ 0 w 229296"/>
+              <a:gd name="connsiteY7" fmla="*/ 53647 h 268233"/>
+            </a:gdLst>
+            <a:ahLst/>
+            <a:cxnLst>
+              <a:cxn ang="0">
+                <a:pos x="connsiteX0" y="connsiteY0"/>
+              </a:cxn>
+              <a:cxn ang="0">
+                <a:pos x="connsiteX1" y="connsiteY1"/>
+              </a:cxn>
+              <a:cxn ang="0">
+                <a:pos x="connsiteX2" y="connsiteY2"/>
+              </a:cxn>
+              <a:cxn ang="0">
+                <a:pos x="connsiteX3" y="connsiteY3"/>
+              </a:cxn>
+              <a:cxn ang="0">
+                <a:pos x="connsiteX4" y="connsiteY4"/>
+              </a:cxn>
+              <a:cxn ang="0">
+                <a:pos x="connsiteX5" y="connsiteY5"/>
+              </a:cxn>
+              <a:cxn ang="0">
+                <a:pos x="connsiteX6" y="connsiteY6"/>
+              </a:cxn>
+              <a:cxn ang="0">
+                <a:pos x="connsiteX7" y="connsiteY7"/>
+              </a:cxn>
+            </a:cxnLst>
+            <a:rect l="l" t="t" r="r" b="b"/>
+            <a:pathLst>
+              <a:path w="229296" h="268233">
+                <a:moveTo>
+                  <a:pt x="0" y="53647"/>
+                </a:moveTo>
+                <a:lnTo>
+                  <a:pt x="114648" y="53647"/>
+                </a:lnTo>
+                <a:lnTo>
+                  <a:pt x="114648" y="0"/>
+                </a:lnTo>
+                <a:lnTo>
+                  <a:pt x="229296" y="134117"/>
+                </a:lnTo>
+                <a:lnTo>
+                  <a:pt x="114648" y="268233"/>
+                </a:lnTo>
+                <a:lnTo>
+                  <a:pt x="114648" y="214586"/>
+                </a:lnTo>
+                <a:lnTo>
+                  <a:pt x="0" y="214586"/>
+                </a:lnTo>
+                <a:lnTo>
+                  <a:pt x="0" y="53647"/>
+                </a:lnTo>
+                <a:close/>
+              </a:path>
+            </a:pathLst>
+          </a:custGeom>
+          <a:solidFill>
+            <a:srgbClr val="FF0000"/>
+          </a:solidFill>
+          <a:ln w="19050">
+            <a:noFill/>
+          </a:ln>
+        </p:spPr>
+        <p:style>
+          <a:lnRef idx="0">
+            <a:schemeClr val="accent1">
+              <a:tint val="60000"/>
+              <a:hueOff val="0"/>
+              <a:satOff val="0"/>
+              <a:lumOff val="0"/>
+              <a:alphaOff val="0"/>
+            </a:schemeClr>
+          </a:lnRef>
+          <a:fillRef idx="1">
+            <a:schemeClr val="accent1">
+              <a:tint val="60000"/>
+              <a:hueOff val="0"/>
+              <a:satOff val="0"/>
+              <a:lumOff val="0"/>
+              <a:alphaOff val="0"/>
+            </a:schemeClr>
+          </a:fillRef>
+          <a:effectRef idx="0">
+            <a:schemeClr val="accent1">
+              <a:tint val="60000"/>
+              <a:hueOff val="0"/>
+              <a:satOff val="0"/>
+              <a:lumOff val="0"/>
+              <a:alphaOff val="0"/>
+            </a:schemeClr>
+          </a:effectRef>
+          <a:fontRef idx="minor">
+            <a:schemeClr val="lt1"/>
+          </a:fontRef>
+        </p:style>
+        <p:txBody>
+          <a:bodyPr spcFirstLastPara="0" vert="horz" wrap="square" lIns="0" tIns="53647" rIns="68789" bIns="53647" numCol="1" spcCol="1270" anchor="ctr" anchorCtr="0">
+            <a:noAutofit/>
+          </a:bodyPr>
+          <a:lstStyle/>
+          <a:p>
+            <a:pPr algn="ctr" defTabSz="488930">
+              <a:lnSpc>
+                <a:spcPct val="90000"/>
+              </a:lnSpc>
+              <a:spcBef>
+                <a:spcPct val="0"/>
+              </a:spcBef>
+              <a:spcAft>
+                <a:spcPct val="35000"/>
+              </a:spcAft>
+            </a:pPr>
+            <a:endParaRPr lang="de-DE" sz="1100"/>
+          </a:p>
+        </p:txBody>
+      </p:sp>
+      <p:grpSp>
+        <p:nvGrpSpPr>
+          <p:cNvPr id="64" name="Gruppieren 63">
+            <a:extLst>
+              <a:ext uri="{FF2B5EF4-FFF2-40B4-BE49-F238E27FC236}">
+                <a16:creationId xmlns:a16="http://schemas.microsoft.com/office/drawing/2014/main" id="{11A5A512-9FB4-4933-9E2B-80E6F58D1509}"/>
+              </a:ext>
+            </a:extLst>
+          </p:cNvPr>
+          <p:cNvGrpSpPr/>
+          <p:nvPr/>
+        </p:nvGrpSpPr>
+        <p:grpSpPr>
+          <a:xfrm>
+            <a:off x="4243613" y="3288352"/>
+            <a:ext cx="1081585" cy="648951"/>
+            <a:chOff x="6061582" y="1115684"/>
+            <a:chExt cx="1081585" cy="648951"/>
+          </a:xfrm>
+        </p:grpSpPr>
+        <p:sp>
+          <p:nvSpPr>
+            <p:cNvPr id="65" name="Rechteck 64">
+              <a:extLst>
+                <a:ext uri="{FF2B5EF4-FFF2-40B4-BE49-F238E27FC236}">
+                  <a16:creationId xmlns:a16="http://schemas.microsoft.com/office/drawing/2014/main" id="{E719221F-4B3D-4543-A750-CFC5B9197494}"/>
+                </a:ext>
+              </a:extLst>
+            </p:cNvPr>
+            <p:cNvSpPr/>
+            <p:nvPr/>
+          </p:nvSpPr>
+          <p:spPr>
+            <a:xfrm>
+              <a:off x="6061582" y="1115684"/>
+              <a:ext cx="1081585" cy="648951"/>
+            </a:xfrm>
+            <a:prstGeom prst="rect">
+              <a:avLst/>
+            </a:prstGeom>
+            <a:solidFill>
+              <a:schemeClr val="accent1">
+                <a:lumMod val="40000"/>
+                <a:lumOff val="60000"/>
+              </a:schemeClr>
+            </a:solidFill>
+            <a:ln w="12700">
+              <a:solidFill>
+                <a:schemeClr val="accent1"/>
+              </a:solidFill>
+            </a:ln>
+          </p:spPr>
+          <p:style>
+            <a:lnRef idx="2">
+              <a:schemeClr val="accent1"/>
+            </a:lnRef>
+            <a:fillRef idx="1">
+              <a:schemeClr val="lt1"/>
+            </a:fillRef>
+            <a:effectRef idx="0">
+              <a:schemeClr val="accent1"/>
+            </a:effectRef>
+            <a:fontRef idx="minor">
+              <a:schemeClr val="dk1"/>
+            </a:fontRef>
+          </p:style>
+        </p:sp>
+        <p:sp>
+          <p:nvSpPr>
+            <p:cNvPr id="66" name="Textfeld 65">
+              <a:extLst>
+                <a:ext uri="{FF2B5EF4-FFF2-40B4-BE49-F238E27FC236}">
+                  <a16:creationId xmlns:a16="http://schemas.microsoft.com/office/drawing/2014/main" id="{4D129785-DD04-4854-BF00-0B17B33C2741}"/>
+                </a:ext>
+              </a:extLst>
+            </p:cNvPr>
+            <p:cNvSpPr txBox="1"/>
+            <p:nvPr/>
+          </p:nvSpPr>
+          <p:spPr>
+            <a:xfrm>
+              <a:off x="6061582" y="1115684"/>
+              <a:ext cx="1081585" cy="648951"/>
+            </a:xfrm>
+            <a:prstGeom prst="rect">
+              <a:avLst/>
+            </a:prstGeom>
+          </p:spPr>
+          <p:style>
+            <a:lnRef idx="0">
+              <a:scrgbClr r="0" g="0" b="0"/>
+            </a:lnRef>
+            <a:fillRef idx="0">
+              <a:scrgbClr r="0" g="0" b="0"/>
+            </a:fillRef>
+            <a:effectRef idx="0">
+              <a:scrgbClr r="0" g="0" b="0"/>
+            </a:effectRef>
+            <a:fontRef idx="minor">
+              <a:schemeClr val="dk1"/>
+            </a:fontRef>
+          </p:style>
+          <p:txBody>
+            <a:bodyPr spcFirstLastPara="0" vert="horz" wrap="square" lIns="49530" tIns="144000" rIns="49530" bIns="49530" numCol="1" spcCol="1270" anchor="t" anchorCtr="0">
+              <a:noAutofit/>
+            </a:bodyPr>
+            <a:lstStyle/>
+            <a:p>
+              <a:pPr marL="0" lvl="0" indent="0" algn="ctr" defTabSz="577850">
+                <a:lnSpc>
+                  <a:spcPct val="90000"/>
+                </a:lnSpc>
+                <a:spcBef>
+                  <a:spcPct val="0"/>
+                </a:spcBef>
+                <a:spcAft>
+                  <a:spcPct val="35000"/>
+                </a:spcAft>
+                <a:buNone/>
+              </a:pPr>
+              <a:r>
+                <a:rPr lang="de-DE" sz="1300" kern="1200" dirty="0"/>
+                <a:t>Hybrid</a:t>
+              </a:r>
+              <a:br>
+                <a:rPr lang="de-DE" sz="1300" kern="1200" dirty="0"/>
+              </a:br>
+              <a:r>
+                <a:rPr lang="de-DE" sz="1300" kern="1200" dirty="0" err="1"/>
+                <a:t>Strategy</a:t>
+              </a:r>
+              <a:endParaRPr lang="de-DE" sz="1300" kern="1200" dirty="0"/>
+            </a:p>
+          </p:txBody>
+        </p:sp>
+      </p:grpSp>
+      <p:grpSp>
+        <p:nvGrpSpPr>
+          <p:cNvPr id="67" name="Gruppieren 66">
+            <a:extLst>
+              <a:ext uri="{FF2B5EF4-FFF2-40B4-BE49-F238E27FC236}">
+                <a16:creationId xmlns:a16="http://schemas.microsoft.com/office/drawing/2014/main" id="{69907883-C518-4378-B791-7A8EA8B87536}"/>
+              </a:ext>
+            </a:extLst>
+          </p:cNvPr>
+          <p:cNvGrpSpPr/>
+          <p:nvPr/>
+        </p:nvGrpSpPr>
+        <p:grpSpPr>
+          <a:xfrm>
+            <a:off x="4415202" y="1042606"/>
+            <a:ext cx="742805" cy="432048"/>
+            <a:chOff x="6061582" y="1115684"/>
+            <a:chExt cx="1081585" cy="648951"/>
+          </a:xfrm>
+        </p:grpSpPr>
+        <p:sp>
+          <p:nvSpPr>
+            <p:cNvPr id="68" name="Rechteck 67">
+              <a:extLst>
+                <a:ext uri="{FF2B5EF4-FFF2-40B4-BE49-F238E27FC236}">
+                  <a16:creationId xmlns:a16="http://schemas.microsoft.com/office/drawing/2014/main" id="{D14C7636-0D32-4ACB-B059-B4A984D2F25C}"/>
+                </a:ext>
+              </a:extLst>
+            </p:cNvPr>
+            <p:cNvSpPr/>
+            <p:nvPr/>
+          </p:nvSpPr>
+          <p:spPr>
+            <a:xfrm>
+              <a:off x="6061582" y="1115684"/>
+              <a:ext cx="1081585" cy="648951"/>
+            </a:xfrm>
+            <a:prstGeom prst="rect">
+              <a:avLst/>
+            </a:prstGeom>
+            <a:solidFill>
+              <a:schemeClr val="accent1">
+                <a:lumMod val="40000"/>
+                <a:lumOff val="60000"/>
+              </a:schemeClr>
+            </a:solidFill>
+            <a:ln w="12700">
+              <a:solidFill>
+                <a:schemeClr val="accent1"/>
+              </a:solidFill>
+            </a:ln>
+          </p:spPr>
+          <p:style>
+            <a:lnRef idx="2">
+              <a:schemeClr val="accent1"/>
+            </a:lnRef>
+            <a:fillRef idx="1">
+              <a:schemeClr val="lt1"/>
+            </a:fillRef>
+            <a:effectRef idx="0">
+              <a:schemeClr val="accent1"/>
+            </a:effectRef>
+            <a:fontRef idx="minor">
+              <a:schemeClr val="dk1"/>
+            </a:fontRef>
+          </p:style>
+        </p:sp>
+        <p:sp>
+          <p:nvSpPr>
+            <p:cNvPr id="69" name="Textfeld 68">
+              <a:extLst>
+                <a:ext uri="{FF2B5EF4-FFF2-40B4-BE49-F238E27FC236}">
+                  <a16:creationId xmlns:a16="http://schemas.microsoft.com/office/drawing/2014/main" id="{CBA31DA5-6E89-464C-8C91-35FEFBBEA8D6}"/>
+                </a:ext>
+              </a:extLst>
+            </p:cNvPr>
+            <p:cNvSpPr txBox="1"/>
+            <p:nvPr/>
+          </p:nvSpPr>
+          <p:spPr>
+            <a:xfrm>
+              <a:off x="6061582" y="1115684"/>
+              <a:ext cx="1081585" cy="648951"/>
+            </a:xfrm>
+            <a:prstGeom prst="rect">
+              <a:avLst/>
+            </a:prstGeom>
+          </p:spPr>
+          <p:style>
+            <a:lnRef idx="0">
+              <a:scrgbClr r="0" g="0" b="0"/>
+            </a:lnRef>
+            <a:fillRef idx="0">
+              <a:scrgbClr r="0" g="0" b="0"/>
+            </a:fillRef>
+            <a:effectRef idx="0">
+              <a:scrgbClr r="0" g="0" b="0"/>
+            </a:effectRef>
+            <a:fontRef idx="minor">
+              <a:schemeClr val="dk1"/>
+            </a:fontRef>
+          </p:style>
+          <p:txBody>
+            <a:bodyPr spcFirstLastPara="0" vert="horz" wrap="square" lIns="49530" tIns="144000" rIns="49530" bIns="49530" numCol="1" spcCol="1270" anchor="t" anchorCtr="0">
+              <a:noAutofit/>
+            </a:bodyPr>
+            <a:lstStyle/>
+            <a:p>
+              <a:pPr marL="0" lvl="0" indent="0" algn="ctr" defTabSz="577850">
+                <a:lnSpc>
+                  <a:spcPct val="90000"/>
+                </a:lnSpc>
+                <a:spcBef>
+                  <a:spcPct val="0"/>
+                </a:spcBef>
+                <a:spcAft>
+                  <a:spcPct val="35000"/>
+                </a:spcAft>
+                <a:buNone/>
+              </a:pPr>
+              <a:r>
+                <a:rPr lang="de-DE" sz="1300" kern="1200" dirty="0"/>
+                <a:t>EM </a:t>
+              </a:r>
+              <a:r>
+                <a:rPr lang="de-DE" sz="1300" kern="1200" dirty="0" err="1"/>
+                <a:t>Ctl</a:t>
+              </a:r>
+              <a:br>
+                <a:rPr lang="de-DE" sz="1300" kern="1200" dirty="0"/>
+              </a:br>
+              <a:endParaRPr lang="de-DE" sz="1300" kern="1200" dirty="0"/>
+            </a:p>
+          </p:txBody>
+        </p:sp>
+      </p:grpSp>
+      <p:grpSp>
+        <p:nvGrpSpPr>
+          <p:cNvPr id="70" name="Gruppieren 69">
+            <a:extLst>
+              <a:ext uri="{FF2B5EF4-FFF2-40B4-BE49-F238E27FC236}">
+                <a16:creationId xmlns:a16="http://schemas.microsoft.com/office/drawing/2014/main" id="{07EB6053-85F4-4BF3-8379-322EF273A5F5}"/>
+              </a:ext>
+            </a:extLst>
+          </p:cNvPr>
+          <p:cNvGrpSpPr/>
+          <p:nvPr/>
+        </p:nvGrpSpPr>
+        <p:grpSpPr>
+          <a:xfrm>
+            <a:off x="4413006" y="1545984"/>
+            <a:ext cx="742805" cy="432048"/>
+            <a:chOff x="6061582" y="1115684"/>
+            <a:chExt cx="1081585" cy="648951"/>
+          </a:xfrm>
+        </p:grpSpPr>
+        <p:sp>
+          <p:nvSpPr>
+            <p:cNvPr id="71" name="Rechteck 70">
+              <a:extLst>
+                <a:ext uri="{FF2B5EF4-FFF2-40B4-BE49-F238E27FC236}">
+                  <a16:creationId xmlns:a16="http://schemas.microsoft.com/office/drawing/2014/main" id="{F3291B51-4F1D-4C3C-B0A8-F163B4E0D3A5}"/>
+                </a:ext>
+              </a:extLst>
+            </p:cNvPr>
+            <p:cNvSpPr/>
+            <p:nvPr/>
+          </p:nvSpPr>
+          <p:spPr>
+            <a:xfrm>
+              <a:off x="6061582" y="1115684"/>
+              <a:ext cx="1081585" cy="648951"/>
+            </a:xfrm>
+            <a:prstGeom prst="rect">
+              <a:avLst/>
+            </a:prstGeom>
+            <a:solidFill>
+              <a:schemeClr val="accent1">
+                <a:lumMod val="40000"/>
+                <a:lumOff val="60000"/>
+              </a:schemeClr>
+            </a:solidFill>
+            <a:ln w="12700">
+              <a:solidFill>
+                <a:schemeClr val="accent1"/>
+              </a:solidFill>
+            </a:ln>
+          </p:spPr>
+          <p:style>
+            <a:lnRef idx="2">
+              <a:schemeClr val="accent1"/>
+            </a:lnRef>
+            <a:fillRef idx="1">
+              <a:schemeClr val="lt1"/>
+            </a:fillRef>
+            <a:effectRef idx="0">
+              <a:schemeClr val="accent1"/>
+            </a:effectRef>
+            <a:fontRef idx="minor">
+              <a:schemeClr val="dk1"/>
+            </a:fontRef>
+          </p:style>
+        </p:sp>
+        <p:sp>
+          <p:nvSpPr>
+            <p:cNvPr id="72" name="Textfeld 71">
+              <a:extLst>
+                <a:ext uri="{FF2B5EF4-FFF2-40B4-BE49-F238E27FC236}">
+                  <a16:creationId xmlns:a16="http://schemas.microsoft.com/office/drawing/2014/main" id="{88AB4115-C584-441B-9B6A-2C5AC3ABC35D}"/>
+                </a:ext>
+              </a:extLst>
+            </p:cNvPr>
+            <p:cNvSpPr txBox="1"/>
+            <p:nvPr/>
+          </p:nvSpPr>
+          <p:spPr>
+            <a:xfrm>
+              <a:off x="6061582" y="1115684"/>
+              <a:ext cx="1081585" cy="648951"/>
+            </a:xfrm>
+            <a:prstGeom prst="rect">
+              <a:avLst/>
+            </a:prstGeom>
+          </p:spPr>
+          <p:style>
+            <a:lnRef idx="0">
+              <a:scrgbClr r="0" g="0" b="0"/>
+            </a:lnRef>
+            <a:fillRef idx="0">
+              <a:scrgbClr r="0" g="0" b="0"/>
+            </a:fillRef>
+            <a:effectRef idx="0">
+              <a:scrgbClr r="0" g="0" b="0"/>
+            </a:effectRef>
+            <a:fontRef idx="minor">
+              <a:schemeClr val="dk1"/>
+            </a:fontRef>
+          </p:style>
+          <p:txBody>
+            <a:bodyPr spcFirstLastPara="0" vert="horz" wrap="square" lIns="49530" tIns="144000" rIns="49530" bIns="49530" numCol="1" spcCol="1270" anchor="t" anchorCtr="0">
+              <a:noAutofit/>
+            </a:bodyPr>
+            <a:lstStyle/>
+            <a:p>
+              <a:pPr marL="0" lvl="0" indent="0" algn="ctr" defTabSz="577850">
+                <a:lnSpc>
+                  <a:spcPct val="90000"/>
+                </a:lnSpc>
+                <a:spcBef>
+                  <a:spcPct val="0"/>
+                </a:spcBef>
+                <a:spcAft>
+                  <a:spcPct val="35000"/>
+                </a:spcAft>
+                <a:buNone/>
+              </a:pPr>
+              <a:r>
+                <a:rPr lang="de-DE" sz="1300" kern="1200" dirty="0" err="1"/>
+                <a:t>Gearshift</a:t>
+              </a:r>
+              <a:br>
+                <a:rPr lang="de-DE" sz="1300" kern="1200" dirty="0"/>
+              </a:br>
+              <a:endParaRPr lang="de-DE" sz="1300" kern="1200" dirty="0"/>
+            </a:p>
+          </p:txBody>
+        </p:sp>
+      </p:grpSp>
+      <p:cxnSp>
+        <p:nvCxnSpPr>
+          <p:cNvPr id="4" name="Verbinder: gewinkelt 3">
+            <a:extLst>
+              <a:ext uri="{FF2B5EF4-FFF2-40B4-BE49-F238E27FC236}">
+                <a16:creationId xmlns:a16="http://schemas.microsoft.com/office/drawing/2014/main" id="{5AA4B6FA-C3E1-4344-9C9D-258C082E0341}"/>
+              </a:ext>
+            </a:extLst>
+          </p:cNvPr>
+          <p:cNvCxnSpPr>
+            <a:cxnSpLocks/>
+            <a:stCxn id="69" idx="3"/>
+          </p:cNvCxnSpPr>
+          <p:nvPr/>
+        </p:nvCxnSpPr>
+        <p:spPr>
+          <a:xfrm>
+            <a:off x="5158007" y="1258630"/>
+            <a:ext cx="3764356" cy="874222"/>
+          </a:xfrm>
+          <a:prstGeom prst="bentConnector3">
+            <a:avLst>
+              <a:gd name="adj1" fmla="val 100061"/>
+            </a:avLst>
+          </a:prstGeom>
+          <a:ln w="25400">
+            <a:headEnd type="triangle"/>
+            <a:tailEnd type="none"/>
+          </a:ln>
+        </p:spPr>
+        <p:style>
+          <a:lnRef idx="1">
+            <a:schemeClr val="accent1"/>
+          </a:lnRef>
+          <a:fillRef idx="0">
+            <a:schemeClr val="accent1"/>
+          </a:fillRef>
+          <a:effectRef idx="0">
+            <a:schemeClr val="accent1"/>
+          </a:effectRef>
+          <a:fontRef idx="minor">
+            <a:schemeClr val="tx1"/>
+          </a:fontRef>
+        </p:style>
+      </p:cxnSp>
+      <p:cxnSp>
+        <p:nvCxnSpPr>
+          <p:cNvPr id="75" name="Verbinder: gewinkelt 74">
+            <a:extLst>
+              <a:ext uri="{FF2B5EF4-FFF2-40B4-BE49-F238E27FC236}">
+                <a16:creationId xmlns:a16="http://schemas.microsoft.com/office/drawing/2014/main" id="{FC750158-7E87-40DD-9841-65E9F60348CC}"/>
+              </a:ext>
+            </a:extLst>
+          </p:cNvPr>
+          <p:cNvCxnSpPr>
+            <a:stCxn id="72" idx="3"/>
+          </p:cNvCxnSpPr>
+          <p:nvPr/>
+        </p:nvCxnSpPr>
+        <p:spPr>
+          <a:xfrm>
+            <a:off x="5155811" y="1762008"/>
+            <a:ext cx="2669220" cy="370844"/>
+          </a:xfrm>
+          <a:prstGeom prst="bentConnector3">
+            <a:avLst>
+              <a:gd name="adj1" fmla="val 100045"/>
+            </a:avLst>
+          </a:prstGeom>
+          <a:ln w="25400">
+            <a:headEnd type="triangle"/>
+            <a:tailEnd type="none"/>
+          </a:ln>
+        </p:spPr>
+        <p:style>
+          <a:lnRef idx="1">
+            <a:schemeClr val="accent1"/>
+          </a:lnRef>
+          <a:fillRef idx="0">
+            <a:schemeClr val="accent1"/>
+          </a:fillRef>
+          <a:effectRef idx="0">
+            <a:schemeClr val="accent1"/>
+          </a:effectRef>
+          <a:fontRef idx="minor">
+            <a:schemeClr val="tx1"/>
+          </a:fontRef>
+        </p:style>
+      </p:cxnSp>
+      <p:sp>
+        <p:nvSpPr>
+          <p:cNvPr id="77" name="Freihandform 16">
+            <a:extLst>
+              <a:ext uri="{FF2B5EF4-FFF2-40B4-BE49-F238E27FC236}">
+                <a16:creationId xmlns:a16="http://schemas.microsoft.com/office/drawing/2014/main" id="{83FB1006-20A6-445A-A12A-CC545A197504}"/>
+              </a:ext>
+            </a:extLst>
+          </p:cNvPr>
+          <p:cNvSpPr/>
+          <p:nvPr/>
+        </p:nvSpPr>
+        <p:spPr>
+          <a:xfrm rot="5400000">
+            <a:off x="4603337" y="2891907"/>
+            <a:ext cx="362138" cy="268233"/>
+          </a:xfrm>
+          <a:custGeom>
+            <a:avLst/>
+            <a:gdLst>
+              <a:gd name="connsiteX0" fmla="*/ 0 w 229296"/>
+              <a:gd name="connsiteY0" fmla="*/ 53647 h 268233"/>
+              <a:gd name="connsiteX1" fmla="*/ 114648 w 229296"/>
+              <a:gd name="connsiteY1" fmla="*/ 53647 h 268233"/>
+              <a:gd name="connsiteX2" fmla="*/ 114648 w 229296"/>
+              <a:gd name="connsiteY2" fmla="*/ 0 h 268233"/>
+              <a:gd name="connsiteX3" fmla="*/ 229296 w 229296"/>
+              <a:gd name="connsiteY3" fmla="*/ 134117 h 268233"/>
+              <a:gd name="connsiteX4" fmla="*/ 114648 w 229296"/>
+              <a:gd name="connsiteY4" fmla="*/ 268233 h 268233"/>
+              <a:gd name="connsiteX5" fmla="*/ 114648 w 229296"/>
+              <a:gd name="connsiteY5" fmla="*/ 214586 h 268233"/>
+              <a:gd name="connsiteX6" fmla="*/ 0 w 229296"/>
+              <a:gd name="connsiteY6" fmla="*/ 214586 h 268233"/>
+              <a:gd name="connsiteX7" fmla="*/ 0 w 229296"/>
+              <a:gd name="connsiteY7" fmla="*/ 53647 h 268233"/>
+            </a:gdLst>
+            <a:ahLst/>
+            <a:cxnLst>
+              <a:cxn ang="0">
+                <a:pos x="connsiteX0" y="connsiteY0"/>
+              </a:cxn>
+              <a:cxn ang="0">
+                <a:pos x="connsiteX1" y="connsiteY1"/>
+              </a:cxn>
+              <a:cxn ang="0">
+                <a:pos x="connsiteX2" y="connsiteY2"/>
+              </a:cxn>
+              <a:cxn ang="0">
+                <a:pos x="connsiteX3" y="connsiteY3"/>
+              </a:cxn>
+              <a:cxn ang="0">
+                <a:pos x="connsiteX4" y="connsiteY4"/>
+              </a:cxn>
+              <a:cxn ang="0">
+                <a:pos x="connsiteX5" y="connsiteY5"/>
+              </a:cxn>
+              <a:cxn ang="0">
+                <a:pos x="connsiteX6" y="connsiteY6"/>
+              </a:cxn>
+              <a:cxn ang="0">
+                <a:pos x="connsiteX7" y="connsiteY7"/>
+              </a:cxn>
+            </a:cxnLst>
+            <a:rect l="l" t="t" r="r" b="b"/>
+            <a:pathLst>
+              <a:path w="229296" h="268233">
+                <a:moveTo>
+                  <a:pt x="0" y="53647"/>
+                </a:moveTo>
+                <a:lnTo>
+                  <a:pt x="114648" y="53647"/>
+                </a:lnTo>
+                <a:lnTo>
+                  <a:pt x="114648" y="0"/>
+                </a:lnTo>
+                <a:lnTo>
+                  <a:pt x="229296" y="134117"/>
+                </a:lnTo>
+                <a:lnTo>
+                  <a:pt x="114648" y="268233"/>
+                </a:lnTo>
+                <a:lnTo>
+                  <a:pt x="114648" y="214586"/>
+                </a:lnTo>
+                <a:lnTo>
+                  <a:pt x="0" y="214586"/>
+                </a:lnTo>
+                <a:lnTo>
+                  <a:pt x="0" y="53647"/>
+                </a:lnTo>
+                <a:close/>
+              </a:path>
+            </a:pathLst>
+          </a:custGeom>
+          <a:solidFill>
+            <a:srgbClr val="FF0000"/>
+          </a:solidFill>
+          <a:ln w="19050">
+            <a:noFill/>
+          </a:ln>
+        </p:spPr>
+        <p:style>
+          <a:lnRef idx="0">
+            <a:schemeClr val="accent1">
+              <a:tint val="60000"/>
+              <a:hueOff val="0"/>
+              <a:satOff val="0"/>
+              <a:lumOff val="0"/>
+              <a:alphaOff val="0"/>
+            </a:schemeClr>
+          </a:lnRef>
+          <a:fillRef idx="1">
+            <a:schemeClr val="accent1">
+              <a:tint val="60000"/>
+              <a:hueOff val="0"/>
+              <a:satOff val="0"/>
+              <a:lumOff val="0"/>
+              <a:alphaOff val="0"/>
+            </a:schemeClr>
+          </a:fillRef>
+          <a:effectRef idx="0">
+            <a:schemeClr val="accent1">
+              <a:tint val="60000"/>
+              <a:hueOff val="0"/>
+              <a:satOff val="0"/>
+              <a:lumOff val="0"/>
+              <a:alphaOff val="0"/>
+            </a:schemeClr>
+          </a:effectRef>
+          <a:fontRef idx="minor">
+            <a:schemeClr val="lt1"/>
+          </a:fontRef>
+        </p:style>
+        <p:txBody>
+          <a:bodyPr spcFirstLastPara="0" vert="horz" wrap="square" lIns="0" tIns="53647" rIns="68789" bIns="53647" numCol="1" spcCol="1270" anchor="ctr" anchorCtr="0">
+            <a:noAutofit/>
+          </a:bodyPr>
+          <a:lstStyle/>
+          <a:p>
+            <a:pPr algn="ctr" defTabSz="488930">
+              <a:lnSpc>
+                <a:spcPct val="90000"/>
+              </a:lnSpc>
+              <a:spcBef>
+                <a:spcPct val="0"/>
+              </a:spcBef>
+              <a:spcAft>
+                <a:spcPct val="35000"/>
+              </a:spcAft>
+            </a:pPr>
+            <a:endParaRPr lang="de-DE" sz="1100"/>
+          </a:p>
+        </p:txBody>
+      </p:sp>
+      <p:pic>
+        <p:nvPicPr>
+          <p:cNvPr id="79" name="Grafik 78">
+            <a:extLst>
+              <a:ext uri="{FF2B5EF4-FFF2-40B4-BE49-F238E27FC236}">
+                <a16:creationId xmlns:a16="http://schemas.microsoft.com/office/drawing/2014/main" id="{0A7B0EA5-8AC3-4BE2-8423-6856F1DF22C6}"/>
+              </a:ext>
+            </a:extLst>
+          </p:cNvPr>
+          <p:cNvPicPr>
+            <a:picLocks noChangeAspect="1"/>
+          </p:cNvPicPr>
+          <p:nvPr/>
+        </p:nvPicPr>
+        <p:blipFill rotWithShape="1">
+          <a:blip r:embed="rId2"/>
+          <a:srcRect l="495" r="-1"/>
+          <a:stretch/>
+        </p:blipFill>
+        <p:spPr>
+          <a:xfrm>
+            <a:off x="4608575" y="4540298"/>
+            <a:ext cx="3674709" cy="1090850"/>
+          </a:xfrm>
+          <a:prstGeom prst="rect">
+            <a:avLst/>
+          </a:prstGeom>
+        </p:spPr>
+      </p:pic>
+      <p:sp>
+        <p:nvSpPr>
+          <p:cNvPr id="3" name="Pfeil: nach rechts 2">
+            <a:extLst>
+              <a:ext uri="{FF2B5EF4-FFF2-40B4-BE49-F238E27FC236}">
+                <a16:creationId xmlns:a16="http://schemas.microsoft.com/office/drawing/2014/main" id="{EFFBDB12-C737-4097-928B-B74CB4F4A324}"/>
+              </a:ext>
+            </a:extLst>
+          </p:cNvPr>
+          <p:cNvSpPr/>
+          <p:nvPr/>
+        </p:nvSpPr>
+        <p:spPr>
+          <a:xfrm rot="5400000">
+            <a:off x="4650576" y="3985167"/>
+            <a:ext cx="288032" cy="147024"/>
+          </a:xfrm>
+          <a:prstGeom prst="rightArrow">
+            <a:avLst/>
+          </a:prstGeom>
+        </p:spPr>
+        <p:style>
+          <a:lnRef idx="2">
+            <a:schemeClr val="accent1">
+              <a:shade val="50000"/>
+            </a:schemeClr>
+          </a:lnRef>
+          <a:fillRef idx="1">
+            <a:schemeClr val="accent1"/>
+          </a:fillRef>
+          <a:effectRef idx="0">
+            <a:schemeClr val="accent1"/>
+          </a:effectRef>
+          <a:fontRef idx="minor">
+            <a:schemeClr val="lt1"/>
+          </a:fontRef>
+        </p:style>
+        <p:txBody>
+          <a:bodyPr rtlCol="0" anchor="ctr"/>
+          <a:lstStyle/>
+          <a:p>
+            <a:pPr algn="ctr"/>
+            <a:endParaRPr lang="de-AT"/>
+          </a:p>
+        </p:txBody>
+      </p:sp>
+    </p:spTree>
+    <p:extLst>
+      <p:ext uri="{BB962C8B-B14F-4D97-AF65-F5344CB8AC3E}">
+        <p14:creationId xmlns:p14="http://schemas.microsoft.com/office/powerpoint/2010/main" val="236500428"/>
+      </p:ext>
+    </p:extLst>
+  </p:cSld>
+  <p:clrMapOvr>
+    <a:masterClrMapping/>
+  </p:clrMapOvr>
+</p:sld>
+</file>
+
+<file path=ppt/slides/slide2.xml><?xml version="1.0" encoding="utf-8"?>
+<p:sld xmlns:a="http://schemas.openxmlformats.org/drawingml/2006/main" xmlns:r="http://schemas.openxmlformats.org/officeDocument/2006/relationships" xmlns:p="http://schemas.openxmlformats.org/presentationml/2006/main">
+  <p:cSld>
+    <p:spTree>
+      <p:nvGrpSpPr>
+        <p:cNvPr id="1" name=""/>
+        <p:cNvGrpSpPr/>
+        <p:nvPr/>
+      </p:nvGrpSpPr>
+      <p:grpSpPr>
+        <a:xfrm>
+          <a:off x="0" y="0"/>
+          <a:ext cx="0" cy="0"/>
+          <a:chOff x="0" y="0"/>
+          <a:chExt cx="0" cy="0"/>
+        </a:xfrm>
+      </p:grpSpPr>
+      <p:pic>
+        <p:nvPicPr>
+          <p:cNvPr id="1026" name="Picture 2"/>
+          <p:cNvPicPr>
+            <a:picLocks noChangeAspect="1" noChangeArrowheads="1"/>
+          </p:cNvPicPr>
+          <p:nvPr/>
+        </p:nvPicPr>
+        <p:blipFill>
+          <a:blip r:embed="rId2">
+            <a:extLst>
+              <a:ext uri="{28A0092B-C50C-407E-A947-70E740481C1C}">
+                <a14:useLocalDpi xmlns:a14="http://schemas.microsoft.com/office/drawing/2010/main" val="0"/>
+              </a:ext>
+            </a:extLst>
+          </a:blip>
+          <a:srcRect/>
+          <a:stretch>
+            <a:fillRect/>
+          </a:stretch>
+        </p:blipFill>
+        <p:spPr bwMode="auto">
+          <a:xfrm>
+            <a:off x="4013526" y="1145707"/>
+            <a:ext cx="5057775" cy="3419475"/>
+          </a:xfrm>
+          <a:prstGeom prst="rect">
+            <a:avLst/>
+          </a:prstGeom>
+          <a:noFill/>
+          <a:ln>
+            <a:noFill/>
+          </a:ln>
+          <a:extLst>
+            <a:ext uri="{909E8E84-426E-40DD-AFC4-6F175D3DCCD1}">
+              <a14:hiddenFill xmlns:a14="http://schemas.microsoft.com/office/drawing/2010/main">
+                <a:solidFill>
+                  <a:schemeClr val="accent1"/>
+                </a:solidFill>
+              </a14:hiddenFill>
+            </a:ext>
+            <a:ext uri="{91240B29-F687-4F45-9708-019B960494DF}">
+              <a14:hiddenLine xmlns:a14="http://schemas.microsoft.com/office/drawing/2010/main" w="9525">
+                <a:solidFill>
+                  <a:schemeClr val="tx1"/>
+                </a:solidFill>
+                <a:miter lim="800000"/>
+                <a:headEnd/>
+                <a:tailEnd/>
+              </a14:hiddenLine>
+            </a:ext>
+          </a:extLst>
+        </p:spPr>
+      </p:pic>
+    </p:spTree>
+    <p:extLst>
+      <p:ext uri="{BB962C8B-B14F-4D97-AF65-F5344CB8AC3E}">
+        <p14:creationId xmlns:p14="http://schemas.microsoft.com/office/powerpoint/2010/main" val="1728976825"/>
+      </p:ext>
+    </p:extLst>
+  </p:cSld>
+  <p:clrMapOvr>
+    <a:masterClrMapping/>
+  </p:clrMapOvr>
+</p:sld>
+</file>
+
+<file path=ppt/slides/slide20.xml><?xml version="1.0" encoding="utf-8"?>
+<p:sld xmlns:a="http://schemas.openxmlformats.org/drawingml/2006/main" xmlns:r="http://schemas.openxmlformats.org/officeDocument/2006/relationships" xmlns:p="http://schemas.openxmlformats.org/presentationml/2006/main">
+  <p:cSld>
+    <p:spTree>
+      <p:nvGrpSpPr>
+        <p:cNvPr id="1" name=""/>
+        <p:cNvGrpSpPr/>
+        <p:nvPr/>
+      </p:nvGrpSpPr>
+      <p:grpSpPr>
+        <a:xfrm>
+          <a:off x="0" y="0"/>
+          <a:ext cx="0" cy="0"/>
+          <a:chOff x="0" y="0"/>
+          <a:chExt cx="0" cy="0"/>
+        </a:xfrm>
+      </p:grpSpPr>
+      <p:sp>
+        <p:nvSpPr>
+          <p:cNvPr id="2" name="Titel 1">
+            <a:extLst>
+              <a:ext uri="{FF2B5EF4-FFF2-40B4-BE49-F238E27FC236}">
+                <a16:creationId xmlns:a16="http://schemas.microsoft.com/office/drawing/2014/main" id="{1D977244-858E-4558-A7A7-87712C44C7C0}"/>
+              </a:ext>
+            </a:extLst>
+          </p:cNvPr>
+          <p:cNvSpPr>
+            <a:spLocks noGrp="1"/>
+          </p:cNvSpPr>
+          <p:nvPr>
+            <p:ph type="title"/>
+          </p:nvPr>
+        </p:nvSpPr>
+        <p:spPr/>
+        <p:txBody>
+          <a:bodyPr/>
+          <a:lstStyle/>
+          <a:p>
+            <a:r>
+              <a:rPr lang="en-US" dirty="0"/>
+              <a:t>Hybrid Strategy</a:t>
+            </a:r>
+            <a:endParaRPr lang="de-AT" dirty="0"/>
+          </a:p>
+        </p:txBody>
+      </p:sp>
+      <p:sp>
+        <p:nvSpPr>
+          <p:cNvPr id="3" name="Inhaltsplatzhalter 2">
+            <a:extLst>
+              <a:ext uri="{FF2B5EF4-FFF2-40B4-BE49-F238E27FC236}">
+                <a16:creationId xmlns:a16="http://schemas.microsoft.com/office/drawing/2014/main" id="{5A78E253-CE4E-4D27-8AFD-24CBFBB0E001}"/>
+              </a:ext>
+            </a:extLst>
+          </p:cNvPr>
+          <p:cNvSpPr>
+            <a:spLocks noGrp="1"/>
+          </p:cNvSpPr>
+          <p:nvPr>
+            <p:ph idx="1"/>
+          </p:nvPr>
+        </p:nvSpPr>
+        <p:spPr/>
+        <p:txBody>
+          <a:bodyPr/>
+          <a:lstStyle/>
+          <a:p>
+            <a:pPr marL="514350" indent="-514350">
+              <a:buFont typeface="+mj-lt"/>
+              <a:buAutoNum type="arabicPeriod"/>
+            </a:pPr>
+            <a:r>
+              <a:rPr lang="en-US" dirty="0" err="1"/>
+              <a:t>DryRun</a:t>
+            </a:r>
+            <a:r>
+              <a:rPr lang="en-US" dirty="0"/>
+              <a:t> Request with EM Off</a:t>
+            </a:r>
+          </a:p>
+          <a:p>
+            <a:pPr marL="914383" lvl="1" indent="-514350"/>
+            <a:r>
+              <a:rPr lang="en-US" dirty="0"/>
+              <a:t>Get ICE operating point, get EM max drive and max recuperation torque</a:t>
+            </a:r>
+          </a:p>
+          <a:p>
+            <a:pPr marL="514350" indent="-514350">
+              <a:buFont typeface="+mj-lt"/>
+              <a:buAutoNum type="arabicPeriod"/>
+            </a:pPr>
+            <a:r>
+              <a:rPr lang="en-US" dirty="0"/>
+              <a:t>Iterate EM torque (u)</a:t>
+            </a:r>
+          </a:p>
+          <a:p>
+            <a:pPr marL="914383" lvl="1" indent="-514350"/>
+            <a:r>
+              <a:rPr lang="en-US" dirty="0"/>
+              <a:t>Try different gears (similar to gearshift strategy)</a:t>
+            </a:r>
+          </a:p>
+          <a:p>
+            <a:pPr marL="514350" indent="-514350">
+              <a:buFont typeface="+mj-lt"/>
+              <a:buAutoNum type="arabicPeriod"/>
+            </a:pPr>
+            <a:r>
+              <a:rPr lang="en-US" dirty="0"/>
+              <a:t>Select best solution (cost function)</a:t>
+            </a:r>
+          </a:p>
+          <a:p>
+            <a:pPr marL="914383" lvl="1" indent="-514350"/>
+            <a:endParaRPr lang="de-AT" dirty="0"/>
+          </a:p>
+        </p:txBody>
+      </p:sp>
+    </p:spTree>
+    <p:extLst>
+      <p:ext uri="{BB962C8B-B14F-4D97-AF65-F5344CB8AC3E}">
+        <p14:creationId xmlns:p14="http://schemas.microsoft.com/office/powerpoint/2010/main" val="3380653145"/>
+      </p:ext>
+    </p:extLst>
+  </p:cSld>
+  <p:clrMapOvr>
+    <a:masterClrMapping/>
+  </p:clrMapOvr>
+</p:sld>
+</file>
+
+<file path=ppt/slides/slide21.xml><?xml version="1.0" encoding="utf-8"?>
 <p:sld xmlns:a="http://schemas.openxmlformats.org/drawingml/2006/main" xmlns:r="http://schemas.openxmlformats.org/officeDocument/2006/relationships" xmlns:p="http://schemas.openxmlformats.org/presentationml/2006/main">
   <p:cSld>
     <p:spTree>
@@ -18339,7 +22835,6 @@
               <a:rPr lang="de-AT" sz="1108" b="1" dirty="0"/>
               <a:t>.</a:t>
             </a:r>
-            <a:endParaRPr lang="de-AT" sz="1108" b="1" dirty="0"/>
           </a:p>
         </p:txBody>
       </p:sp>
@@ -18353,109 +22848,10 @@
   <p:clrMapOvr>
     <a:masterClrMapping/>
   </p:clrMapOvr>
-  <mc:AlternateContent xmlns:mc="http://schemas.openxmlformats.org/markup-compatibility/2006" xmlns:p14="http://schemas.microsoft.com/office/powerpoint/2010/main">
-    <mc:Choice Requires="p14">
-      <p:transition spd="slow" p14:dur="2000"/>
-    </mc:Choice>
-    <mc:Fallback xmlns="">
-      <p:transition spd="slow"/>
-    </mc:Fallback>
-  </mc:AlternateContent>
-  <p:timing>
-    <p:tnLst>
-      <p:par>
-        <p:cTn id="1" dur="indefinite" restart="never" nodeType="tmRoot"/>
-      </p:par>
-    </p:tnLst>
-  </p:timing>
 </p:sld>
 </file>
 
-<file path=ppt/slides/slide2.xml><?xml version="1.0" encoding="utf-8"?>
-<p:sld xmlns:a="http://schemas.openxmlformats.org/drawingml/2006/main" xmlns:r="http://schemas.openxmlformats.org/officeDocument/2006/relationships" xmlns:p="http://schemas.openxmlformats.org/presentationml/2006/main">
-  <p:cSld>
-    <p:spTree>
-      <p:nvGrpSpPr>
-        <p:cNvPr id="1" name=""/>
-        <p:cNvGrpSpPr/>
-        <p:nvPr/>
-      </p:nvGrpSpPr>
-      <p:grpSpPr>
-        <a:xfrm>
-          <a:off x="0" y="0"/>
-          <a:ext cx="0" cy="0"/>
-          <a:chOff x="0" y="0"/>
-          <a:chExt cx="0" cy="0"/>
-        </a:xfrm>
-      </p:grpSpPr>
-      <p:pic>
-        <p:nvPicPr>
-          <p:cNvPr id="1026" name="Picture 2"/>
-          <p:cNvPicPr>
-            <a:picLocks noChangeAspect="1" noChangeArrowheads="1"/>
-          </p:cNvPicPr>
-          <p:nvPr/>
-        </p:nvPicPr>
-        <p:blipFill>
-          <a:blip r:embed="rId2">
-            <a:extLst>
-              <a:ext uri="{28A0092B-C50C-407E-A947-70E740481C1C}">
-                <a14:useLocalDpi xmlns:a14="http://schemas.microsoft.com/office/drawing/2010/main" val="0"/>
-              </a:ext>
-            </a:extLst>
-          </a:blip>
-          <a:srcRect/>
-          <a:stretch>
-            <a:fillRect/>
-          </a:stretch>
-        </p:blipFill>
-        <p:spPr bwMode="auto">
-          <a:xfrm>
-            <a:off x="4013526" y="1145707"/>
-            <a:ext cx="5057775" cy="3419475"/>
-          </a:xfrm>
-          <a:prstGeom prst="rect">
-            <a:avLst/>
-          </a:prstGeom>
-          <a:noFill/>
-          <a:ln>
-            <a:noFill/>
-          </a:ln>
-          <a:extLst>
-            <a:ext uri="{909E8E84-426E-40DD-AFC4-6F175D3DCCD1}">
-              <a14:hiddenFill xmlns:a14="http://schemas.microsoft.com/office/drawing/2010/main">
-                <a:solidFill>
-                  <a:schemeClr val="accent1"/>
-                </a:solidFill>
-              </a14:hiddenFill>
-            </a:ext>
-            <a:ext uri="{91240B29-F687-4F45-9708-019B960494DF}">
-              <a14:hiddenLine xmlns:a14="http://schemas.microsoft.com/office/drawing/2010/main" w="9525">
-                <a:solidFill>
-                  <a:schemeClr val="tx1"/>
-                </a:solidFill>
-                <a:miter lim="800000"/>
-                <a:headEnd/>
-                <a:tailEnd/>
-              </a14:hiddenLine>
-            </a:ext>
-          </a:extLst>
-        </p:spPr>
-      </p:pic>
-    </p:spTree>
-    <p:extLst>
-      <p:ext uri="{BB962C8B-B14F-4D97-AF65-F5344CB8AC3E}">
-        <p14:creationId xmlns:p14="http://schemas.microsoft.com/office/powerpoint/2010/main" val="1728976825"/>
-      </p:ext>
-    </p:extLst>
-  </p:cSld>
-  <p:clrMapOvr>
-    <a:masterClrMapping/>
-  </p:clrMapOvr>
-</p:sld>
-</file>
-
-<file path=ppt/slides/slide20.xml><?xml version="1.0" encoding="utf-8"?>
+<file path=ppt/slides/slide22.xml><?xml version="1.0" encoding="utf-8"?>
 <p:sld xmlns:a="http://schemas.openxmlformats.org/drawingml/2006/main" xmlns:r="http://schemas.openxmlformats.org/officeDocument/2006/relationships" xmlns:p="http://schemas.openxmlformats.org/presentationml/2006/main">
   <p:cSld>
     <p:spTree>
@@ -19466,7 +23862,6 @@
               <a:rPr lang="de-AT" sz="1108" b="1" dirty="0"/>
               <a:t>.</a:t>
             </a:r>
-            <a:endParaRPr lang="de-AT" sz="1108" b="1" dirty="0"/>
           </a:p>
         </p:txBody>
       </p:sp>
@@ -19681,17 +24076,10 @@
   <p:clrMapOvr>
     <a:masterClrMapping/>
   </p:clrMapOvr>
-  <p:timing>
-    <p:tnLst>
-      <p:par>
-        <p:cTn id="1" dur="indefinite" restart="never" nodeType="tmRoot"/>
-      </p:par>
-    </p:tnLst>
-  </p:timing>
 </p:sld>
 </file>
 
-<file path=ppt/slides/slide21.xml><?xml version="1.0" encoding="utf-8"?>
+<file path=ppt/slides/slide23.xml><?xml version="1.0" encoding="utf-8"?>
 <p:sld xmlns:a="http://schemas.openxmlformats.org/drawingml/2006/main" xmlns:r="http://schemas.openxmlformats.org/officeDocument/2006/relationships" xmlns:p="http://schemas.openxmlformats.org/presentationml/2006/main">
   <p:cSld>
     <p:spTree>
@@ -21932,7 +26320,6 @@
               <a:rPr lang="de-AT" sz="1108" b="1" dirty="0"/>
               <a:t>.</a:t>
             </a:r>
-            <a:endParaRPr lang="de-AT" sz="1108" b="1" dirty="0"/>
           </a:p>
         </p:txBody>
       </p:sp>
@@ -21946,17 +26333,10 @@
   <p:clrMapOvr>
     <a:masterClrMapping/>
   </p:clrMapOvr>
-  <p:timing>
-    <p:tnLst>
-      <p:par>
-        <p:cTn id="1" dur="indefinite" restart="never" nodeType="tmRoot"/>
-      </p:par>
-    </p:tnLst>
-  </p:timing>
 </p:sld>
 </file>
 
-<file path=ppt/slides/slide22.xml><?xml version="1.0" encoding="utf-8"?>
+<file path=ppt/slides/slide24.xml><?xml version="1.0" encoding="utf-8"?>
 <p:sld xmlns:a="http://schemas.openxmlformats.org/drawingml/2006/main" xmlns:r="http://schemas.openxmlformats.org/officeDocument/2006/relationships" xmlns:p="http://schemas.openxmlformats.org/presentationml/2006/main">
   <p:cSld>
     <p:spTree>
@@ -24166,7 +28546,6 @@
               <a:rPr lang="de-AT" sz="1108" b="1" dirty="0"/>
               <a:t>.</a:t>
             </a:r>
-            <a:endParaRPr lang="de-AT" sz="1108" b="1" dirty="0"/>
           </a:p>
         </p:txBody>
       </p:sp>
@@ -24241,11 +28620,7 @@
           <a:p>
             <a:r>
               <a:rPr lang="de-AT" sz="1108" b="1" dirty="0" err="1"/>
-              <a:t>t</a:t>
-            </a:r>
-            <a:r>
-              <a:rPr lang="de-AT" sz="1108" b="1" dirty="0" err="1"/>
-              <a:t>orque</a:t>
+              <a:t>torque</a:t>
             </a:r>
             <a:r>
               <a:rPr lang="de-AT" sz="1108" b="1" dirty="0"/>
@@ -24259,7 +28634,6 @@
               <a:rPr lang="de-AT" sz="1108" b="1" dirty="0"/>
               <a:t>.</a:t>
             </a:r>
-            <a:endParaRPr lang="de-AT" sz="1108" b="1" dirty="0"/>
           </a:p>
         </p:txBody>
       </p:sp>
@@ -24273,17 +28647,10 @@
   <p:clrMapOvr>
     <a:masterClrMapping/>
   </p:clrMapOvr>
-  <p:timing>
-    <p:tnLst>
-      <p:par>
-        <p:cTn id="1" dur="indefinite" restart="never" nodeType="tmRoot"/>
-      </p:par>
-    </p:tnLst>
-  </p:timing>
 </p:sld>
 </file>
 
-<file path=ppt/slides/slide23.xml><?xml version="1.0" encoding="utf-8"?>
+<file path=ppt/slides/slide25.xml><?xml version="1.0" encoding="utf-8"?>
 <p:sld xmlns:a="http://schemas.openxmlformats.org/drawingml/2006/main" xmlns:r="http://schemas.openxmlformats.org/officeDocument/2006/relationships" xmlns:p="http://schemas.openxmlformats.org/presentationml/2006/main">
   <p:cSld>
     <p:spTree>
@@ -26493,7 +30860,6 @@
               <a:rPr lang="de-AT" sz="1108" b="1" dirty="0"/>
               <a:t>.</a:t>
             </a:r>
-            <a:endParaRPr lang="de-AT" sz="1108" b="1" dirty="0"/>
           </a:p>
         </p:txBody>
       </p:sp>
@@ -26568,11 +30934,7 @@
           <a:p>
             <a:r>
               <a:rPr lang="de-AT" sz="1108" b="1" dirty="0" err="1"/>
-              <a:t>t</a:t>
-            </a:r>
-            <a:r>
-              <a:rPr lang="de-AT" sz="1108" b="1" dirty="0" err="1"/>
-              <a:t>orque</a:t>
+              <a:t>torque</a:t>
             </a:r>
             <a:r>
               <a:rPr lang="de-AT" sz="1108" b="1" dirty="0"/>
@@ -26586,7 +30948,6 @@
               <a:rPr lang="de-AT" sz="1108" b="1" dirty="0"/>
               <a:t>.</a:t>
             </a:r>
-            <a:endParaRPr lang="de-AT" sz="1108" b="1" dirty="0"/>
           </a:p>
         </p:txBody>
       </p:sp>
@@ -26600,13 +30961,6 @@
   <p:clrMapOvr>
     <a:masterClrMapping/>
   </p:clrMapOvr>
-  <p:timing>
-    <p:tnLst>
-      <p:par>
-        <p:cTn id="1" dur="indefinite" restart="never" nodeType="tmRoot"/>
-      </p:par>
-    </p:tnLst>
-  </p:timing>
 </p:sld>
 </file>
 
@@ -27125,8 +31479,8 @@
           <a:chExt cx="0" cy="0"/>
         </a:xfrm>
       </p:grpSpPr>
-      <mc:AlternateContent xmlns:mc="http://schemas.openxmlformats.org/markup-compatibility/2006">
-        <mc:Choice xmlns:a14="http://schemas.microsoft.com/office/drawing/2010/main" Requires="a14">
+      <mc:AlternateContent xmlns:mc="http://schemas.openxmlformats.org/markup-compatibility/2006" xmlns:a14="http://schemas.microsoft.com/office/drawing/2010/main">
+        <mc:Choice Requires="a14">
           <p:sp>
             <p:nvSpPr>
               <p:cNvPr id="3" name="Textfeld 2"/>
@@ -27503,7 +31857,7 @@
             </p:txBody>
           </p:sp>
         </mc:Choice>
-        <mc:Fallback>
+        <mc:Fallback xmlns="">
           <p:sp>
             <p:nvSpPr>
               <p:cNvPr id="3" name="Textfeld 2"/>
@@ -27823,8 +32177,8 @@
           </a:extLst>
         </p:spPr>
       </p:pic>
-      <mc:AlternateContent xmlns:mc="http://schemas.openxmlformats.org/markup-compatibility/2006">
-        <mc:Choice xmlns:a14="http://schemas.microsoft.com/office/drawing/2010/main" Requires="a14">
+      <mc:AlternateContent xmlns:mc="http://schemas.openxmlformats.org/markup-compatibility/2006" xmlns:a14="http://schemas.microsoft.com/office/drawing/2010/main">
+        <mc:Choice Requires="a14">
           <p:sp>
             <p:nvSpPr>
               <p:cNvPr id="2" name="Rechteck 1"/>
@@ -27956,7 +32310,7 @@
             </p:txBody>
           </p:sp>
         </mc:Choice>
-        <mc:Fallback>
+        <mc:Fallback xmlns="">
           <p:sp>
             <p:nvSpPr>
               <p:cNvPr id="2" name="Rechteck 1"/>

--- a/Documentation/User Manual Source/material User Manual.pptx
+++ b/Documentation/User Manual Source/material User Manual.pptx
@@ -30,6 +30,7 @@
     <p:sldId id="311" r:id="rId24"/>
     <p:sldId id="312" r:id="rId25"/>
     <p:sldId id="313" r:id="rId26"/>
+    <p:sldId id="316" r:id="rId27"/>
   </p:sldIdLst>
   <p:sldSz cx="13355638" cy="6858000"/>
   <p:notesSz cx="7099300" cy="10234613"/>
@@ -5209,7 +5210,7 @@
           <a:p>
             <a:fld id="{11A2203D-8DA4-4655-BF9E-AA17BDE25312}" type="datetimeFigureOut">
               <a:rPr lang="en-GB" smtClean="0"/>
-              <a:t>26/01/2021</a:t>
+              <a:t>15/06/2022</a:t>
             </a:fld>
             <a:endParaRPr lang="en-GB"/>
           </a:p>
@@ -5379,7 +5380,7 @@
           <a:p>
             <a:fld id="{11A2203D-8DA4-4655-BF9E-AA17BDE25312}" type="datetimeFigureOut">
               <a:rPr lang="en-GB" smtClean="0"/>
-              <a:t>26/01/2021</a:t>
+              <a:t>15/06/2022</a:t>
             </a:fld>
             <a:endParaRPr lang="en-GB"/>
           </a:p>
@@ -5559,7 +5560,7 @@
           <a:p>
             <a:fld id="{11A2203D-8DA4-4655-BF9E-AA17BDE25312}" type="datetimeFigureOut">
               <a:rPr lang="en-GB" smtClean="0"/>
-              <a:t>26/01/2021</a:t>
+              <a:t>15/06/2022</a:t>
             </a:fld>
             <a:endParaRPr lang="en-GB"/>
           </a:p>
@@ -5729,7 +5730,7 @@
           <a:p>
             <a:fld id="{11A2203D-8DA4-4655-BF9E-AA17BDE25312}" type="datetimeFigureOut">
               <a:rPr lang="en-GB" smtClean="0"/>
-              <a:t>26/01/2021</a:t>
+              <a:t>15/06/2022</a:t>
             </a:fld>
             <a:endParaRPr lang="en-GB"/>
           </a:p>
@@ -5975,7 +5976,7 @@
           <a:p>
             <a:fld id="{11A2203D-8DA4-4655-BF9E-AA17BDE25312}" type="datetimeFigureOut">
               <a:rPr lang="en-GB" smtClean="0"/>
-              <a:t>26/01/2021</a:t>
+              <a:t>15/06/2022</a:t>
             </a:fld>
             <a:endParaRPr lang="en-GB"/>
           </a:p>
@@ -6263,7 +6264,7 @@
           <a:p>
             <a:fld id="{11A2203D-8DA4-4655-BF9E-AA17BDE25312}" type="datetimeFigureOut">
               <a:rPr lang="en-GB" smtClean="0"/>
-              <a:t>26/01/2021</a:t>
+              <a:t>15/06/2022</a:t>
             </a:fld>
             <a:endParaRPr lang="en-GB"/>
           </a:p>
@@ -6685,7 +6686,7 @@
           <a:p>
             <a:fld id="{11A2203D-8DA4-4655-BF9E-AA17BDE25312}" type="datetimeFigureOut">
               <a:rPr lang="en-GB" smtClean="0"/>
-              <a:t>26/01/2021</a:t>
+              <a:t>15/06/2022</a:t>
             </a:fld>
             <a:endParaRPr lang="en-GB"/>
           </a:p>
@@ -6803,7 +6804,7 @@
           <a:p>
             <a:fld id="{11A2203D-8DA4-4655-BF9E-AA17BDE25312}" type="datetimeFigureOut">
               <a:rPr lang="en-GB" smtClean="0"/>
-              <a:t>26/01/2021</a:t>
+              <a:t>15/06/2022</a:t>
             </a:fld>
             <a:endParaRPr lang="en-GB"/>
           </a:p>
@@ -6898,7 +6899,7 @@
           <a:p>
             <a:fld id="{11A2203D-8DA4-4655-BF9E-AA17BDE25312}" type="datetimeFigureOut">
               <a:rPr lang="en-GB" smtClean="0"/>
-              <a:t>26/01/2021</a:t>
+              <a:t>15/06/2022</a:t>
             </a:fld>
             <a:endParaRPr lang="en-GB"/>
           </a:p>
@@ -7175,7 +7176,7 @@
           <a:p>
             <a:fld id="{11A2203D-8DA4-4655-BF9E-AA17BDE25312}" type="datetimeFigureOut">
               <a:rPr lang="en-GB" smtClean="0"/>
-              <a:t>26/01/2021</a:t>
+              <a:t>15/06/2022</a:t>
             </a:fld>
             <a:endParaRPr lang="en-GB"/>
           </a:p>
@@ -7428,7 +7429,7 @@
           <a:p>
             <a:fld id="{11A2203D-8DA4-4655-BF9E-AA17BDE25312}" type="datetimeFigureOut">
               <a:rPr lang="en-GB" smtClean="0"/>
-              <a:t>26/01/2021</a:t>
+              <a:t>15/06/2022</a:t>
             </a:fld>
             <a:endParaRPr lang="en-GB"/>
           </a:p>
@@ -7644,7 +7645,7 @@
           <a:p>
             <a:fld id="{11A2203D-8DA4-4655-BF9E-AA17BDE25312}" type="datetimeFigureOut">
               <a:rPr lang="en-GB" smtClean="0"/>
-              <a:t>26/01/2021</a:t>
+              <a:t>15/06/2022</a:t>
             </a:fld>
             <a:endParaRPr lang="en-GB"/>
           </a:p>
@@ -30964,6 +30965,832 @@
 </p:sld>
 </file>
 
+<file path=ppt/slides/slide26.xml><?xml version="1.0" encoding="utf-8"?>
+<p:sld xmlns:a="http://schemas.openxmlformats.org/drawingml/2006/main" xmlns:r="http://schemas.openxmlformats.org/officeDocument/2006/relationships" xmlns:p="http://schemas.openxmlformats.org/presentationml/2006/main">
+  <p:cSld>
+    <p:spTree>
+      <p:nvGrpSpPr>
+        <p:cNvPr id="1" name=""/>
+        <p:cNvGrpSpPr/>
+        <p:nvPr/>
+      </p:nvGrpSpPr>
+      <p:grpSpPr>
+        <a:xfrm>
+          <a:off x="0" y="0"/>
+          <a:ext cx="0" cy="0"/>
+          <a:chOff x="0" y="0"/>
+          <a:chExt cx="0" cy="0"/>
+        </a:xfrm>
+      </p:grpSpPr>
+      <p:sp>
+        <p:nvSpPr>
+          <p:cNvPr id="4" name="Rechteck 3">
+            <a:extLst>
+              <a:ext uri="{FF2B5EF4-FFF2-40B4-BE49-F238E27FC236}">
+                <a16:creationId xmlns:a16="http://schemas.microsoft.com/office/drawing/2014/main" id="{85A11934-CD2B-4C73-9EB9-0392BD588544}"/>
+              </a:ext>
+            </a:extLst>
+          </p:cNvPr>
+          <p:cNvSpPr/>
+          <p:nvPr/>
+        </p:nvSpPr>
+        <p:spPr>
+          <a:xfrm>
+            <a:off x="2890373" y="1844824"/>
+            <a:ext cx="5515638" cy="2160237"/>
+          </a:xfrm>
+          <a:prstGeom prst="rect">
+            <a:avLst/>
+          </a:prstGeom>
+          <a:noFill/>
+          <a:ln w="28575"/>
+        </p:spPr>
+        <p:style>
+          <a:lnRef idx="2">
+            <a:schemeClr val="accent1">
+              <a:shade val="50000"/>
+            </a:schemeClr>
+          </a:lnRef>
+          <a:fillRef idx="1">
+            <a:schemeClr val="accent1"/>
+          </a:fillRef>
+          <a:effectRef idx="0">
+            <a:schemeClr val="accent1"/>
+          </a:effectRef>
+          <a:fontRef idx="minor">
+            <a:schemeClr val="lt1"/>
+          </a:fontRef>
+        </p:style>
+        <p:txBody>
+          <a:bodyPr rtlCol="0" anchor="ctr"/>
+          <a:lstStyle/>
+          <a:p>
+            <a:pPr algn="ctr"/>
+            <a:endParaRPr lang="de-AT"/>
+          </a:p>
+        </p:txBody>
+      </p:sp>
+      <p:sp>
+        <p:nvSpPr>
+          <p:cNvPr id="5" name="Rechteck 4">
+            <a:extLst>
+              <a:ext uri="{FF2B5EF4-FFF2-40B4-BE49-F238E27FC236}">
+                <a16:creationId xmlns:a16="http://schemas.microsoft.com/office/drawing/2014/main" id="{4355C51A-E78D-42C4-82F1-8CF3588D5E57}"/>
+              </a:ext>
+            </a:extLst>
+          </p:cNvPr>
+          <p:cNvSpPr/>
+          <p:nvPr/>
+        </p:nvSpPr>
+        <p:spPr>
+          <a:xfrm>
+            <a:off x="3581475" y="2353072"/>
+            <a:ext cx="1440160" cy="1287760"/>
+          </a:xfrm>
+          <a:prstGeom prst="rect">
+            <a:avLst/>
+          </a:prstGeom>
+          <a:noFill/>
+          <a:ln w="28575"/>
+        </p:spPr>
+        <p:style>
+          <a:lnRef idx="2">
+            <a:schemeClr val="accent1">
+              <a:shade val="50000"/>
+            </a:schemeClr>
+          </a:lnRef>
+          <a:fillRef idx="1">
+            <a:schemeClr val="accent1"/>
+          </a:fillRef>
+          <a:effectRef idx="0">
+            <a:schemeClr val="accent1"/>
+          </a:effectRef>
+          <a:fontRef idx="minor">
+            <a:schemeClr val="lt1"/>
+          </a:fontRef>
+        </p:style>
+        <p:txBody>
+          <a:bodyPr rtlCol="0" anchor="ctr"/>
+          <a:lstStyle/>
+          <a:p>
+            <a:pPr algn="ctr"/>
+            <a:endParaRPr lang="de-AT"/>
+          </a:p>
+        </p:txBody>
+      </p:sp>
+      <p:sp>
+        <p:nvSpPr>
+          <p:cNvPr id="6" name="Textfeld 5">
+            <a:extLst>
+              <a:ext uri="{FF2B5EF4-FFF2-40B4-BE49-F238E27FC236}">
+                <a16:creationId xmlns:a16="http://schemas.microsoft.com/office/drawing/2014/main" id="{813FEC6F-78C4-477F-8B2B-A5E8F1B4A434}"/>
+              </a:ext>
+            </a:extLst>
+          </p:cNvPr>
+          <p:cNvSpPr txBox="1"/>
+          <p:nvPr/>
+        </p:nvSpPr>
+        <p:spPr>
+          <a:xfrm>
+            <a:off x="2890373" y="1327048"/>
+            <a:ext cx="1013419" cy="584775"/>
+          </a:xfrm>
+          <a:prstGeom prst="rect">
+            <a:avLst/>
+          </a:prstGeom>
+          <a:noFill/>
+        </p:spPr>
+        <p:txBody>
+          <a:bodyPr wrap="none" rtlCol="0">
+            <a:spAutoFit/>
+          </a:bodyPr>
+          <a:lstStyle/>
+          <a:p>
+            <a:r>
+              <a:rPr lang="en-US" sz="3200" dirty="0">
+                <a:solidFill>
+                  <a:schemeClr val="tx2">
+                    <a:lumMod val="75000"/>
+                  </a:schemeClr>
+                </a:solidFill>
+              </a:rPr>
+              <a:t>IEPC </a:t>
+            </a:r>
+            <a:endParaRPr lang="de-AT" sz="3200" dirty="0">
+              <a:solidFill>
+                <a:schemeClr val="tx2">
+                  <a:lumMod val="75000"/>
+                </a:schemeClr>
+              </a:solidFill>
+            </a:endParaRPr>
+          </a:p>
+        </p:txBody>
+      </p:sp>
+      <p:sp>
+        <p:nvSpPr>
+          <p:cNvPr id="7" name="Textfeld 6">
+            <a:extLst>
+              <a:ext uri="{FF2B5EF4-FFF2-40B4-BE49-F238E27FC236}">
+                <a16:creationId xmlns:a16="http://schemas.microsoft.com/office/drawing/2014/main" id="{4550088C-9932-45DE-8946-D854E3DEFFF4}"/>
+              </a:ext>
+            </a:extLst>
+          </p:cNvPr>
+          <p:cNvSpPr txBox="1"/>
+          <p:nvPr/>
+        </p:nvSpPr>
+        <p:spPr>
+          <a:xfrm>
+            <a:off x="3489164" y="1952962"/>
+            <a:ext cx="1532471" cy="400110"/>
+          </a:xfrm>
+          <a:prstGeom prst="rect">
+            <a:avLst/>
+          </a:prstGeom>
+          <a:noFill/>
+        </p:spPr>
+        <p:txBody>
+          <a:bodyPr wrap="none" rtlCol="0">
+            <a:spAutoFit/>
+          </a:bodyPr>
+          <a:lstStyle/>
+          <a:p>
+            <a:r>
+              <a:rPr lang="en-US" sz="2000" dirty="0">
+                <a:solidFill>
+                  <a:schemeClr val="tx2">
+                    <a:lumMod val="75000"/>
+                  </a:schemeClr>
+                </a:solidFill>
+              </a:rPr>
+              <a:t>Transmission</a:t>
+            </a:r>
+            <a:endParaRPr lang="de-AT" sz="2000" dirty="0">
+              <a:solidFill>
+                <a:schemeClr val="tx2">
+                  <a:lumMod val="75000"/>
+                </a:schemeClr>
+              </a:solidFill>
+            </a:endParaRPr>
+          </a:p>
+        </p:txBody>
+      </p:sp>
+      <p:sp>
+        <p:nvSpPr>
+          <p:cNvPr id="8" name="Rechteck 7">
+            <a:extLst>
+              <a:ext uri="{FF2B5EF4-FFF2-40B4-BE49-F238E27FC236}">
+                <a16:creationId xmlns:a16="http://schemas.microsoft.com/office/drawing/2014/main" id="{C858528B-736E-4BF5-BCB5-2CF06A50660D}"/>
+              </a:ext>
+            </a:extLst>
+          </p:cNvPr>
+          <p:cNvSpPr/>
+          <p:nvPr/>
+        </p:nvSpPr>
+        <p:spPr>
+          <a:xfrm>
+            <a:off x="6461795" y="2353072"/>
+            <a:ext cx="1440160" cy="1287760"/>
+          </a:xfrm>
+          <a:prstGeom prst="rect">
+            <a:avLst/>
+          </a:prstGeom>
+          <a:noFill/>
+          <a:ln w="28575"/>
+        </p:spPr>
+        <p:style>
+          <a:lnRef idx="2">
+            <a:schemeClr val="accent1">
+              <a:shade val="50000"/>
+            </a:schemeClr>
+          </a:lnRef>
+          <a:fillRef idx="1">
+            <a:schemeClr val="accent1"/>
+          </a:fillRef>
+          <a:effectRef idx="0">
+            <a:schemeClr val="accent1"/>
+          </a:effectRef>
+          <a:fontRef idx="minor">
+            <a:schemeClr val="lt1"/>
+          </a:fontRef>
+        </p:style>
+        <p:txBody>
+          <a:bodyPr rtlCol="0" anchor="ctr"/>
+          <a:lstStyle/>
+          <a:p>
+            <a:pPr algn="ctr"/>
+            <a:endParaRPr lang="de-AT"/>
+          </a:p>
+        </p:txBody>
+      </p:sp>
+      <p:sp>
+        <p:nvSpPr>
+          <p:cNvPr id="9" name="Textfeld 8">
+            <a:extLst>
+              <a:ext uri="{FF2B5EF4-FFF2-40B4-BE49-F238E27FC236}">
+                <a16:creationId xmlns:a16="http://schemas.microsoft.com/office/drawing/2014/main" id="{CBE3F935-433A-483B-AE09-6C0964B8D6D9}"/>
+              </a:ext>
+            </a:extLst>
+          </p:cNvPr>
+          <p:cNvSpPr txBox="1"/>
+          <p:nvPr/>
+        </p:nvSpPr>
+        <p:spPr>
+          <a:xfrm>
+            <a:off x="6369484" y="1952962"/>
+            <a:ext cx="1671355" cy="400110"/>
+          </a:xfrm>
+          <a:prstGeom prst="rect">
+            <a:avLst/>
+          </a:prstGeom>
+          <a:noFill/>
+        </p:spPr>
+        <p:txBody>
+          <a:bodyPr wrap="none" rtlCol="0">
+            <a:spAutoFit/>
+          </a:bodyPr>
+          <a:lstStyle/>
+          <a:p>
+            <a:r>
+              <a:rPr lang="en-US" sz="2000" dirty="0">
+                <a:solidFill>
+                  <a:schemeClr val="tx2">
+                    <a:lumMod val="75000"/>
+                  </a:schemeClr>
+                </a:solidFill>
+              </a:rPr>
+              <a:t>Electric Motor</a:t>
+            </a:r>
+            <a:endParaRPr lang="de-AT" sz="2000" dirty="0">
+              <a:solidFill>
+                <a:schemeClr val="tx2">
+                  <a:lumMod val="75000"/>
+                </a:schemeClr>
+              </a:solidFill>
+            </a:endParaRPr>
+          </a:p>
+        </p:txBody>
+      </p:sp>
+      <p:cxnSp>
+        <p:nvCxnSpPr>
+          <p:cNvPr id="11" name="Gerader Verbinder 10">
+            <a:extLst>
+              <a:ext uri="{FF2B5EF4-FFF2-40B4-BE49-F238E27FC236}">
+                <a16:creationId xmlns:a16="http://schemas.microsoft.com/office/drawing/2014/main" id="{4C662400-5909-4D0E-BA65-78EB75269044}"/>
+              </a:ext>
+            </a:extLst>
+          </p:cNvPr>
+          <p:cNvCxnSpPr>
+            <a:cxnSpLocks/>
+            <a:endCxn id="5" idx="1"/>
+          </p:cNvCxnSpPr>
+          <p:nvPr/>
+        </p:nvCxnSpPr>
+        <p:spPr>
+          <a:xfrm>
+            <a:off x="2141315" y="2996952"/>
+            <a:ext cx="1440160" cy="0"/>
+          </a:xfrm>
+          <a:prstGeom prst="line">
+            <a:avLst/>
+          </a:prstGeom>
+          <a:ln w="76200">
+            <a:headEnd type="stealth"/>
+          </a:ln>
+        </p:spPr>
+        <p:style>
+          <a:lnRef idx="1">
+            <a:schemeClr val="accent1"/>
+          </a:lnRef>
+          <a:fillRef idx="0">
+            <a:schemeClr val="accent1"/>
+          </a:fillRef>
+          <a:effectRef idx="0">
+            <a:schemeClr val="accent1"/>
+          </a:effectRef>
+          <a:fontRef idx="minor">
+            <a:schemeClr val="tx1"/>
+          </a:fontRef>
+        </p:style>
+      </p:cxnSp>
+      <p:cxnSp>
+        <p:nvCxnSpPr>
+          <p:cNvPr id="13" name="Gerader Verbinder 12">
+            <a:extLst>
+              <a:ext uri="{FF2B5EF4-FFF2-40B4-BE49-F238E27FC236}">
+                <a16:creationId xmlns:a16="http://schemas.microsoft.com/office/drawing/2014/main" id="{45EB623F-F0E2-4735-A9FB-6EA41B32C310}"/>
+              </a:ext>
+            </a:extLst>
+          </p:cNvPr>
+          <p:cNvCxnSpPr>
+            <a:cxnSpLocks/>
+            <a:stCxn id="5" idx="3"/>
+            <a:endCxn id="8" idx="1"/>
+          </p:cNvCxnSpPr>
+          <p:nvPr/>
+        </p:nvCxnSpPr>
+        <p:spPr>
+          <a:xfrm>
+            <a:off x="5021635" y="2996952"/>
+            <a:ext cx="1440160" cy="0"/>
+          </a:xfrm>
+          <a:prstGeom prst="line">
+            <a:avLst/>
+          </a:prstGeom>
+          <a:ln w="76200">
+            <a:headEnd type="stealth"/>
+          </a:ln>
+        </p:spPr>
+        <p:style>
+          <a:lnRef idx="1">
+            <a:schemeClr val="accent1"/>
+          </a:lnRef>
+          <a:fillRef idx="0">
+            <a:schemeClr val="accent1"/>
+          </a:fillRef>
+          <a:effectRef idx="0">
+            <a:schemeClr val="accent1"/>
+          </a:effectRef>
+          <a:fontRef idx="minor">
+            <a:schemeClr val="tx1"/>
+          </a:fontRef>
+        </p:style>
+      </p:cxnSp>
+      <p:pic>
+        <p:nvPicPr>
+          <p:cNvPr id="15" name="Grafik 14" descr="Zahnräder">
+            <a:extLst>
+              <a:ext uri="{FF2B5EF4-FFF2-40B4-BE49-F238E27FC236}">
+                <a16:creationId xmlns:a16="http://schemas.microsoft.com/office/drawing/2014/main" id="{C83FA5BA-DEA9-469F-9A84-4609E6D58EC6}"/>
+              </a:ext>
+            </a:extLst>
+          </p:cNvPr>
+          <p:cNvPicPr>
+            <a:picLocks noChangeAspect="1"/>
+          </p:cNvPicPr>
+          <p:nvPr/>
+        </p:nvPicPr>
+        <p:blipFill>
+          <a:blip r:embed="rId2">
+            <a:extLst>
+              <a:ext uri="{28A0092B-C50C-407E-A947-70E740481C1C}">
+                <a14:useLocalDpi xmlns:a14="http://schemas.microsoft.com/office/drawing/2010/main" val="0"/>
+              </a:ext>
+              <a:ext uri="{96DAC541-7B7A-43D3-8B79-37D633B846F1}">
+                <asvg:svgBlip xmlns:asvg="http://schemas.microsoft.com/office/drawing/2016/SVG/main" r:embed="rId3"/>
+              </a:ext>
+            </a:extLst>
+          </a:blip>
+          <a:stretch>
+            <a:fillRect/>
+          </a:stretch>
+        </p:blipFill>
+        <p:spPr>
+          <a:xfrm>
+            <a:off x="3798199" y="2636912"/>
+            <a:ext cx="914400" cy="914400"/>
+          </a:xfrm>
+          <a:prstGeom prst="rect">
+            <a:avLst/>
+          </a:prstGeom>
+        </p:spPr>
+      </p:pic>
+      <p:sp>
+        <p:nvSpPr>
+          <p:cNvPr id="16" name="Textfeld 15">
+            <a:extLst>
+              <a:ext uri="{FF2B5EF4-FFF2-40B4-BE49-F238E27FC236}">
+                <a16:creationId xmlns:a16="http://schemas.microsoft.com/office/drawing/2014/main" id="{7976057B-EA14-45F1-81CC-066A41645B11}"/>
+              </a:ext>
+            </a:extLst>
+          </p:cNvPr>
+          <p:cNvSpPr txBox="1"/>
+          <p:nvPr/>
+        </p:nvSpPr>
+        <p:spPr>
+          <a:xfrm>
+            <a:off x="3941515" y="2456502"/>
+            <a:ext cx="463268" cy="215444"/>
+          </a:xfrm>
+          <a:prstGeom prst="rect">
+            <a:avLst/>
+          </a:prstGeom>
+          <a:noFill/>
+        </p:spPr>
+        <p:txBody>
+          <a:bodyPr wrap="none" lIns="0" tIns="0" rIns="0" bIns="0" rtlCol="0">
+            <a:spAutoFit/>
+          </a:bodyPr>
+          <a:lstStyle/>
+          <a:p>
+            <a:r>
+              <a:rPr lang="en-US" sz="1400" i="1" dirty="0" err="1">
+                <a:solidFill>
+                  <a:schemeClr val="tx2">
+                    <a:lumMod val="75000"/>
+                  </a:schemeClr>
+                </a:solidFill>
+              </a:rPr>
+              <a:t>i_gear</a:t>
+            </a:r>
+            <a:endParaRPr lang="de-AT" sz="1400" i="1" dirty="0">
+              <a:solidFill>
+                <a:schemeClr val="tx2">
+                  <a:lumMod val="75000"/>
+                </a:schemeClr>
+              </a:solidFill>
+            </a:endParaRPr>
+          </a:p>
+        </p:txBody>
+      </p:sp>
+      <p:sp>
+        <p:nvSpPr>
+          <p:cNvPr id="17" name="Textfeld 16">
+            <a:extLst>
+              <a:ext uri="{FF2B5EF4-FFF2-40B4-BE49-F238E27FC236}">
+                <a16:creationId xmlns:a16="http://schemas.microsoft.com/office/drawing/2014/main" id="{19B97C51-AF85-4ACA-BE79-5D34607B71EE}"/>
+              </a:ext>
+            </a:extLst>
+          </p:cNvPr>
+          <p:cNvSpPr txBox="1"/>
+          <p:nvPr/>
+        </p:nvSpPr>
+        <p:spPr>
+          <a:xfrm>
+            <a:off x="6677819" y="2529190"/>
+            <a:ext cx="479298" cy="215444"/>
+          </a:xfrm>
+          <a:prstGeom prst="rect">
+            <a:avLst/>
+          </a:prstGeom>
+          <a:noFill/>
+        </p:spPr>
+        <p:txBody>
+          <a:bodyPr wrap="none" lIns="0" tIns="0" rIns="0" bIns="0" rtlCol="0">
+            <a:spAutoFit/>
+          </a:bodyPr>
+          <a:lstStyle/>
+          <a:p>
+            <a:r>
+              <a:rPr lang="en-US" sz="1400" i="1" dirty="0">
+                <a:solidFill>
+                  <a:schemeClr val="tx2">
+                    <a:lumMod val="75000"/>
+                  </a:schemeClr>
+                </a:solidFill>
+              </a:rPr>
+              <a:t>Inertia</a:t>
+            </a:r>
+            <a:endParaRPr lang="de-AT" sz="1400" i="1" dirty="0">
+              <a:solidFill>
+                <a:schemeClr val="tx2">
+                  <a:lumMod val="75000"/>
+                </a:schemeClr>
+              </a:solidFill>
+            </a:endParaRPr>
+          </a:p>
+        </p:txBody>
+      </p:sp>
+      <p:sp>
+        <p:nvSpPr>
+          <p:cNvPr id="18" name="Textfeld 17">
+            <a:extLst>
+              <a:ext uri="{FF2B5EF4-FFF2-40B4-BE49-F238E27FC236}">
+                <a16:creationId xmlns:a16="http://schemas.microsoft.com/office/drawing/2014/main" id="{18EE2D82-21C2-4D6E-B00E-36BD67E34143}"/>
+              </a:ext>
+            </a:extLst>
+          </p:cNvPr>
+          <p:cNvSpPr txBox="1"/>
+          <p:nvPr/>
+        </p:nvSpPr>
+        <p:spPr>
+          <a:xfrm>
+            <a:off x="6650442" y="2880458"/>
+            <a:ext cx="903517" cy="215444"/>
+          </a:xfrm>
+          <a:prstGeom prst="rect">
+            <a:avLst/>
+          </a:prstGeom>
+          <a:noFill/>
+        </p:spPr>
+        <p:txBody>
+          <a:bodyPr wrap="none" lIns="0" tIns="0" rIns="0" bIns="0" rtlCol="0">
+            <a:spAutoFit/>
+          </a:bodyPr>
+          <a:lstStyle/>
+          <a:p>
+            <a:r>
+              <a:rPr lang="en-US" sz="1400" i="1" dirty="0">
+                <a:solidFill>
+                  <a:schemeClr val="tx2">
+                    <a:lumMod val="75000"/>
+                  </a:schemeClr>
+                </a:solidFill>
+              </a:rPr>
+              <a:t>Power Maps</a:t>
+            </a:r>
+            <a:endParaRPr lang="de-AT" sz="1400" i="1" dirty="0">
+              <a:solidFill>
+                <a:schemeClr val="tx2">
+                  <a:lumMod val="75000"/>
+                </a:schemeClr>
+              </a:solidFill>
+            </a:endParaRPr>
+          </a:p>
+        </p:txBody>
+      </p:sp>
+      <p:sp>
+        <p:nvSpPr>
+          <p:cNvPr id="19" name="Textfeld 18">
+            <a:extLst>
+              <a:ext uri="{FF2B5EF4-FFF2-40B4-BE49-F238E27FC236}">
+                <a16:creationId xmlns:a16="http://schemas.microsoft.com/office/drawing/2014/main" id="{F53A5D76-7566-4379-B56A-E64B2527FE3C}"/>
+              </a:ext>
+            </a:extLst>
+          </p:cNvPr>
+          <p:cNvSpPr txBox="1"/>
+          <p:nvPr/>
+        </p:nvSpPr>
+        <p:spPr>
+          <a:xfrm>
+            <a:off x="6653197" y="3231726"/>
+            <a:ext cx="812787" cy="215444"/>
+          </a:xfrm>
+          <a:prstGeom prst="rect">
+            <a:avLst/>
+          </a:prstGeom>
+          <a:noFill/>
+        </p:spPr>
+        <p:txBody>
+          <a:bodyPr wrap="none" lIns="0" tIns="0" rIns="0" bIns="0" rtlCol="0">
+            <a:spAutoFit/>
+          </a:bodyPr>
+          <a:lstStyle/>
+          <a:p>
+            <a:r>
+              <a:rPr lang="en-US" sz="1400" i="1" dirty="0">
+                <a:solidFill>
+                  <a:schemeClr val="tx2">
+                    <a:lumMod val="75000"/>
+                  </a:schemeClr>
+                </a:solidFill>
+              </a:rPr>
+              <a:t>Drag Curve</a:t>
+            </a:r>
+            <a:endParaRPr lang="de-AT" sz="1400" i="1" dirty="0">
+              <a:solidFill>
+                <a:schemeClr val="tx2">
+                  <a:lumMod val="75000"/>
+                </a:schemeClr>
+              </a:solidFill>
+            </a:endParaRPr>
+          </a:p>
+        </p:txBody>
+      </p:sp>
+      <p:sp>
+        <p:nvSpPr>
+          <p:cNvPr id="23" name="Textfeld 22">
+            <a:extLst>
+              <a:ext uri="{FF2B5EF4-FFF2-40B4-BE49-F238E27FC236}">
+                <a16:creationId xmlns:a16="http://schemas.microsoft.com/office/drawing/2014/main" id="{FEC9FB62-97AA-40E2-953B-6D2360E86FF0}"/>
+              </a:ext>
+            </a:extLst>
+          </p:cNvPr>
+          <p:cNvSpPr txBox="1"/>
+          <p:nvPr/>
+        </p:nvSpPr>
+        <p:spPr>
+          <a:xfrm>
+            <a:off x="1749807" y="2564224"/>
+            <a:ext cx="859210" cy="215444"/>
+          </a:xfrm>
+          <a:prstGeom prst="rect">
+            <a:avLst/>
+          </a:prstGeom>
+          <a:noFill/>
+        </p:spPr>
+        <p:txBody>
+          <a:bodyPr wrap="none" lIns="0" tIns="0" rIns="0" bIns="0" rtlCol="0">
+            <a:spAutoFit/>
+          </a:bodyPr>
+          <a:lstStyle/>
+          <a:p>
+            <a:r>
+              <a:rPr lang="en-US" sz="1400" i="1" dirty="0" err="1">
+                <a:solidFill>
+                  <a:schemeClr val="tx2">
+                    <a:lumMod val="75000"/>
+                  </a:schemeClr>
+                </a:solidFill>
+              </a:rPr>
+              <a:t>n_IEPC_avg</a:t>
+            </a:r>
+            <a:endParaRPr lang="de-AT" sz="1400" i="1" dirty="0">
+              <a:solidFill>
+                <a:schemeClr val="tx2">
+                  <a:lumMod val="75000"/>
+                </a:schemeClr>
+              </a:solidFill>
+            </a:endParaRPr>
+          </a:p>
+        </p:txBody>
+      </p:sp>
+      <p:sp>
+        <p:nvSpPr>
+          <p:cNvPr id="25" name="Textfeld 24">
+            <a:extLst>
+              <a:ext uri="{FF2B5EF4-FFF2-40B4-BE49-F238E27FC236}">
+                <a16:creationId xmlns:a16="http://schemas.microsoft.com/office/drawing/2014/main" id="{587CFD8F-2604-4670-B3AD-6992DF500081}"/>
+              </a:ext>
+            </a:extLst>
+          </p:cNvPr>
+          <p:cNvSpPr txBox="1"/>
+          <p:nvPr/>
+        </p:nvSpPr>
+        <p:spPr>
+          <a:xfrm>
+            <a:off x="1719285" y="3162109"/>
+            <a:ext cx="833562" cy="215444"/>
+          </a:xfrm>
+          <a:prstGeom prst="rect">
+            <a:avLst/>
+          </a:prstGeom>
+          <a:noFill/>
+        </p:spPr>
+        <p:txBody>
+          <a:bodyPr wrap="none" lIns="0" tIns="0" rIns="0" bIns="0" rtlCol="0">
+            <a:spAutoFit/>
+          </a:bodyPr>
+          <a:lstStyle/>
+          <a:p>
+            <a:r>
+              <a:rPr lang="en-US" sz="1400" i="1" dirty="0" err="1">
+                <a:solidFill>
+                  <a:schemeClr val="tx2">
+                    <a:lumMod val="75000"/>
+                  </a:schemeClr>
+                </a:solidFill>
+              </a:rPr>
+              <a:t>T_IEPC_out</a:t>
+            </a:r>
+            <a:endParaRPr lang="de-AT" sz="1400" i="1" dirty="0">
+              <a:solidFill>
+                <a:schemeClr val="tx2">
+                  <a:lumMod val="75000"/>
+                </a:schemeClr>
+              </a:solidFill>
+            </a:endParaRPr>
+          </a:p>
+        </p:txBody>
+      </p:sp>
+      <p:sp>
+        <p:nvSpPr>
+          <p:cNvPr id="26" name="Textfeld 25">
+            <a:extLst>
+              <a:ext uri="{FF2B5EF4-FFF2-40B4-BE49-F238E27FC236}">
+                <a16:creationId xmlns:a16="http://schemas.microsoft.com/office/drawing/2014/main" id="{AAAEB9D4-6DA1-497D-8DE2-885BF111410F}"/>
+              </a:ext>
+            </a:extLst>
+          </p:cNvPr>
+          <p:cNvSpPr txBox="1"/>
+          <p:nvPr/>
+        </p:nvSpPr>
+        <p:spPr>
+          <a:xfrm>
+            <a:off x="5264801" y="2560060"/>
+            <a:ext cx="1142813" cy="215444"/>
+          </a:xfrm>
+          <a:prstGeom prst="rect">
+            <a:avLst/>
+          </a:prstGeom>
+          <a:noFill/>
+        </p:spPr>
+        <p:txBody>
+          <a:bodyPr wrap="none" lIns="0" tIns="0" rIns="0" bIns="0" rtlCol="0">
+            <a:spAutoFit/>
+          </a:bodyPr>
+          <a:lstStyle/>
+          <a:p>
+            <a:r>
+              <a:rPr lang="en-US" sz="1400" i="1" dirty="0" err="1">
+                <a:solidFill>
+                  <a:schemeClr val="tx2">
+                    <a:lumMod val="75000"/>
+                  </a:schemeClr>
+                </a:solidFill>
+              </a:rPr>
+              <a:t>n_IEPC_int_avg</a:t>
+            </a:r>
+            <a:endParaRPr lang="de-AT" sz="1400" i="1" dirty="0">
+              <a:solidFill>
+                <a:schemeClr val="tx2">
+                  <a:lumMod val="75000"/>
+                </a:schemeClr>
+              </a:solidFill>
+            </a:endParaRPr>
+          </a:p>
+        </p:txBody>
+      </p:sp>
+      <p:sp>
+        <p:nvSpPr>
+          <p:cNvPr id="27" name="Textfeld 26">
+            <a:extLst>
+              <a:ext uri="{FF2B5EF4-FFF2-40B4-BE49-F238E27FC236}">
+                <a16:creationId xmlns:a16="http://schemas.microsoft.com/office/drawing/2014/main" id="{1EE71155-AA2C-4004-928C-708E7941235E}"/>
+              </a:ext>
+            </a:extLst>
+          </p:cNvPr>
+          <p:cNvSpPr txBox="1"/>
+          <p:nvPr/>
+        </p:nvSpPr>
+        <p:spPr>
+          <a:xfrm>
+            <a:off x="5391932" y="3160196"/>
+            <a:ext cx="782137" cy="215444"/>
+          </a:xfrm>
+          <a:prstGeom prst="rect">
+            <a:avLst/>
+          </a:prstGeom>
+          <a:noFill/>
+        </p:spPr>
+        <p:txBody>
+          <a:bodyPr wrap="none" lIns="0" tIns="0" rIns="0" bIns="0" rtlCol="0">
+            <a:spAutoFit/>
+          </a:bodyPr>
+          <a:lstStyle/>
+          <a:p>
+            <a:r>
+              <a:rPr lang="en-US" sz="1400" i="1" dirty="0" err="1">
+                <a:solidFill>
+                  <a:schemeClr val="tx2">
+                    <a:lumMod val="75000"/>
+                  </a:schemeClr>
+                </a:solidFill>
+              </a:rPr>
+              <a:t>T_IEPC_int</a:t>
+            </a:r>
+            <a:endParaRPr lang="de-AT" sz="1400" i="1" dirty="0">
+              <a:solidFill>
+                <a:schemeClr val="tx2">
+                  <a:lumMod val="75000"/>
+                </a:schemeClr>
+              </a:solidFill>
+            </a:endParaRPr>
+          </a:p>
+        </p:txBody>
+      </p:sp>
+    </p:spTree>
+    <p:extLst>
+      <p:ext uri="{BB962C8B-B14F-4D97-AF65-F5344CB8AC3E}">
+        <p14:creationId xmlns:p14="http://schemas.microsoft.com/office/powerpoint/2010/main" val="3388675800"/>
+      </p:ext>
+    </p:extLst>
+  </p:cSld>
+  <p:clrMapOvr>
+    <a:masterClrMapping/>
+  </p:clrMapOvr>
+</p:sld>
+</file>
+
 <file path=ppt/slides/slide3.xml><?xml version="1.0" encoding="utf-8"?>
 <p:sld xmlns:a="http://schemas.openxmlformats.org/drawingml/2006/main" xmlns:r="http://schemas.openxmlformats.org/officeDocument/2006/relationships" xmlns:p="http://schemas.openxmlformats.org/presentationml/2006/main">
   <p:cSld>
